--- a/docs/Sistema-PAA-apresentacao-v5.pptx
+++ b/docs/Sistema-PAA-apresentacao-v5.pptx
@@ -26,9 +26,10 @@
     <p:sldId id="274" r:id="rId20"/>
     <p:sldId id="275" r:id="rId21"/>
     <p:sldId id="276" r:id="rId22"/>
+    <p:sldId id="277" r:id="rId23"/>
   </p:sldIdLst>
   <p:notesMasterIdLst>
-    <p:notesMasterId r:id="rId23"/>
+    <p:notesMasterId r:id="rId24"/>
   </p:notesMasterIdLst>
   <p:sldSz cx="12192000" cy="6858000"/>
   <p:notesSz cx="6858000" cy="12192000"/>
@@ -127,26 +128,26 @@
   <p:extLst>
     <p:ext uri="{521415D9-36F7-43E2-AB2F-B90AF26B5E84}">
       <p14:sectionLst xmlns:p14="http://schemas.microsoft.com/office/powerpoint/2010/main">
-        <p14:section name="The plan" id="{61d85298-81cd-e013-057e-a70f5003f60b}">
+        <p14:section name="The plan" id="{135eb730-0567-c8cb-ebf5-e1d8f9a9e67c}">
           <p14:sldIdLst>
             <p14:sldId id="256"/>
             <p14:sldId id="257"/>
             <p14:sldId id="258"/>
           </p14:sldIdLst>
         </p14:section>
-        <p14:section name="The year of the plan" id="{c283e32e-299d-4053-8e02-3761f65b463e}">
+        <p14:section name="The year of the plan" id="{42c82ed5-279f-e903-380d-d40f3e14b482}">
           <p14:sldIdLst>
             <p14:sldId id="259"/>
             <p14:sldId id="260"/>
           </p14:sldIdLst>
         </p14:section>
-        <p14:section name="Writing the plan" id="{71beb845-ed43-22c3-b484-cbc0cd9d64f4}">
+        <p14:section name="Writing the plan" id="{6d9833ef-bb5d-4d44-2131-46d8e13ce928}">
           <p14:sldIdLst>
             <p14:sldId id="261"/>
             <p14:sldId id="262"/>
           </p14:sldIdLst>
         </p14:section>
-        <p14:section name="Approving the plan" id="{445132e9-ae2d-3909-6b29-207b5b01684b}">
+        <p14:section name="Approving the plan" id="{b85aa03d-e4ff-86e4-e89a-b74d006b0319}">
           <p14:sldIdLst>
             <p14:sldId id="263"/>
             <p14:sldId id="264"/>
@@ -155,25 +156,26 @@
             <p14:sldId id="267"/>
           </p14:sldIdLst>
         </p14:section>
-        <p14:section name="Funding and carrying out the plan" id="{7944fc0b-9e09-1e46-a232-bcd5c98f0529}">
+        <p14:section name="Changing and carrying out the plan" id="{d1557759-3146-1557-b94a-ba9cc53245dd}">
           <p14:sldIdLst>
             <p14:sldId id="268"/>
             <p14:sldId id="269"/>
+            <p14:sldId id="270"/>
           </p14:sldIdLst>
         </p14:section>
-        <p14:section name="Reporting and trust" id="{a57d21b2-66f2-e5c7-2181-2261acf76900}">
+        <p14:section name="Reporting and trust" id="{6566bcdf-0182-c559-3200-079e1a3dc756}">
           <p14:sldIdLst>
-            <p14:sldId id="270"/>
             <p14:sldId id="271"/>
             <p14:sldId id="272"/>
             <p14:sldId id="273"/>
             <p14:sldId id="274"/>
             <p14:sldId id="275"/>
+            <p14:sldId id="276"/>
           </p14:sldIdLst>
         </p14:section>
-        <p14:section name="Next" id="{156eeb90-e1ae-898a-57bf-c437f839c9be}">
+        <p14:section name="Next" id="{56bb5ab1-c75a-0f86-7ff5-1a0cff3463fd}">
           <p14:sldIdLst>
-            <p14:sldId id="276"/>
+            <p14:sldId id="277"/>
           </p14:sldIdLst>
         </p14:section>
       </p14:sectionLst>
@@ -580,7 +582,7 @@
           <a:p>
             <a:r>
               <a:rPr lang="en-US" dirty="0"/>
-              <a:t>The application is the Annual Action Plan. Everything else, approval, budget, execution and reports, exists to write the plan, approve it, pay for it, carry it out and report on it. It is not tied to one institution; the Ministry of Transport and Communications appears only as a sample dataset.</a:t>
+              <a:t>The application is the Annual Action Plan. Everything else, approval, revisions, execution and reports, exists to write the plan, approve it, keep it true when it has to change, carry it out and report on it. There is no separate budget to register or distribute: the plan carries its own budget lines. It is not tied to one institution; the Ministry of Transport and Communications appears only as a sample dataset.</a:t>
             </a:r>
             <a:endParaRPr lang="en-US" dirty="0"/>
           </a:p>
@@ -844,7 +846,7 @@
           <a:p>
             <a:r>
               <a:rPr lang="en-US" dirty="0"/>
-              <a:t>The head of each top-level unit finalizes the plan of their own directorate once nothing in it waits for a decision. A finalized directorate takes no new activities, imports or roll-forward copies for the year; the others keep planning. The year ends when all directorates that planned have finalized, or when the envelope is received; the plan can be reopened by the head or an administrator, with a reason, only before the envelope.</a:t>
+              <a:t>The head of each top-level unit finalizes the plan of their own directorate once nothing in it waits for a decision. A finalized directorate takes no new activities, imports or roll-forward copies for the year; the others keep planning. The year ends when all directorates that planned have finalized; planning can be reopened by the head or an administrator, with a reason. Revisions are not stopped by finalizing.</a:t>
             </a:r>
             <a:endParaRPr lang="en-US" dirty="0"/>
           </a:p>
@@ -932,7 +934,7 @@
           <a:p>
             <a:r>
               <a:rPr lang="en-US" dirty="0"/>
-              <a:t>The envelope is what the institution receives: the State Budget allocation for a ministry, an allocation from the ministry for a directorate. It is registered with its reference and approved. The distribution uses approved activities only, never gives a line more than it asked for, is exact to the cent and runs in one transaction. A surplus stays unallocated.</a:t>
+              <a:t>There is no envelope and no distribution: what an approved activity may spend is what its approved version says. To change it, someone who prepares for the unit, its director, the final approver or an administrator starts a revision with a reason. The activity becomes a draft the unit can edit and goes through preparation, certification and approval again; meanwhile the approved version stays in force and spending is reported against it. The banner lists exactly what changes against the version in force.</a:t>
             </a:r>
             <a:endParaRPr lang="en-US" dirty="0"/>
           </a:p>
@@ -1020,7 +1022,7 @@
           <a:p>
             <a:r>
               <a:rPr lang="en-US" dirty="0"/>
-              <a:t>Each month the unit reports committed and paid per budget line. Each quarter it reports the indicators. Every month and quarter has a narrative. Figures count only once someone other than the reporter verifies them. Directors compile the quarter: the system drafts the text from what the units reported and the director edits and saves it.</a:t>
+              <a:t>Each approval makes a version: a copy of the activity, its indicators with their actions and its budget lines, kept as it was. The history lists every version with who approved it, when, the total and the reason for the revision, and opens what was approved. A budget line with spending reported, or an indicator with progress reported, cannot be removed by a revision; an activity approved once is revised, never deleted.</a:t>
             </a:r>
             <a:endParaRPr lang="en-US" dirty="0"/>
           </a:p>
@@ -1108,7 +1110,7 @@
           <a:p>
             <a:r>
               <a:rPr lang="en-US" dirty="0"/>
-              <a:t>Three printed forms follow the formal template: the final plan report (complete or summary), the implementation plan of a unit with its actions and the Jan-Dec grid, and the performance report monthly or quarterly. A4 landscape, programme and subprogramme bands, print or PDF. The final plan report is of the plan; it is not addressed to anyone.</a:t>
+              <a:t>Each month the unit reports committed and paid per budget line. Each quarter it reports the indicators. Every month and quarter has a narrative. Figures count only once someone other than the reporter verifies them. Directors compile the quarter: the system drafts the text from what the units reported and the director edits and saves it.</a:t>
             </a:r>
             <a:endParaRPr lang="en-US" dirty="0"/>
           </a:p>
@@ -1196,7 +1198,7 @@
           <a:p>
             <a:r>
               <a:rPr lang="en-US" dirty="0"/>
-              <a:t>Six roles. The Minister sees every plan and approves the fiscal envelope but does not approve plans. The head of a directorate approves their own directorate's plans. Finance confirms budget lines and verifies spending. Permissions are checked on the server for every action.</a:t>
+              <a:t>Three printed forms follow the formal template: the final plan report (complete or summary), the implementation plan of a unit with its actions and the Jan-Dec grid, and the performance report monthly or quarterly. A4 landscape, programme and subprogramme bands, print or PDF. The final plan report is of the plan; it is not addressed to anyone.</a:t>
             </a:r>
             <a:endParaRPr lang="en-US" dirty="0"/>
           </a:p>
@@ -1284,7 +1286,7 @@
           <a:p>
             <a:r>
               <a:rPr lang="en-US" dirty="0"/>
-              <a:t>Compact tables, status chips with a dot and a word, figures that line up. Automated accessibility checks pass on every screen, and every text exists in English, Portuguese and Tetum.</a:t>
+              <a:t>Six roles. The Minister sees every plan and every report but does not approve plans. The head of a directorate approves their own directorate's plans. Finance confirms budget lines and verifies spending. Permissions are checked on the server for every action.</a:t>
             </a:r>
             <a:endParaRPr lang="en-US" dirty="0"/>
           </a:p>
@@ -1372,7 +1374,7 @@
           <a:p>
             <a:r>
               <a:rPr lang="en-US" dirty="0"/>
-              <a:t>The Ministry of Transport and Communications is only a sample. A deployment serves one institution; you can start with a single directorate or office and add the rest later. Each directorate and unit has its own users.</a:t>
+              <a:t>Compact tables, status chips with a dot and a word, figures that line up. Automated accessibility checks pass on every screen, and every text exists in English, Portuguese and Tetum.</a:t>
             </a:r>
             <a:endParaRPr lang="en-US" dirty="0"/>
           </a:p>
@@ -1460,7 +1462,7 @@
           <a:p>
             <a:r>
               <a:rPr lang="en-US" dirty="0"/>
-              <a:t>The audit log records every change with who and when. Permissions are checked on the server. Two-factor sign-in, closed registration, nightly backups, and 375 automated tests that guard the approval and budget rules.</a:t>
+              <a:t>The Ministry of Transport and Communications is only a sample. A deployment serves one institution; you can start with a single directorate or office and add the rest later. Each directorate and unit has its own users.</a:t>
             </a:r>
             <a:endParaRPr lang="en-US" dirty="0"/>
           </a:p>
@@ -1636,7 +1638,7 @@
           <a:p>
             <a:r>
               <a:rPr lang="en-US" dirty="0"/>
-              <a:t>An administrator loads the optional sample at Management, Sample Data: a ministry with its directorates, municipal directorates and autonomous bodies, each with its planner and its director. Purging removes only the sample.</a:t>
+              <a:t>The audit log records every change with who and when. Permissions are checked on the server. Two-factor sign-in, closed registration, nightly backups, and more than 360 automated tests that guard the approval and revision rules.</a:t>
             </a:r>
             <a:endParaRPr lang="en-US" dirty="0"/>
           </a:p>
@@ -1724,7 +1726,7 @@
           <a:p>
             <a:r>
               <a:rPr lang="en-US" dirty="0"/>
-              <a:t>Close with the ask: agree the pilot directorate and the deployment date.</a:t>
+              <a:t>An administrator loads the optional sample at Management, Sample Data: a ministry with its directorates, municipal directorates and autonomous bodies, each with its planner and its director. Purging removes only the sample.</a:t>
             </a:r>
             <a:endParaRPr lang="en-US" dirty="0"/>
           </a:p>
@@ -1748,6 +1750,94 @@
             <a:fld id="{F7021451-1387-4CA6-816F-3879F97B5CBC}" type="slidenum">
               <a:rPr lang="en-US"/>
               <a:t>21</a:t>
+            </a:fld>
+            <a:endParaRPr lang="en-US"/>
+          </a:p>
+        </p:txBody>
+      </p:sp>
+    </p:spTree>
+    <p:extLst>
+      <p:ext uri="{BB962C8B-B14F-4D97-AF65-F5344CB8AC3E}">
+        <p14:creationId xmlns:p14="http://schemas.microsoft.com/office/powerpoint/2010/main" val="1024086991"/>
+      </p:ext>
+    </p:extLst>
+  </p:cSld>
+  <p:clrMapOvr>
+    <a:masterClrMapping/>
+  </p:clrMapOvr>
+</p:notes>
+</file>
+
+<file path=ppt/notesSlides/notesSlide22.xml><?xml version="1.0" encoding="utf-8"?>
+<p:notes xmlns:a="http://schemas.openxmlformats.org/drawingml/2006/main" xmlns:r="http://schemas.openxmlformats.org/officeDocument/2006/relationships" xmlns:p="http://schemas.openxmlformats.org/presentationml/2006/main">
+  <p:cSld>
+    <p:spTree>
+      <p:nvGrpSpPr>
+        <p:cNvPr id="1" name=""/>
+        <p:cNvGrpSpPr/>
+        <p:nvPr/>
+      </p:nvGrpSpPr>
+      <p:grpSpPr>
+        <a:xfrm>
+          <a:off x="0" y="0"/>
+          <a:ext cx="0" cy="0"/>
+          <a:chOff x="0" y="0"/>
+          <a:chExt cx="0" cy="0"/>
+        </a:xfrm>
+      </p:grpSpPr>
+      <p:sp>
+        <p:nvSpPr>
+          <p:cNvPr id="2" name="Slide Image Placeholder 1"/>
+          <p:cNvSpPr>
+            <a:spLocks noGrp="1" noRot="1" noChangeAspect="1"/>
+          </p:cNvSpPr>
+          <p:nvPr>
+            <p:ph type="sldImg"/>
+          </p:nvPr>
+        </p:nvSpPr>
+        <p:spPr/>
+      </p:sp>
+      <p:sp>
+        <p:nvSpPr>
+          <p:cNvPr id="3" name="Notes Placeholder 2"/>
+          <p:cNvSpPr>
+            <a:spLocks noGrp="1"/>
+          </p:cNvSpPr>
+          <p:nvPr>
+            <p:ph type="body" idx="1"/>
+          </p:nvPr>
+        </p:nvSpPr>
+        <p:spPr/>
+        <p:txBody>
+          <a:bodyPr/>
+          <a:lstStyle/>
+          <a:p>
+            <a:r>
+              <a:rPr lang="en-US" dirty="0"/>
+              <a:t>Close with the ask: agree the pilot directorate and the deployment date.</a:t>
+            </a:r>
+            <a:endParaRPr lang="en-US" dirty="0"/>
+          </a:p>
+        </p:txBody>
+      </p:sp>
+      <p:sp>
+        <p:nvSpPr>
+          <p:cNvPr id="4" name="Slide Number Placeholder 3"/>
+          <p:cNvSpPr>
+            <a:spLocks noGrp="1"/>
+          </p:cNvSpPr>
+          <p:nvPr>
+            <p:ph type="sldNum" sz="quarter" idx="10"/>
+          </p:nvPr>
+        </p:nvSpPr>
+        <p:spPr/>
+        <p:txBody>
+          <a:bodyPr/>
+          <a:lstStyle/>
+          <a:p>
+            <a:fld id="{F7021451-1387-4CA6-816F-3879F97B5CBC}" type="slidenum">
+              <a:rPr lang="en-US"/>
+              <a:t>22</a:t>
             </a:fld>
             <a:endParaRPr lang="en-US"/>
           </a:p>
@@ -1812,7 +1902,7 @@
           <a:p>
             <a:r>
               <a:rPr lang="en-US" dirty="0"/>
-              <a:t>The plan is at the centre. Units write it, directorates approve and finalize it, the budget received pays for it, units carry it out and report on it, and the reports are the plan and its results in the formal template. Every step is in the audit record.</a:t>
+              <a:t>The plan is at the centre. Units write it, directorates approve and finalize it, a revision changes an approved activity into a new version, units carry it out and report on it, and the reports are the plan and its results in the formal template. Every step and every version is in the audit record.</a:t>
             </a:r>
             <a:endParaRPr lang="en-US" dirty="0"/>
           </a:p>
@@ -1900,7 +1990,7 @@
           <a:p>
             <a:r>
               <a:rPr lang="en-US" dirty="0"/>
-              <a:t>The life of the Annual Action Plan over the year. Planning ends per directorate; the whole year's planning ends when every directorate that planned has finalized, or when the envelope is received. The plan cannot be reopened after the envelope; only its distribution changes.</a:t>
+              <a:t>The life of the Annual Action Plan over the year. Planning ends per directorate; the whole year's planning ends when every directorate that planned has finalized. Finalizing stops new activities only; approved activities can still be revised at any time.</a:t>
             </a:r>
             <a:endParaRPr lang="en-US" dirty="0"/>
           </a:p>
@@ -1988,7 +2078,7 @@
           <a:p>
             <a:r>
               <a:rPr lang="en-US" dirty="0"/>
-              <a:t>The Plan cycle page and the dashboard show the same six steps and which one is current. Windows are set by the administrator; with no dates a window is open.</a:t>
+              <a:t>The Plan cycle page and the dashboard show the same steps and which one is current. Windows are set by the administrator; with no dates a window is open.</a:t>
             </a:r>
             <a:endParaRPr lang="en-US" dirty="0"/>
           </a:p>
@@ -2252,7 +2342,7 @@
           <a:p>
             <a:r>
               <a:rPr lang="en-US" dirty="0"/>
-              <a:t>Statuses: Draft (being prepared), Prepared (submitted), Verified (certified by the unit's director, where a unit above validates first), Certified (validated), Approved. The head of the top-level unit gives the final approval; the Minister does not approve plans. A return needs a reason; an approved activity is locked and can be reopened with a reason until the envelope is received.</a:t>
+              <a:t>Statuses: Draft (being prepared), Prepared (submitted), Verified (certified by the unit's director, where a unit above validates first), Certified (validated), Approved. The head of the top-level unit gives the final approval; the Minister does not approve plans. A return needs a reason; an approved activity is not edited: it is revised, with a reason, through the whole chain again.</a:t>
             </a:r>
             <a:endParaRPr lang="en-US" dirty="0"/>
           </a:p>
@@ -3183,7 +3273,7 @@
                   <a:schemeClr val="bg2"/>
                 </a:solidFill>
               </a:rPr>
-              <a:t>The Annual Action Plan of a public body: written by its units, approved by its directorates, paid for by its budget, carried out and reported through the year</a:t>
+              <a:t>The Annual Action Plan of a public body: written by its units, approved by its directorates, revised through versions, carried out and reported</a:t>
             </a:r>
             <a:endParaRPr lang="en-US" sz="2000" dirty="0"/>
           </a:p>
@@ -5012,7 +5102,7 @@
                   <a:schemeClr val="tx1"/>
                 </a:solidFill>
               </a:rPr>
-              <a:t>Only the head or an administrator, only before the envelope is received. All of it is in the audit trail.</a:t>
+              <a:t>Only the head or an administrator, with a reason; all of it is in the audit trail. Approved activities can still be revised.</a:t>
             </a:r>
             <a:endParaRPr lang="en-US" sz="1800" dirty="0"/>
           </a:p>
@@ -5120,7 +5210,7 @@
                   <a:schemeClr val="tx1"/>
                 </a:solidFill>
               </a:rPr>
-              <a:t>The budget pays for the approved plan</a:t>
+              <a:t>Changing an approved activity: a revision</a:t>
             </a:r>
             <a:endParaRPr lang="en-US" sz="3400" dirty="0"/>
           </a:p>
@@ -5128,7 +5218,7 @@
       </p:sp>
       <p:sp>
         <p:nvSpPr>
-          <p:cNvPr id="4" name="Frame envelope"/>
+          <p:cNvPr id="4" name="Frame activity-revision"/>
           <p:cNvSpPr/>
           <p:nvPr/>
         </p:nvSpPr>
@@ -5148,7 +5238,7 @@
       </p:sp>
       <p:pic>
         <p:nvPicPr>
-          <p:cNvPr id="5" name="Screenshot envelope" descr="The fiscal envelope page with the total and its distribution by economic category">    </p:cNvPr>
+          <p:cNvPr id="5" name="Screenshot activity-revision" descr="An activity with a revision in progress: the reason and what changes against version 1">    </p:cNvPr>
           <p:cNvPicPr>
             <a:picLocks noChangeAspect="1"/>
           </p:cNvPicPr>
@@ -5200,7 +5290,7 @@
                   <a:schemeClr val="accent5"/>
                 </a:solidFill>
               </a:rPr>
-              <a:t>The fiscal envelope with its distribution by economic category</a:t>
+              <a:t>A revision in progress: the reason, and what changes against the version in force</a:t>
             </a:r>
             <a:endParaRPr lang="en-US" sz="1200" dirty="0"/>
           </a:p>
@@ -5236,7 +5326,7 @@
                   <a:schemeClr val="tx1"/>
                 </a:solidFill>
               </a:rPr>
-              <a:t>Register and approve</a:t>
+              <a:t>Start with a reason</a:t>
             </a:r>
             <a:endParaRPr lang="en-US" sz="1800" dirty="0"/>
           </a:p>
@@ -5250,7 +5340,7 @@
                   <a:schemeClr val="tx1"/>
                 </a:solidFill>
               </a:rPr>
-              <a:t>The envelope with its reference, dates and total, divided by economic category.</a:t>
+              <a:t>Revise on the approved activity. The reason is required and is kept with the new version.</a:t>
             </a:r>
             <a:endParaRPr lang="en-US" sz="1800" dirty="0"/>
           </a:p>
@@ -5286,7 +5376,7 @@
                   <a:schemeClr val="tx1"/>
                 </a:solidFill>
               </a:rPr>
-              <a:t>Distribute over the plan</a:t>
+              <a:t>The approved version stays in force</a:t>
             </a:r>
             <a:endParaRPr lang="en-US" sz="1800" dirty="0"/>
           </a:p>
@@ -5300,7 +5390,7 @@
                   <a:schemeClr val="tx1"/>
                 </a:solidFill>
               </a:rPr>
-              <a:t>Approved activities only: capped at what each line asked for, to the cent, in one transaction.</a:t>
+              <a:t>Its amounts are untouched while the revision is pending; reporting goes on against them.</a:t>
             </a:r>
             <a:endParaRPr lang="en-US" sz="1800" dirty="0"/>
           </a:p>
@@ -5336,7 +5426,7 @@
                   <a:schemeClr val="tx1"/>
                 </a:solidFill>
               </a:rPr>
-              <a:t>Review</a:t>
+              <a:t>Approved again, in full</a:t>
             </a:r>
             <a:endParaRPr lang="en-US" sz="1800" dirty="0"/>
           </a:p>
@@ -5350,7 +5440,7 @@
                   <a:schemeClr val="tx1"/>
                 </a:solidFill>
               </a:rPr>
-              <a:t>Budget allocation and the allocation review show what each unit and programme received.</a:t>
+              <a:t>Prepare, certify, approve, including lists that sign in order; then it becomes version 2.</a:t>
             </a:r>
             <a:endParaRPr lang="en-US" sz="1800" dirty="0"/>
           </a:p>
@@ -5458,7 +5548,7 @@
                   <a:schemeClr val="tx1"/>
                 </a:solidFill>
               </a:rPr>
-              <a:t>Carrying out the plan: report, verify, compile</a:t>
+              <a:t>Every version is kept</a:t>
             </a:r>
             <a:endParaRPr lang="en-US" sz="3400" dirty="0"/>
           </a:p>
@@ -5466,19 +5556,17 @@
       </p:sp>
       <p:sp>
         <p:nvSpPr>
-          <p:cNvPr id="4" name="Exec 1"/>
-          <p:cNvSpPr/>
-          <p:nvPr/>
-        </p:nvSpPr>
-        <p:spPr>
-          <a:xfrm>
-            <a:off x="640080" y="1600200"/>
-            <a:ext cx="3502152" cy="2011680"/>
-          </a:xfrm>
-          <a:prstGeom prst="roundRect">
-            <a:avLst>
-              <a:gd name="adj" fmla="val 4545"/>
-            </a:avLst>
+          <p:cNvPr id="4" name="Frame activity-history"/>
+          <p:cNvSpPr/>
+          <p:nvPr/>
+        </p:nvSpPr>
+        <p:spPr>
+          <a:xfrm>
+            <a:off x="640080" y="1508760"/>
+            <a:ext cx="4663440" cy="4247388"/>
+          </a:xfrm>
+          <a:prstGeom prst="rect">
+            <a:avLst/>
           </a:prstGeom>
           <a:solidFill>
             <a:schemeClr val="bg2"/>
@@ -5486,29 +5574,9 @@
           <a:ln/>
         </p:spPr>
       </p:sp>
-      <p:sp>
-        <p:nvSpPr>
-          <p:cNvPr id="5" name="Exec circle 1"/>
-          <p:cNvSpPr/>
-          <p:nvPr/>
-        </p:nvSpPr>
-        <p:spPr>
-          <a:xfrm>
-            <a:off x="914400" y="1874520"/>
-            <a:ext cx="640080" cy="640080"/>
-          </a:xfrm>
-          <a:prstGeom prst="ellipse">
-            <a:avLst/>
-          </a:prstGeom>
-          <a:solidFill>
-            <a:schemeClr val="accent1"/>
-          </a:solidFill>
-          <a:ln/>
-        </p:spPr>
-      </p:sp>
       <p:pic>
         <p:nvPicPr>
-          <p:cNvPr id="6" name="Exec icon 1" descr="Monthly spending">    </p:cNvPr>
+          <p:cNvPr id="5" name="Screenshot activity-history" descr="The history of an activity with its approved versions">    </p:cNvPr>
           <p:cNvPicPr>
             <a:picLocks noChangeAspect="1"/>
           </p:cNvPicPr>
@@ -5522,8 +5590,8 @@
         </p:blipFill>
         <p:spPr>
           <a:xfrm>
-            <a:off x="1078992" y="2039112"/>
-            <a:ext cx="310896" cy="310896"/>
+            <a:off x="685800" y="1554480"/>
+            <a:ext cx="4572000" cy="4155948"/>
           </a:xfrm>
           <a:prstGeom prst="rect">
             <a:avLst/>
@@ -5532,40 +5600,87 @@
       </p:pic>
       <p:sp>
         <p:nvSpPr>
+          <p:cNvPr id="6" name="Text 2"/>
+          <p:cNvSpPr txBox="1"/>
+          <p:nvPr/>
+        </p:nvSpPr>
+        <p:spPr>
+          <a:xfrm>
+            <a:off x="640080" y="5829300"/>
+            <a:ext cx="4663440" cy="411480"/>
+          </a:xfrm>
+          <a:prstGeom prst="rect">
+            <a:avLst/>
+          </a:prstGeom>
+          <a:noFill/>
+          <a:ln/>
+        </p:spPr>
+        <p:txBody>
+          <a:bodyPr wrap="square" lIns="0" tIns="0" rIns="0" bIns="0" rtlCol="0" anchor="t"/>
+          <a:lstStyle/>
+          <a:p>
+            <a:pPr indent="0" marL="0">
+              <a:buNone/>
+            </a:pPr>
+            <a:r>
+              <a:rPr lang="en-US" sz="1200" i="1" dirty="0">
+                <a:solidFill>
+                  <a:schemeClr val="accent5"/>
+                </a:solidFill>
+              </a:rPr>
+              <a:t>Version 2 in force; version 1 kept</a:t>
+            </a:r>
+            <a:endParaRPr lang="en-US" sz="1200" dirty="0"/>
+          </a:p>
+        </p:txBody>
+      </p:sp>
+      <p:sp>
+        <p:nvSpPr>
           <p:cNvPr id="7" name="Text 3"/>
           <p:cNvSpPr txBox="1"/>
           <p:nvPr/>
         </p:nvSpPr>
         <p:spPr>
           <a:xfrm>
-            <a:off x="1691640" y="1874520"/>
-            <a:ext cx="2221992" cy="640080"/>
-          </a:xfrm>
-          <a:prstGeom prst="rect">
-            <a:avLst/>
-          </a:prstGeom>
-          <a:noFill/>
-          <a:ln/>
-        </p:spPr>
-        <p:txBody>
-          <a:bodyPr wrap="square" lIns="0" tIns="0" rIns="0" bIns="0" rtlCol="0" anchor="ctr"/>
-          <a:lstStyle/>
-          <a:p>
-            <a:pPr indent="0" marL="0">
-              <a:buNone/>
-            </a:pPr>
-            <a:r>
-              <a:rPr lang="en-US" sz="1700" b="1" dirty="0">
-                <a:solidFill>
-                  <a:schemeClr val="tx1"/>
-                </a:solidFill>
-                <a:latin typeface="Cambria" pitchFamily="34" charset="0"/>
-                <a:ea typeface="Cambria" pitchFamily="34" charset="-122"/>
-                <a:cs typeface="Cambria" pitchFamily="34" charset="-120"/>
-              </a:rPr>
-              <a:t>Monthly spending</a:t>
-            </a:r>
-            <a:endParaRPr lang="en-US" sz="1700" dirty="0"/>
+            <a:off x="5577840" y="1508760"/>
+            <a:ext cx="5989320" cy="1463040"/>
+          </a:xfrm>
+          <a:prstGeom prst="rect">
+            <a:avLst/>
+          </a:prstGeom>
+          <a:noFill/>
+          <a:ln/>
+        </p:spPr>
+        <p:txBody>
+          <a:bodyPr wrap="square" lIns="0" tIns="0" rIns="0" bIns="0" rtlCol="0" anchor="t"/>
+          <a:lstStyle/>
+          <a:p>
+            <a:pPr indent="0" marL="0">
+              <a:buNone/>
+            </a:pPr>
+            <a:r>
+              <a:rPr lang="en-US" sz="1800" b="1" dirty="0">
+                <a:solidFill>
+                  <a:schemeClr val="tx1"/>
+                </a:solidFill>
+              </a:rPr>
+              <a:t>Who, when and why</a:t>
+            </a:r>
+            <a:endParaRPr lang="en-US" sz="1800" dirty="0"/>
+          </a:p>
+          <a:p>
+            <a:pPr indent="0" marL="0">
+              <a:buNone/>
+            </a:pPr>
+            <a:r>
+              <a:rPr lang="en-US" sz="1400" dirty="0">
+                <a:solidFill>
+                  <a:schemeClr val="tx1"/>
+                </a:solidFill>
+              </a:rPr>
+              <a:t>Each version shows who approved it, when, the total, and the reason for the revision.</a:t>
+            </a:r>
+            <a:endParaRPr lang="en-US" sz="1800" dirty="0"/>
           </a:p>
         </p:txBody>
       </p:sp>
@@ -5577,8 +5692,8 @@
         </p:nvSpPr>
         <p:spPr>
           <a:xfrm>
-            <a:off x="914400" y="2651760"/>
-            <a:ext cx="2953512" cy="914400"/>
+            <a:off x="5577840" y="3108960"/>
+            <a:ext cx="5989320" cy="1463040"/>
           </a:xfrm>
           <a:prstGeom prst="rect">
             <a:avLst/>
@@ -5594,132 +5709,41 @@
               <a:buNone/>
             </a:pPr>
             <a:r>
+              <a:rPr lang="en-US" sz="1800" b="1" dirty="0">
+                <a:solidFill>
+                  <a:schemeClr val="tx1"/>
+                </a:solidFill>
+              </a:rPr>
+              <a:t>What was approved</a:t>
+            </a:r>
+            <a:endParaRPr lang="en-US" sz="1800" dirty="0"/>
+          </a:p>
+          <a:p>
+            <a:pPr indent="0" marL="0">
+              <a:buNone/>
+            </a:pPr>
+            <a:r>
               <a:rPr lang="en-US" sz="1400" dirty="0">
                 <a:solidFill>
                   <a:schemeClr val="tx1"/>
                 </a:solidFill>
               </a:rPr>
-              <a:t>Committed and paid for each budget line, inside the window of the month.</a:t>
-            </a:r>
-            <a:endParaRPr lang="en-US" sz="1400" dirty="0"/>
-          </a:p>
-        </p:txBody>
-      </p:sp>
-      <p:sp>
-        <p:nvSpPr>
-          <p:cNvPr id="9" name="Exec 2"/>
-          <p:cNvSpPr/>
-          <p:nvPr/>
-        </p:nvSpPr>
-        <p:spPr>
-          <a:xfrm>
-            <a:off x="4343400" y="1600200"/>
-            <a:ext cx="3502152" cy="2011680"/>
-          </a:xfrm>
-          <a:prstGeom prst="roundRect">
-            <a:avLst>
-              <a:gd name="adj" fmla="val 4545"/>
-            </a:avLst>
-          </a:prstGeom>
-          <a:solidFill>
-            <a:schemeClr val="bg2"/>
-          </a:solidFill>
-          <a:ln/>
-        </p:spPr>
-      </p:sp>
-      <p:sp>
-        <p:nvSpPr>
-          <p:cNvPr id="10" name="Exec circle 2"/>
-          <p:cNvSpPr/>
-          <p:nvPr/>
-        </p:nvSpPr>
-        <p:spPr>
-          <a:xfrm>
-            <a:off x="4617720" y="1874520"/>
-            <a:ext cx="640080" cy="640080"/>
-          </a:xfrm>
-          <a:prstGeom prst="ellipse">
-            <a:avLst/>
-          </a:prstGeom>
-          <a:solidFill>
-            <a:schemeClr val="accent3"/>
-          </a:solidFill>
-          <a:ln/>
-        </p:spPr>
-      </p:sp>
-      <p:pic>
-        <p:nvPicPr>
-          <p:cNvPr id="11" name="Exec icon 2" descr="Quarterly indicators">    </p:cNvPr>
-          <p:cNvPicPr>
-            <a:picLocks noChangeAspect="1"/>
-          </p:cNvPicPr>
-          <p:nvPr/>
-        </p:nvPicPr>
-        <p:blipFill>
-          <a:blip r:embed="rId2"/>
-          <a:stretch>
-            <a:fillRect/>
-          </a:stretch>
-        </p:blipFill>
-        <p:spPr>
-          <a:xfrm>
-            <a:off x="4782312" y="2039112"/>
-            <a:ext cx="310896" cy="310896"/>
-          </a:xfrm>
-          <a:prstGeom prst="rect">
-            <a:avLst/>
-          </a:prstGeom>
-        </p:spPr>
-      </p:pic>
-      <p:sp>
-        <p:nvSpPr>
-          <p:cNvPr id="12" name="Text 7"/>
-          <p:cNvSpPr txBox="1"/>
-          <p:nvPr/>
-        </p:nvSpPr>
-        <p:spPr>
-          <a:xfrm>
-            <a:off x="5394960" y="1874520"/>
-            <a:ext cx="2221992" cy="640080"/>
-          </a:xfrm>
-          <a:prstGeom prst="rect">
-            <a:avLst/>
-          </a:prstGeom>
-          <a:noFill/>
-          <a:ln/>
-        </p:spPr>
-        <p:txBody>
-          <a:bodyPr wrap="square" lIns="0" tIns="0" rIns="0" bIns="0" rtlCol="0" anchor="ctr"/>
-          <a:lstStyle/>
-          <a:p>
-            <a:pPr indent="0" marL="0">
-              <a:buNone/>
-            </a:pPr>
-            <a:r>
-              <a:rPr lang="en-US" sz="1700" b="1" dirty="0">
-                <a:solidFill>
-                  <a:schemeClr val="tx1"/>
-                </a:solidFill>
-                <a:latin typeface="Cambria" pitchFamily="34" charset="0"/>
-                <a:ea typeface="Cambria" pitchFamily="34" charset="-122"/>
-                <a:cs typeface="Cambria" pitchFamily="34" charset="-120"/>
-              </a:rPr>
-              <a:t>Quarterly indicators</a:t>
-            </a:r>
-            <a:endParaRPr lang="en-US" sz="1700" dirty="0"/>
-          </a:p>
-        </p:txBody>
-      </p:sp>
-      <p:sp>
-        <p:nvSpPr>
-          <p:cNvPr id="13" name="Text 8"/>
-          <p:cNvSpPr txBox="1"/>
-          <p:nvPr/>
-        </p:nvSpPr>
-        <p:spPr>
-          <a:xfrm>
-            <a:off x="4617720" y="2651760"/>
-            <a:ext cx="2953512" cy="914400"/>
+              <a:t>Open any version to see its budget lines and its indicators as they were.</a:t>
+            </a:r>
+            <a:endParaRPr lang="en-US" sz="1800" dirty="0"/>
+          </a:p>
+        </p:txBody>
+      </p:sp>
+      <p:sp>
+        <p:nvSpPr>
+          <p:cNvPr id="9" name="Text 5"/>
+          <p:cNvSpPr txBox="1"/>
+          <p:nvPr/>
+        </p:nvSpPr>
+        <p:spPr>
+          <a:xfrm>
+            <a:off x="5577840" y="4709160"/>
+            <a:ext cx="5989320" cy="1463040"/>
           </a:xfrm>
           <a:prstGeom prst="rect">
             <a:avLst/>
@@ -5735,578 +5759,28 @@
               <a:buNone/>
             </a:pPr>
             <a:r>
+              <a:rPr lang="en-US" sz="1800" b="1" dirty="0">
+                <a:solidFill>
+                  <a:schemeClr val="tx1"/>
+                </a:solidFill>
+              </a:rPr>
+              <a:t>Reported figures stay tied</a:t>
+            </a:r>
+            <a:endParaRPr lang="en-US" sz="1800" dirty="0"/>
+          </a:p>
+          <a:p>
+            <a:pPr indent="0" marL="0">
+              <a:buNone/>
+            </a:pPr>
+            <a:r>
               <a:rPr lang="en-US" sz="1400" dirty="0">
                 <a:solidFill>
                   <a:schemeClr val="tx1"/>
                 </a:solidFill>
               </a:rPr>
-              <a:t>Progress against each target, in the quarters its months fall in.</a:t>
-            </a:r>
-            <a:endParaRPr lang="en-US" sz="1400" dirty="0"/>
-          </a:p>
-        </p:txBody>
-      </p:sp>
-      <p:sp>
-        <p:nvSpPr>
-          <p:cNvPr id="14" name="Exec 3"/>
-          <p:cNvSpPr/>
-          <p:nvPr/>
-        </p:nvSpPr>
-        <p:spPr>
-          <a:xfrm>
-            <a:off x="8046720" y="1600200"/>
-            <a:ext cx="3502152" cy="2011680"/>
-          </a:xfrm>
-          <a:prstGeom prst="roundRect">
-            <a:avLst>
-              <a:gd name="adj" fmla="val 4545"/>
-            </a:avLst>
-          </a:prstGeom>
-          <a:solidFill>
-            <a:schemeClr val="bg2"/>
-          </a:solidFill>
-          <a:ln/>
-        </p:spPr>
-      </p:sp>
-      <p:sp>
-        <p:nvSpPr>
-          <p:cNvPr id="15" name="Exec circle 3"/>
-          <p:cNvSpPr/>
-          <p:nvPr/>
-        </p:nvSpPr>
-        <p:spPr>
-          <a:xfrm>
-            <a:off x="8321040" y="1874520"/>
-            <a:ext cx="640080" cy="640080"/>
-          </a:xfrm>
-          <a:prstGeom prst="ellipse">
-            <a:avLst/>
-          </a:prstGeom>
-          <a:solidFill>
-            <a:schemeClr val="accent4"/>
-          </a:solidFill>
-          <a:ln/>
-        </p:spPr>
-      </p:sp>
-      <p:pic>
-        <p:nvPicPr>
-          <p:cNvPr id="16" name="Exec icon 3" descr="Narratives">    </p:cNvPr>
-          <p:cNvPicPr>
-            <a:picLocks noChangeAspect="1"/>
-          </p:cNvPicPr>
-          <p:nvPr/>
-        </p:nvPicPr>
-        <p:blipFill>
-          <a:blip r:embed="rId3"/>
-          <a:stretch>
-            <a:fillRect/>
-          </a:stretch>
-        </p:blipFill>
-        <p:spPr>
-          <a:xfrm>
-            <a:off x="8485632" y="2039112"/>
-            <a:ext cx="310896" cy="310896"/>
-          </a:xfrm>
-          <a:prstGeom prst="rect">
-            <a:avLst/>
-          </a:prstGeom>
-        </p:spPr>
-      </p:pic>
-      <p:sp>
-        <p:nvSpPr>
-          <p:cNvPr id="17" name="Text 11"/>
-          <p:cNvSpPr txBox="1"/>
-          <p:nvPr/>
-        </p:nvSpPr>
-        <p:spPr>
-          <a:xfrm>
-            <a:off x="9098280" y="1874520"/>
-            <a:ext cx="2221992" cy="640080"/>
-          </a:xfrm>
-          <a:prstGeom prst="rect">
-            <a:avLst/>
-          </a:prstGeom>
-          <a:noFill/>
-          <a:ln/>
-        </p:spPr>
-        <p:txBody>
-          <a:bodyPr wrap="square" lIns="0" tIns="0" rIns="0" bIns="0" rtlCol="0" anchor="ctr"/>
-          <a:lstStyle/>
-          <a:p>
-            <a:pPr indent="0" marL="0">
-              <a:buNone/>
-            </a:pPr>
-            <a:r>
-              <a:rPr lang="en-US" sz="1700" b="1" dirty="0">
-                <a:solidFill>
-                  <a:schemeClr val="tx1"/>
-                </a:solidFill>
-                <a:latin typeface="Cambria" pitchFamily="34" charset="0"/>
-                <a:ea typeface="Cambria" pitchFamily="34" charset="-122"/>
-                <a:cs typeface="Cambria" pitchFamily="34" charset="-120"/>
-              </a:rPr>
-              <a:t>Narratives</a:t>
-            </a:r>
-            <a:endParaRPr lang="en-US" sz="1700" dirty="0"/>
-          </a:p>
-        </p:txBody>
-      </p:sp>
-      <p:sp>
-        <p:nvSpPr>
-          <p:cNvPr id="18" name="Text 12"/>
-          <p:cNvSpPr txBox="1"/>
-          <p:nvPr/>
-        </p:nvSpPr>
-        <p:spPr>
-          <a:xfrm>
-            <a:off x="8321040" y="2651760"/>
-            <a:ext cx="2953512" cy="914400"/>
-          </a:xfrm>
-          <a:prstGeom prst="rect">
-            <a:avLst/>
-          </a:prstGeom>
-          <a:noFill/>
-          <a:ln/>
-        </p:spPr>
-        <p:txBody>
-          <a:bodyPr wrap="square" lIns="0" tIns="0" rIns="0" bIns="0" rtlCol="0" anchor="t"/>
-          <a:lstStyle/>
-          <a:p>
-            <a:pPr indent="0" marL="0">
-              <a:buNone/>
-            </a:pPr>
-            <a:r>
-              <a:rPr lang="en-US" sz="1400" dirty="0">
-                <a:solidFill>
-                  <a:schemeClr val="tx1"/>
-                </a:solidFill>
-              </a:rPr>
-              <a:t>Results achieved and constraints, for each month and each quarter.</a:t>
-            </a:r>
-            <a:endParaRPr lang="en-US" sz="1400" dirty="0"/>
-          </a:p>
-        </p:txBody>
-      </p:sp>
-      <p:sp>
-        <p:nvSpPr>
-          <p:cNvPr id="19" name="Exec 4"/>
-          <p:cNvSpPr/>
-          <p:nvPr/>
-        </p:nvSpPr>
-        <p:spPr>
-          <a:xfrm>
-            <a:off x="640080" y="3840480"/>
-            <a:ext cx="3502152" cy="2011680"/>
-          </a:xfrm>
-          <a:prstGeom prst="roundRect">
-            <a:avLst>
-              <a:gd name="adj" fmla="val 4545"/>
-            </a:avLst>
-          </a:prstGeom>
-          <a:solidFill>
-            <a:schemeClr val="bg2"/>
-          </a:solidFill>
-          <a:ln/>
-        </p:spPr>
-      </p:sp>
-      <p:sp>
-        <p:nvSpPr>
-          <p:cNvPr id="20" name="Exec circle 4"/>
-          <p:cNvSpPr/>
-          <p:nvPr/>
-        </p:nvSpPr>
-        <p:spPr>
-          <a:xfrm>
-            <a:off x="914400" y="4114800"/>
-            <a:ext cx="640080" cy="640080"/>
-          </a:xfrm>
-          <a:prstGeom prst="ellipse">
-            <a:avLst/>
-          </a:prstGeom>
-          <a:solidFill>
-            <a:schemeClr val="accent6"/>
-          </a:solidFill>
-          <a:ln/>
-        </p:spPr>
-      </p:sp>
-      <p:pic>
-        <p:nvPicPr>
-          <p:cNvPr id="21" name="Exec icon 4" descr="Verified by someone else">    </p:cNvPr>
-          <p:cNvPicPr>
-            <a:picLocks noChangeAspect="1"/>
-          </p:cNvPicPr>
-          <p:nvPr/>
-        </p:nvPicPr>
-        <p:blipFill>
-          <a:blip r:embed="rId4"/>
-          <a:stretch>
-            <a:fillRect/>
-          </a:stretch>
-        </p:blipFill>
-        <p:spPr>
-          <a:xfrm>
-            <a:off x="1078992" y="4279392"/>
-            <a:ext cx="310896" cy="310896"/>
-          </a:xfrm>
-          <a:prstGeom prst="rect">
-            <a:avLst/>
-          </a:prstGeom>
-        </p:spPr>
-      </p:pic>
-      <p:sp>
-        <p:nvSpPr>
-          <p:cNvPr id="22" name="Text 15"/>
-          <p:cNvSpPr txBox="1"/>
-          <p:nvPr/>
-        </p:nvSpPr>
-        <p:spPr>
-          <a:xfrm>
-            <a:off x="1691640" y="4114800"/>
-            <a:ext cx="2221992" cy="640080"/>
-          </a:xfrm>
-          <a:prstGeom prst="rect">
-            <a:avLst/>
-          </a:prstGeom>
-          <a:noFill/>
-          <a:ln/>
-        </p:spPr>
-        <p:txBody>
-          <a:bodyPr wrap="square" lIns="0" tIns="0" rIns="0" bIns="0" rtlCol="0" anchor="ctr"/>
-          <a:lstStyle/>
-          <a:p>
-            <a:pPr indent="0" marL="0">
-              <a:buNone/>
-            </a:pPr>
-            <a:r>
-              <a:rPr lang="en-US" sz="1700" b="1" dirty="0">
-                <a:solidFill>
-                  <a:schemeClr val="tx1"/>
-                </a:solidFill>
-                <a:latin typeface="Cambria" pitchFamily="34" charset="0"/>
-                <a:ea typeface="Cambria" pitchFamily="34" charset="-122"/>
-                <a:cs typeface="Cambria" pitchFamily="34" charset="-120"/>
-              </a:rPr>
-              <a:t>Verified by someone else</a:t>
-            </a:r>
-            <a:endParaRPr lang="en-US" sz="1700" dirty="0"/>
-          </a:p>
-        </p:txBody>
-      </p:sp>
-      <p:sp>
-        <p:nvSpPr>
-          <p:cNvPr id="23" name="Text 16"/>
-          <p:cNvSpPr txBox="1"/>
-          <p:nvPr/>
-        </p:nvSpPr>
-        <p:spPr>
-          <a:xfrm>
-            <a:off x="914400" y="4892040"/>
-            <a:ext cx="2953512" cy="914400"/>
-          </a:xfrm>
-          <a:prstGeom prst="rect">
-            <a:avLst/>
-          </a:prstGeom>
-          <a:noFill/>
-          <a:ln/>
-        </p:spPr>
-        <p:txBody>
-          <a:bodyPr wrap="square" lIns="0" tIns="0" rIns="0" bIns="0" rtlCol="0" anchor="t"/>
-          <a:lstStyle/>
-          <a:p>
-            <a:pPr indent="0" marL="0">
-              <a:buNone/>
-            </a:pPr>
-            <a:r>
-              <a:rPr lang="en-US" sz="1400" dirty="0">
-                <a:solidFill>
-                  <a:schemeClr val="tx1"/>
-                </a:solidFill>
-              </a:rPr>
-              <a:t>Nobody verifies their own report; only verified figures reach the reports.</a:t>
-            </a:r>
-            <a:endParaRPr lang="en-US" sz="1400" dirty="0"/>
-          </a:p>
-        </p:txBody>
-      </p:sp>
-      <p:sp>
-        <p:nvSpPr>
-          <p:cNvPr id="24" name="Exec 5"/>
-          <p:cNvSpPr/>
-          <p:nvPr/>
-        </p:nvSpPr>
-        <p:spPr>
-          <a:xfrm>
-            <a:off x="4343400" y="3840480"/>
-            <a:ext cx="3502152" cy="2011680"/>
-          </a:xfrm>
-          <a:prstGeom prst="roundRect">
-            <a:avLst>
-              <a:gd name="adj" fmla="val 4545"/>
-            </a:avLst>
-          </a:prstGeom>
-          <a:solidFill>
-            <a:schemeClr val="bg2"/>
-          </a:solidFill>
-          <a:ln/>
-        </p:spPr>
-      </p:sp>
-      <p:sp>
-        <p:nvSpPr>
-          <p:cNvPr id="25" name="Exec circle 5"/>
-          <p:cNvSpPr/>
-          <p:nvPr/>
-        </p:nvSpPr>
-        <p:spPr>
-          <a:xfrm>
-            <a:off x="4617720" y="4114800"/>
-            <a:ext cx="640080" cy="640080"/>
-          </a:xfrm>
-          <a:prstGeom prst="ellipse">
-            <a:avLst/>
-          </a:prstGeom>
-          <a:solidFill>
-            <a:schemeClr val="accent1"/>
-          </a:solidFill>
-          <a:ln/>
-        </p:spPr>
-      </p:sp>
-      <p:pic>
-        <p:nvPicPr>
-          <p:cNvPr id="26" name="Exec icon 5" descr="Windows">    </p:cNvPr>
-          <p:cNvPicPr>
-            <a:picLocks noChangeAspect="1"/>
-          </p:cNvPicPr>
-          <p:nvPr/>
-        </p:nvPicPr>
-        <p:blipFill>
-          <a:blip r:embed="rId5"/>
-          <a:stretch>
-            <a:fillRect/>
-          </a:stretch>
-        </p:blipFill>
-        <p:spPr>
-          <a:xfrm>
-            <a:off x="4782312" y="4279392"/>
-            <a:ext cx="310896" cy="310896"/>
-          </a:xfrm>
-          <a:prstGeom prst="rect">
-            <a:avLst/>
-          </a:prstGeom>
-        </p:spPr>
-      </p:pic>
-      <p:sp>
-        <p:nvSpPr>
-          <p:cNvPr id="27" name="Text 19"/>
-          <p:cNvSpPr txBox="1"/>
-          <p:nvPr/>
-        </p:nvSpPr>
-        <p:spPr>
-          <a:xfrm>
-            <a:off x="5394960" y="4114800"/>
-            <a:ext cx="2221992" cy="640080"/>
-          </a:xfrm>
-          <a:prstGeom prst="rect">
-            <a:avLst/>
-          </a:prstGeom>
-          <a:noFill/>
-          <a:ln/>
-        </p:spPr>
-        <p:txBody>
-          <a:bodyPr wrap="square" lIns="0" tIns="0" rIns="0" bIns="0" rtlCol="0" anchor="ctr"/>
-          <a:lstStyle/>
-          <a:p>
-            <a:pPr indent="0" marL="0">
-              <a:buNone/>
-            </a:pPr>
-            <a:r>
-              <a:rPr lang="en-US" sz="1700" b="1" dirty="0">
-                <a:solidFill>
-                  <a:schemeClr val="tx1"/>
-                </a:solidFill>
-                <a:latin typeface="Cambria" pitchFamily="34" charset="0"/>
-                <a:ea typeface="Cambria" pitchFamily="34" charset="-122"/>
-                <a:cs typeface="Cambria" pitchFamily="34" charset="-120"/>
-              </a:rPr>
-              <a:t>Windows</a:t>
-            </a:r>
-            <a:endParaRPr lang="en-US" sz="1700" dirty="0"/>
-          </a:p>
-        </p:txBody>
-      </p:sp>
-      <p:sp>
-        <p:nvSpPr>
-          <p:cNvPr id="28" name="Text 20"/>
-          <p:cNvSpPr txBox="1"/>
-          <p:nvPr/>
-        </p:nvSpPr>
-        <p:spPr>
-          <a:xfrm>
-            <a:off x="4617720" y="4892040"/>
-            <a:ext cx="2953512" cy="914400"/>
-          </a:xfrm>
-          <a:prstGeom prst="rect">
-            <a:avLst/>
-          </a:prstGeom>
-          <a:noFill/>
-          <a:ln/>
-        </p:spPr>
-        <p:txBody>
-          <a:bodyPr wrap="square" lIns="0" tIns="0" rIns="0" bIns="0" rtlCol="0" anchor="t"/>
-          <a:lstStyle/>
-          <a:p>
-            <a:pPr indent="0" marL="0">
-              <a:buNone/>
-            </a:pPr>
-            <a:r>
-              <a:rPr lang="en-US" sz="1400" dirty="0">
-                <a:solidFill>
-                  <a:schemeClr val="tx1"/>
-                </a:solidFill>
-              </a:rPr>
-              <a:t>A period outside its window cannot be reported; administrators always can.</a:t>
-            </a:r>
-            <a:endParaRPr lang="en-US" sz="1400" dirty="0"/>
-          </a:p>
-        </p:txBody>
-      </p:sp>
-      <p:sp>
-        <p:nvSpPr>
-          <p:cNvPr id="29" name="Exec 6"/>
-          <p:cNvSpPr/>
-          <p:nvPr/>
-        </p:nvSpPr>
-        <p:spPr>
-          <a:xfrm>
-            <a:off x="8046720" y="3840480"/>
-            <a:ext cx="3502152" cy="2011680"/>
-          </a:xfrm>
-          <a:prstGeom prst="roundRect">
-            <a:avLst>
-              <a:gd name="adj" fmla="val 4545"/>
-            </a:avLst>
-          </a:prstGeom>
-          <a:solidFill>
-            <a:schemeClr val="bg2"/>
-          </a:solidFill>
-          <a:ln/>
-        </p:spPr>
-      </p:sp>
-      <p:sp>
-        <p:nvSpPr>
-          <p:cNvPr id="30" name="Exec circle 6"/>
-          <p:cNvSpPr/>
-          <p:nvPr/>
-        </p:nvSpPr>
-        <p:spPr>
-          <a:xfrm>
-            <a:off x="8321040" y="4114800"/>
-            <a:ext cx="640080" cy="640080"/>
-          </a:xfrm>
-          <a:prstGeom prst="ellipse">
-            <a:avLst/>
-          </a:prstGeom>
-          <a:solidFill>
-            <a:schemeClr val="accent3"/>
-          </a:solidFill>
-          <a:ln/>
-        </p:spPr>
-      </p:sp>
-      <p:pic>
-        <p:nvPicPr>
-          <p:cNvPr id="31" name="Exec icon 6" descr="Compile the quarter">    </p:cNvPr>
-          <p:cNvPicPr>
-            <a:picLocks noChangeAspect="1"/>
-          </p:cNvPicPr>
-          <p:nvPr/>
-        </p:nvPicPr>
-        <p:blipFill>
-          <a:blip r:embed="rId6"/>
-          <a:stretch>
-            <a:fillRect/>
-          </a:stretch>
-        </p:blipFill>
-        <p:spPr>
-          <a:xfrm>
-            <a:off x="8485632" y="4279392"/>
-            <a:ext cx="310896" cy="310896"/>
-          </a:xfrm>
-          <a:prstGeom prst="rect">
-            <a:avLst/>
-          </a:prstGeom>
-        </p:spPr>
-      </p:pic>
-      <p:sp>
-        <p:nvSpPr>
-          <p:cNvPr id="32" name="Text 23"/>
-          <p:cNvSpPr txBox="1"/>
-          <p:nvPr/>
-        </p:nvSpPr>
-        <p:spPr>
-          <a:xfrm>
-            <a:off x="9098280" y="4114800"/>
-            <a:ext cx="2221992" cy="640080"/>
-          </a:xfrm>
-          <a:prstGeom prst="rect">
-            <a:avLst/>
-          </a:prstGeom>
-          <a:noFill/>
-          <a:ln/>
-        </p:spPr>
-        <p:txBody>
-          <a:bodyPr wrap="square" lIns="0" tIns="0" rIns="0" bIns="0" rtlCol="0" anchor="ctr"/>
-          <a:lstStyle/>
-          <a:p>
-            <a:pPr indent="0" marL="0">
-              <a:buNone/>
-            </a:pPr>
-            <a:r>
-              <a:rPr lang="en-US" sz="1700" b="1" dirty="0">
-                <a:solidFill>
-                  <a:schemeClr val="tx1"/>
-                </a:solidFill>
-                <a:latin typeface="Cambria" pitchFamily="34" charset="0"/>
-                <a:ea typeface="Cambria" pitchFamily="34" charset="-122"/>
-                <a:cs typeface="Cambria" pitchFamily="34" charset="-120"/>
-              </a:rPr>
-              <a:t>Compile the quarter</a:t>
-            </a:r>
-            <a:endParaRPr lang="en-US" sz="1700" dirty="0"/>
-          </a:p>
-        </p:txBody>
-      </p:sp>
-      <p:sp>
-        <p:nvSpPr>
-          <p:cNvPr id="33" name="Text 24"/>
-          <p:cNvSpPr txBox="1"/>
-          <p:nvPr/>
-        </p:nvSpPr>
-        <p:spPr>
-          <a:xfrm>
-            <a:off x="8321040" y="4892040"/>
-            <a:ext cx="2953512" cy="914400"/>
-          </a:xfrm>
-          <a:prstGeom prst="rect">
-            <a:avLst/>
-          </a:prstGeom>
-          <a:noFill/>
-          <a:ln/>
-        </p:spPr>
-        <p:txBody>
-          <a:bodyPr wrap="square" lIns="0" tIns="0" rIns="0" bIns="0" rtlCol="0" anchor="t"/>
-          <a:lstStyle/>
-          <a:p>
-            <a:pPr indent="0" marL="0">
-              <a:buNone/>
-            </a:pPr>
-            <a:r>
-              <a:rPr lang="en-US" sz="1400" dirty="0">
-                <a:solidFill>
-                  <a:schemeClr val="tx1"/>
-                </a:solidFill>
-              </a:rPr>
-              <a:t>A draft from what the units reported, edited by the director into the text of the report.</a:t>
-            </a:r>
-            <a:endParaRPr lang="en-US" sz="1400" dirty="0"/>
+              <a:t>Lines and indicators with reported figures are changed, never removed; the activity is never deleted.</a:t>
+            </a:r>
+            <a:endParaRPr lang="en-US" sz="1800" dirty="0"/>
           </a:p>
         </p:txBody>
       </p:sp>
@@ -6412,7 +5886,7 @@
                   <a:schemeClr val="tx1"/>
                 </a:solidFill>
               </a:rPr>
-              <a:t>The plan and its results, in the Ministry of Finance form</a:t>
+              <a:t>Carrying out the plan: report, verify, compile</a:t>
             </a:r>
             <a:endParaRPr lang="en-US" sz="3400" dirty="0"/>
           </a:p>
@@ -6420,17 +5894,19 @@
       </p:sp>
       <p:sp>
         <p:nvSpPr>
-          <p:cNvPr id="4" name="Frame approved-plan"/>
-          <p:cNvSpPr/>
-          <p:nvPr/>
-        </p:nvSpPr>
-        <p:spPr>
-          <a:xfrm>
-            <a:off x="640080" y="1508760"/>
-            <a:ext cx="5486400" cy="3463290"/>
-          </a:xfrm>
-          <a:prstGeom prst="rect">
-            <a:avLst/>
+          <p:cNvPr id="4" name="Exec 1"/>
+          <p:cNvSpPr/>
+          <p:nvPr/>
+        </p:nvSpPr>
+        <p:spPr>
+          <a:xfrm>
+            <a:off x="640080" y="1600200"/>
+            <a:ext cx="3502152" cy="2011680"/>
+          </a:xfrm>
+          <a:prstGeom prst="roundRect">
+            <a:avLst>
+              <a:gd name="adj" fmla="val 4545"/>
+            </a:avLst>
           </a:prstGeom>
           <a:solidFill>
             <a:schemeClr val="bg2"/>
@@ -6438,9 +5914,29 @@
           <a:ln/>
         </p:spPr>
       </p:sp>
+      <p:sp>
+        <p:nvSpPr>
+          <p:cNvPr id="5" name="Exec circle 1"/>
+          <p:cNvSpPr/>
+          <p:nvPr/>
+        </p:nvSpPr>
+        <p:spPr>
+          <a:xfrm>
+            <a:off x="914400" y="1874520"/>
+            <a:ext cx="640080" cy="640080"/>
+          </a:xfrm>
+          <a:prstGeom prst="ellipse">
+            <a:avLst/>
+          </a:prstGeom>
+          <a:solidFill>
+            <a:schemeClr val="accent1"/>
+          </a:solidFill>
+          <a:ln/>
+        </p:spPr>
+      </p:sp>
       <p:pic>
         <p:nvPicPr>
-          <p:cNvPr id="5" name="Screenshot approved-plan" descr="The final plan report in the Ministry of Finance form">    </p:cNvPr>
+          <p:cNvPr id="6" name="Exec icon 1" descr="Monthly spending">    </p:cNvPr>
           <p:cNvPicPr>
             <a:picLocks noChangeAspect="1"/>
           </p:cNvPicPr>
@@ -6454,8 +5950,8 @@
         </p:blipFill>
         <p:spPr>
           <a:xfrm>
-            <a:off x="685800" y="1554480"/>
-            <a:ext cx="5394960" cy="3371850"/>
+            <a:off x="1078992" y="2039112"/>
+            <a:ext cx="310896" cy="310896"/>
           </a:xfrm>
           <a:prstGeom prst="rect">
             <a:avLst/>
@@ -6464,14 +5960,53 @@
       </p:pic>
       <p:sp>
         <p:nvSpPr>
-          <p:cNvPr id="6" name="Text 2"/>
-          <p:cNvSpPr txBox="1"/>
-          <p:nvPr/>
-        </p:nvSpPr>
-        <p:spPr>
-          <a:xfrm>
-            <a:off x="640080" y="5045202"/>
-            <a:ext cx="5486400" cy="411480"/>
+          <p:cNvPr id="7" name="Text 3"/>
+          <p:cNvSpPr txBox="1"/>
+          <p:nvPr/>
+        </p:nvSpPr>
+        <p:spPr>
+          <a:xfrm>
+            <a:off x="1691640" y="1874520"/>
+            <a:ext cx="2221992" cy="640080"/>
+          </a:xfrm>
+          <a:prstGeom prst="rect">
+            <a:avLst/>
+          </a:prstGeom>
+          <a:noFill/>
+          <a:ln/>
+        </p:spPr>
+        <p:txBody>
+          <a:bodyPr wrap="square" lIns="0" tIns="0" rIns="0" bIns="0" rtlCol="0" anchor="ctr"/>
+          <a:lstStyle/>
+          <a:p>
+            <a:pPr indent="0" marL="0">
+              <a:buNone/>
+            </a:pPr>
+            <a:r>
+              <a:rPr lang="en-US" sz="1700" b="1" dirty="0">
+                <a:solidFill>
+                  <a:schemeClr val="tx1"/>
+                </a:solidFill>
+                <a:latin typeface="Cambria" pitchFamily="34" charset="0"/>
+                <a:ea typeface="Cambria" pitchFamily="34" charset="-122"/>
+                <a:cs typeface="Cambria" pitchFamily="34" charset="-120"/>
+              </a:rPr>
+              <a:t>Monthly spending</a:t>
+            </a:r>
+            <a:endParaRPr lang="en-US" sz="1700" dirty="0"/>
+          </a:p>
+        </p:txBody>
+      </p:sp>
+      <p:sp>
+        <p:nvSpPr>
+          <p:cNvPr id="8" name="Text 4"/>
+          <p:cNvSpPr txBox="1"/>
+          <p:nvPr/>
+        </p:nvSpPr>
+        <p:spPr>
+          <a:xfrm>
+            <a:off x="914400" y="2651760"/>
+            <a:ext cx="2953512" cy="914400"/>
           </a:xfrm>
           <a:prstGeom prst="rect">
             <a:avLst/>
@@ -6487,30 +6022,32 @@
               <a:buNone/>
             </a:pPr>
             <a:r>
-              <a:rPr lang="en-US" sz="1200" i="1" dirty="0">
-                <a:solidFill>
-                  <a:schemeClr val="accent5"/>
-                </a:solidFill>
-              </a:rPr>
-              <a:t>Final plan report: complete or summary</a:t>
-            </a:r>
-            <a:endParaRPr lang="en-US" sz="1200" dirty="0"/>
-          </a:p>
-        </p:txBody>
-      </p:sp>
-      <p:sp>
-        <p:nvSpPr>
-          <p:cNvPr id="7" name="Frame implementation-plan"/>
-          <p:cNvSpPr/>
-          <p:nvPr/>
-        </p:nvSpPr>
-        <p:spPr>
-          <a:xfrm>
-            <a:off x="6263640" y="1508760"/>
-            <a:ext cx="5486400" cy="3463290"/>
-          </a:xfrm>
-          <a:prstGeom prst="rect">
-            <a:avLst/>
+              <a:rPr lang="en-US" sz="1400" dirty="0">
+                <a:solidFill>
+                  <a:schemeClr val="tx1"/>
+                </a:solidFill>
+              </a:rPr>
+              <a:t>Committed and paid for each budget line, inside the window of the month.</a:t>
+            </a:r>
+            <a:endParaRPr lang="en-US" sz="1400" dirty="0"/>
+          </a:p>
+        </p:txBody>
+      </p:sp>
+      <p:sp>
+        <p:nvSpPr>
+          <p:cNvPr id="9" name="Exec 2"/>
+          <p:cNvSpPr/>
+          <p:nvPr/>
+        </p:nvSpPr>
+        <p:spPr>
+          <a:xfrm>
+            <a:off x="4343400" y="1600200"/>
+            <a:ext cx="3502152" cy="2011680"/>
+          </a:xfrm>
+          <a:prstGeom prst="roundRect">
+            <a:avLst>
+              <a:gd name="adj" fmla="val 4545"/>
+            </a:avLst>
           </a:prstGeom>
           <a:solidFill>
             <a:schemeClr val="bg2"/>
@@ -6518,9 +6055,29 @@
           <a:ln/>
         </p:spPr>
       </p:sp>
+      <p:sp>
+        <p:nvSpPr>
+          <p:cNvPr id="10" name="Exec circle 2"/>
+          <p:cNvSpPr/>
+          <p:nvPr/>
+        </p:nvSpPr>
+        <p:spPr>
+          <a:xfrm>
+            <a:off x="4617720" y="1874520"/>
+            <a:ext cx="640080" cy="640080"/>
+          </a:xfrm>
+          <a:prstGeom prst="ellipse">
+            <a:avLst/>
+          </a:prstGeom>
+          <a:solidFill>
+            <a:schemeClr val="accent3"/>
+          </a:solidFill>
+          <a:ln/>
+        </p:spPr>
+      </p:sp>
       <p:pic>
         <p:nvPicPr>
-          <p:cNvPr id="8" name="Screenshot implementation-plan" descr="The implementation plan of a unit with its actions and the January to December grid">    </p:cNvPr>
+          <p:cNvPr id="11" name="Exec icon 2" descr="Quarterly indicators">    </p:cNvPr>
           <p:cNvPicPr>
             <a:picLocks noChangeAspect="1"/>
           </p:cNvPicPr>
@@ -6534,8 +6091,8 @@
         </p:blipFill>
         <p:spPr>
           <a:xfrm>
-            <a:off x="6309360" y="1554480"/>
-            <a:ext cx="5394960" cy="3371850"/>
+            <a:off x="4782312" y="2039112"/>
+            <a:ext cx="310896" cy="310896"/>
           </a:xfrm>
           <a:prstGeom prst="rect">
             <a:avLst/>
@@ -6544,14 +6101,53 @@
       </p:pic>
       <p:sp>
         <p:nvSpPr>
-          <p:cNvPr id="9" name="Text 4"/>
-          <p:cNvSpPr txBox="1"/>
-          <p:nvPr/>
-        </p:nvSpPr>
-        <p:spPr>
-          <a:xfrm>
-            <a:off x="6263640" y="5045202"/>
-            <a:ext cx="5486400" cy="411480"/>
+          <p:cNvPr id="12" name="Text 7"/>
+          <p:cNvSpPr txBox="1"/>
+          <p:nvPr/>
+        </p:nvSpPr>
+        <p:spPr>
+          <a:xfrm>
+            <a:off x="5394960" y="1874520"/>
+            <a:ext cx="2221992" cy="640080"/>
+          </a:xfrm>
+          <a:prstGeom prst="rect">
+            <a:avLst/>
+          </a:prstGeom>
+          <a:noFill/>
+          <a:ln/>
+        </p:spPr>
+        <p:txBody>
+          <a:bodyPr wrap="square" lIns="0" tIns="0" rIns="0" bIns="0" rtlCol="0" anchor="ctr"/>
+          <a:lstStyle/>
+          <a:p>
+            <a:pPr indent="0" marL="0">
+              <a:buNone/>
+            </a:pPr>
+            <a:r>
+              <a:rPr lang="en-US" sz="1700" b="1" dirty="0">
+                <a:solidFill>
+                  <a:schemeClr val="tx1"/>
+                </a:solidFill>
+                <a:latin typeface="Cambria" pitchFamily="34" charset="0"/>
+                <a:ea typeface="Cambria" pitchFamily="34" charset="-122"/>
+                <a:cs typeface="Cambria" pitchFamily="34" charset="-120"/>
+              </a:rPr>
+              <a:t>Quarterly indicators</a:t>
+            </a:r>
+            <a:endParaRPr lang="en-US" sz="1700" dirty="0"/>
+          </a:p>
+        </p:txBody>
+      </p:sp>
+      <p:sp>
+        <p:nvSpPr>
+          <p:cNvPr id="13" name="Text 8"/>
+          <p:cNvSpPr txBox="1"/>
+          <p:nvPr/>
+        </p:nvSpPr>
+        <p:spPr>
+          <a:xfrm>
+            <a:off x="4617720" y="2651760"/>
+            <a:ext cx="2953512" cy="914400"/>
           </a:xfrm>
           <a:prstGeom prst="rect">
             <a:avLst/>
@@ -6567,27 +6163,132 @@
               <a:buNone/>
             </a:pPr>
             <a:r>
-              <a:rPr lang="en-US" sz="1200" i="1" dirty="0">
-                <a:solidFill>
-                  <a:schemeClr val="accent5"/>
-                </a:solidFill>
-              </a:rPr>
-              <a:t>Implementation plan of a unit, with actions and months</a:t>
-            </a:r>
-            <a:endParaRPr lang="en-US" sz="1200" dirty="0"/>
-          </a:p>
-        </p:txBody>
-      </p:sp>
-      <p:sp>
-        <p:nvSpPr>
-          <p:cNvPr id="10" name="Text 5"/>
-          <p:cNvSpPr txBox="1"/>
-          <p:nvPr/>
-        </p:nvSpPr>
-        <p:spPr>
-          <a:xfrm>
-            <a:off x="640080" y="5623560"/>
-            <a:ext cx="10881360" cy="640080"/>
+              <a:rPr lang="en-US" sz="1400" dirty="0">
+                <a:solidFill>
+                  <a:schemeClr val="tx1"/>
+                </a:solidFill>
+              </a:rPr>
+              <a:t>Progress against each target, in the quarters its months fall in.</a:t>
+            </a:r>
+            <a:endParaRPr lang="en-US" sz="1400" dirty="0"/>
+          </a:p>
+        </p:txBody>
+      </p:sp>
+      <p:sp>
+        <p:nvSpPr>
+          <p:cNvPr id="14" name="Exec 3"/>
+          <p:cNvSpPr/>
+          <p:nvPr/>
+        </p:nvSpPr>
+        <p:spPr>
+          <a:xfrm>
+            <a:off x="8046720" y="1600200"/>
+            <a:ext cx="3502152" cy="2011680"/>
+          </a:xfrm>
+          <a:prstGeom prst="roundRect">
+            <a:avLst>
+              <a:gd name="adj" fmla="val 4545"/>
+            </a:avLst>
+          </a:prstGeom>
+          <a:solidFill>
+            <a:schemeClr val="bg2"/>
+          </a:solidFill>
+          <a:ln/>
+        </p:spPr>
+      </p:sp>
+      <p:sp>
+        <p:nvSpPr>
+          <p:cNvPr id="15" name="Exec circle 3"/>
+          <p:cNvSpPr/>
+          <p:nvPr/>
+        </p:nvSpPr>
+        <p:spPr>
+          <a:xfrm>
+            <a:off x="8321040" y="1874520"/>
+            <a:ext cx="640080" cy="640080"/>
+          </a:xfrm>
+          <a:prstGeom prst="ellipse">
+            <a:avLst/>
+          </a:prstGeom>
+          <a:solidFill>
+            <a:schemeClr val="accent4"/>
+          </a:solidFill>
+          <a:ln/>
+        </p:spPr>
+      </p:sp>
+      <p:pic>
+        <p:nvPicPr>
+          <p:cNvPr id="16" name="Exec icon 3" descr="Narratives">    </p:cNvPr>
+          <p:cNvPicPr>
+            <a:picLocks noChangeAspect="1"/>
+          </p:cNvPicPr>
+          <p:nvPr/>
+        </p:nvPicPr>
+        <p:blipFill>
+          <a:blip r:embed="rId3"/>
+          <a:stretch>
+            <a:fillRect/>
+          </a:stretch>
+        </p:blipFill>
+        <p:spPr>
+          <a:xfrm>
+            <a:off x="8485632" y="2039112"/>
+            <a:ext cx="310896" cy="310896"/>
+          </a:xfrm>
+          <a:prstGeom prst="rect">
+            <a:avLst/>
+          </a:prstGeom>
+        </p:spPr>
+      </p:pic>
+      <p:sp>
+        <p:nvSpPr>
+          <p:cNvPr id="17" name="Text 11"/>
+          <p:cNvSpPr txBox="1"/>
+          <p:nvPr/>
+        </p:nvSpPr>
+        <p:spPr>
+          <a:xfrm>
+            <a:off x="9098280" y="1874520"/>
+            <a:ext cx="2221992" cy="640080"/>
+          </a:xfrm>
+          <a:prstGeom prst="rect">
+            <a:avLst/>
+          </a:prstGeom>
+          <a:noFill/>
+          <a:ln/>
+        </p:spPr>
+        <p:txBody>
+          <a:bodyPr wrap="square" lIns="0" tIns="0" rIns="0" bIns="0" rtlCol="0" anchor="ctr"/>
+          <a:lstStyle/>
+          <a:p>
+            <a:pPr indent="0" marL="0">
+              <a:buNone/>
+            </a:pPr>
+            <a:r>
+              <a:rPr lang="en-US" sz="1700" b="1" dirty="0">
+                <a:solidFill>
+                  <a:schemeClr val="tx1"/>
+                </a:solidFill>
+                <a:latin typeface="Cambria" pitchFamily="34" charset="0"/>
+                <a:ea typeface="Cambria" pitchFamily="34" charset="-122"/>
+                <a:cs typeface="Cambria" pitchFamily="34" charset="-120"/>
+              </a:rPr>
+              <a:t>Narratives</a:t>
+            </a:r>
+            <a:endParaRPr lang="en-US" sz="1700" dirty="0"/>
+          </a:p>
+        </p:txBody>
+      </p:sp>
+      <p:sp>
+        <p:nvSpPr>
+          <p:cNvPr id="18" name="Text 12"/>
+          <p:cNvSpPr txBox="1"/>
+          <p:nvPr/>
+        </p:nvSpPr>
+        <p:spPr>
+          <a:xfrm>
+            <a:off x="8321040" y="2651760"/>
+            <a:ext cx="2953512" cy="914400"/>
           </a:xfrm>
           <a:prstGeom prst="rect">
             <a:avLst/>
@@ -6603,25 +6304,437 @@
               <a:buNone/>
             </a:pPr>
             <a:r>
-              <a:rPr lang="en-US" sz="1500" b="1" dirty="0">
-                <a:solidFill>
-                  <a:schemeClr val="tx1"/>
-                </a:solidFill>
-              </a:rPr>
-              <a:t>Also: </a:t>
-            </a:r>
-            <a:pPr indent="0" marL="0">
-              <a:buNone/>
-            </a:pPr>
-            <a:r>
-              <a:rPr lang="en-US" sz="1500" dirty="0">
-                <a:solidFill>
-                  <a:schemeClr val="tx1"/>
-                </a:solidFill>
-              </a:rPr>
-              <a:t>the performance report (monthly or quarterly) with the narratives and the verified figures; CSV export of the activities and of the report data.</a:t>
-            </a:r>
-            <a:endParaRPr lang="en-US" sz="1500" dirty="0"/>
+              <a:rPr lang="en-US" sz="1400" dirty="0">
+                <a:solidFill>
+                  <a:schemeClr val="tx1"/>
+                </a:solidFill>
+              </a:rPr>
+              <a:t>Results achieved and constraints, for each month and each quarter.</a:t>
+            </a:r>
+            <a:endParaRPr lang="en-US" sz="1400" dirty="0"/>
+          </a:p>
+        </p:txBody>
+      </p:sp>
+      <p:sp>
+        <p:nvSpPr>
+          <p:cNvPr id="19" name="Exec 4"/>
+          <p:cNvSpPr/>
+          <p:nvPr/>
+        </p:nvSpPr>
+        <p:spPr>
+          <a:xfrm>
+            <a:off x="640080" y="3840480"/>
+            <a:ext cx="3502152" cy="2011680"/>
+          </a:xfrm>
+          <a:prstGeom prst="roundRect">
+            <a:avLst>
+              <a:gd name="adj" fmla="val 4545"/>
+            </a:avLst>
+          </a:prstGeom>
+          <a:solidFill>
+            <a:schemeClr val="bg2"/>
+          </a:solidFill>
+          <a:ln/>
+        </p:spPr>
+      </p:sp>
+      <p:sp>
+        <p:nvSpPr>
+          <p:cNvPr id="20" name="Exec circle 4"/>
+          <p:cNvSpPr/>
+          <p:nvPr/>
+        </p:nvSpPr>
+        <p:spPr>
+          <a:xfrm>
+            <a:off x="914400" y="4114800"/>
+            <a:ext cx="640080" cy="640080"/>
+          </a:xfrm>
+          <a:prstGeom prst="ellipse">
+            <a:avLst/>
+          </a:prstGeom>
+          <a:solidFill>
+            <a:schemeClr val="accent6"/>
+          </a:solidFill>
+          <a:ln/>
+        </p:spPr>
+      </p:sp>
+      <p:pic>
+        <p:nvPicPr>
+          <p:cNvPr id="21" name="Exec icon 4" descr="Verified by someone else">    </p:cNvPr>
+          <p:cNvPicPr>
+            <a:picLocks noChangeAspect="1"/>
+          </p:cNvPicPr>
+          <p:nvPr/>
+        </p:nvPicPr>
+        <p:blipFill>
+          <a:blip r:embed="rId4"/>
+          <a:stretch>
+            <a:fillRect/>
+          </a:stretch>
+        </p:blipFill>
+        <p:spPr>
+          <a:xfrm>
+            <a:off x="1078992" y="4279392"/>
+            <a:ext cx="310896" cy="310896"/>
+          </a:xfrm>
+          <a:prstGeom prst="rect">
+            <a:avLst/>
+          </a:prstGeom>
+        </p:spPr>
+      </p:pic>
+      <p:sp>
+        <p:nvSpPr>
+          <p:cNvPr id="22" name="Text 15"/>
+          <p:cNvSpPr txBox="1"/>
+          <p:nvPr/>
+        </p:nvSpPr>
+        <p:spPr>
+          <a:xfrm>
+            <a:off x="1691640" y="4114800"/>
+            <a:ext cx="2221992" cy="640080"/>
+          </a:xfrm>
+          <a:prstGeom prst="rect">
+            <a:avLst/>
+          </a:prstGeom>
+          <a:noFill/>
+          <a:ln/>
+        </p:spPr>
+        <p:txBody>
+          <a:bodyPr wrap="square" lIns="0" tIns="0" rIns="0" bIns="0" rtlCol="0" anchor="ctr"/>
+          <a:lstStyle/>
+          <a:p>
+            <a:pPr indent="0" marL="0">
+              <a:buNone/>
+            </a:pPr>
+            <a:r>
+              <a:rPr lang="en-US" sz="1700" b="1" dirty="0">
+                <a:solidFill>
+                  <a:schemeClr val="tx1"/>
+                </a:solidFill>
+                <a:latin typeface="Cambria" pitchFamily="34" charset="0"/>
+                <a:ea typeface="Cambria" pitchFamily="34" charset="-122"/>
+                <a:cs typeface="Cambria" pitchFamily="34" charset="-120"/>
+              </a:rPr>
+              <a:t>Verified by someone else</a:t>
+            </a:r>
+            <a:endParaRPr lang="en-US" sz="1700" dirty="0"/>
+          </a:p>
+        </p:txBody>
+      </p:sp>
+      <p:sp>
+        <p:nvSpPr>
+          <p:cNvPr id="23" name="Text 16"/>
+          <p:cNvSpPr txBox="1"/>
+          <p:nvPr/>
+        </p:nvSpPr>
+        <p:spPr>
+          <a:xfrm>
+            <a:off x="914400" y="4892040"/>
+            <a:ext cx="2953512" cy="914400"/>
+          </a:xfrm>
+          <a:prstGeom prst="rect">
+            <a:avLst/>
+          </a:prstGeom>
+          <a:noFill/>
+          <a:ln/>
+        </p:spPr>
+        <p:txBody>
+          <a:bodyPr wrap="square" lIns="0" tIns="0" rIns="0" bIns="0" rtlCol="0" anchor="t"/>
+          <a:lstStyle/>
+          <a:p>
+            <a:pPr indent="0" marL="0">
+              <a:buNone/>
+            </a:pPr>
+            <a:r>
+              <a:rPr lang="en-US" sz="1400" dirty="0">
+                <a:solidFill>
+                  <a:schemeClr val="tx1"/>
+                </a:solidFill>
+              </a:rPr>
+              <a:t>Nobody verifies their own report; only verified figures reach the reports.</a:t>
+            </a:r>
+            <a:endParaRPr lang="en-US" sz="1400" dirty="0"/>
+          </a:p>
+        </p:txBody>
+      </p:sp>
+      <p:sp>
+        <p:nvSpPr>
+          <p:cNvPr id="24" name="Exec 5"/>
+          <p:cNvSpPr/>
+          <p:nvPr/>
+        </p:nvSpPr>
+        <p:spPr>
+          <a:xfrm>
+            <a:off x="4343400" y="3840480"/>
+            <a:ext cx="3502152" cy="2011680"/>
+          </a:xfrm>
+          <a:prstGeom prst="roundRect">
+            <a:avLst>
+              <a:gd name="adj" fmla="val 4545"/>
+            </a:avLst>
+          </a:prstGeom>
+          <a:solidFill>
+            <a:schemeClr val="bg2"/>
+          </a:solidFill>
+          <a:ln/>
+        </p:spPr>
+      </p:sp>
+      <p:sp>
+        <p:nvSpPr>
+          <p:cNvPr id="25" name="Exec circle 5"/>
+          <p:cNvSpPr/>
+          <p:nvPr/>
+        </p:nvSpPr>
+        <p:spPr>
+          <a:xfrm>
+            <a:off x="4617720" y="4114800"/>
+            <a:ext cx="640080" cy="640080"/>
+          </a:xfrm>
+          <a:prstGeom prst="ellipse">
+            <a:avLst/>
+          </a:prstGeom>
+          <a:solidFill>
+            <a:schemeClr val="accent1"/>
+          </a:solidFill>
+          <a:ln/>
+        </p:spPr>
+      </p:sp>
+      <p:pic>
+        <p:nvPicPr>
+          <p:cNvPr id="26" name="Exec icon 5" descr="Windows">    </p:cNvPr>
+          <p:cNvPicPr>
+            <a:picLocks noChangeAspect="1"/>
+          </p:cNvPicPr>
+          <p:nvPr/>
+        </p:nvPicPr>
+        <p:blipFill>
+          <a:blip r:embed="rId5"/>
+          <a:stretch>
+            <a:fillRect/>
+          </a:stretch>
+        </p:blipFill>
+        <p:spPr>
+          <a:xfrm>
+            <a:off x="4782312" y="4279392"/>
+            <a:ext cx="310896" cy="310896"/>
+          </a:xfrm>
+          <a:prstGeom prst="rect">
+            <a:avLst/>
+          </a:prstGeom>
+        </p:spPr>
+      </p:pic>
+      <p:sp>
+        <p:nvSpPr>
+          <p:cNvPr id="27" name="Text 19"/>
+          <p:cNvSpPr txBox="1"/>
+          <p:nvPr/>
+        </p:nvSpPr>
+        <p:spPr>
+          <a:xfrm>
+            <a:off x="5394960" y="4114800"/>
+            <a:ext cx="2221992" cy="640080"/>
+          </a:xfrm>
+          <a:prstGeom prst="rect">
+            <a:avLst/>
+          </a:prstGeom>
+          <a:noFill/>
+          <a:ln/>
+        </p:spPr>
+        <p:txBody>
+          <a:bodyPr wrap="square" lIns="0" tIns="0" rIns="0" bIns="0" rtlCol="0" anchor="ctr"/>
+          <a:lstStyle/>
+          <a:p>
+            <a:pPr indent="0" marL="0">
+              <a:buNone/>
+            </a:pPr>
+            <a:r>
+              <a:rPr lang="en-US" sz="1700" b="1" dirty="0">
+                <a:solidFill>
+                  <a:schemeClr val="tx1"/>
+                </a:solidFill>
+                <a:latin typeface="Cambria" pitchFamily="34" charset="0"/>
+                <a:ea typeface="Cambria" pitchFamily="34" charset="-122"/>
+                <a:cs typeface="Cambria" pitchFamily="34" charset="-120"/>
+              </a:rPr>
+              <a:t>Windows</a:t>
+            </a:r>
+            <a:endParaRPr lang="en-US" sz="1700" dirty="0"/>
+          </a:p>
+        </p:txBody>
+      </p:sp>
+      <p:sp>
+        <p:nvSpPr>
+          <p:cNvPr id="28" name="Text 20"/>
+          <p:cNvSpPr txBox="1"/>
+          <p:nvPr/>
+        </p:nvSpPr>
+        <p:spPr>
+          <a:xfrm>
+            <a:off x="4617720" y="4892040"/>
+            <a:ext cx="2953512" cy="914400"/>
+          </a:xfrm>
+          <a:prstGeom prst="rect">
+            <a:avLst/>
+          </a:prstGeom>
+          <a:noFill/>
+          <a:ln/>
+        </p:spPr>
+        <p:txBody>
+          <a:bodyPr wrap="square" lIns="0" tIns="0" rIns="0" bIns="0" rtlCol="0" anchor="t"/>
+          <a:lstStyle/>
+          <a:p>
+            <a:pPr indent="0" marL="0">
+              <a:buNone/>
+            </a:pPr>
+            <a:r>
+              <a:rPr lang="en-US" sz="1400" dirty="0">
+                <a:solidFill>
+                  <a:schemeClr val="tx1"/>
+                </a:solidFill>
+              </a:rPr>
+              <a:t>A period outside its window cannot be reported; administrators always can.</a:t>
+            </a:r>
+            <a:endParaRPr lang="en-US" sz="1400" dirty="0"/>
+          </a:p>
+        </p:txBody>
+      </p:sp>
+      <p:sp>
+        <p:nvSpPr>
+          <p:cNvPr id="29" name="Exec 6"/>
+          <p:cNvSpPr/>
+          <p:nvPr/>
+        </p:nvSpPr>
+        <p:spPr>
+          <a:xfrm>
+            <a:off x="8046720" y="3840480"/>
+            <a:ext cx="3502152" cy="2011680"/>
+          </a:xfrm>
+          <a:prstGeom prst="roundRect">
+            <a:avLst>
+              <a:gd name="adj" fmla="val 4545"/>
+            </a:avLst>
+          </a:prstGeom>
+          <a:solidFill>
+            <a:schemeClr val="bg2"/>
+          </a:solidFill>
+          <a:ln/>
+        </p:spPr>
+      </p:sp>
+      <p:sp>
+        <p:nvSpPr>
+          <p:cNvPr id="30" name="Exec circle 6"/>
+          <p:cNvSpPr/>
+          <p:nvPr/>
+        </p:nvSpPr>
+        <p:spPr>
+          <a:xfrm>
+            <a:off x="8321040" y="4114800"/>
+            <a:ext cx="640080" cy="640080"/>
+          </a:xfrm>
+          <a:prstGeom prst="ellipse">
+            <a:avLst/>
+          </a:prstGeom>
+          <a:solidFill>
+            <a:schemeClr val="accent3"/>
+          </a:solidFill>
+          <a:ln/>
+        </p:spPr>
+      </p:sp>
+      <p:pic>
+        <p:nvPicPr>
+          <p:cNvPr id="31" name="Exec icon 6" descr="Compile the quarter">    </p:cNvPr>
+          <p:cNvPicPr>
+            <a:picLocks noChangeAspect="1"/>
+          </p:cNvPicPr>
+          <p:nvPr/>
+        </p:nvPicPr>
+        <p:blipFill>
+          <a:blip r:embed="rId6"/>
+          <a:stretch>
+            <a:fillRect/>
+          </a:stretch>
+        </p:blipFill>
+        <p:spPr>
+          <a:xfrm>
+            <a:off x="8485632" y="4279392"/>
+            <a:ext cx="310896" cy="310896"/>
+          </a:xfrm>
+          <a:prstGeom prst="rect">
+            <a:avLst/>
+          </a:prstGeom>
+        </p:spPr>
+      </p:pic>
+      <p:sp>
+        <p:nvSpPr>
+          <p:cNvPr id="32" name="Text 23"/>
+          <p:cNvSpPr txBox="1"/>
+          <p:nvPr/>
+        </p:nvSpPr>
+        <p:spPr>
+          <a:xfrm>
+            <a:off x="9098280" y="4114800"/>
+            <a:ext cx="2221992" cy="640080"/>
+          </a:xfrm>
+          <a:prstGeom prst="rect">
+            <a:avLst/>
+          </a:prstGeom>
+          <a:noFill/>
+          <a:ln/>
+        </p:spPr>
+        <p:txBody>
+          <a:bodyPr wrap="square" lIns="0" tIns="0" rIns="0" bIns="0" rtlCol="0" anchor="ctr"/>
+          <a:lstStyle/>
+          <a:p>
+            <a:pPr indent="0" marL="0">
+              <a:buNone/>
+            </a:pPr>
+            <a:r>
+              <a:rPr lang="en-US" sz="1700" b="1" dirty="0">
+                <a:solidFill>
+                  <a:schemeClr val="tx1"/>
+                </a:solidFill>
+                <a:latin typeface="Cambria" pitchFamily="34" charset="0"/>
+                <a:ea typeface="Cambria" pitchFamily="34" charset="-122"/>
+                <a:cs typeface="Cambria" pitchFamily="34" charset="-120"/>
+              </a:rPr>
+              <a:t>Compile the quarter</a:t>
+            </a:r>
+            <a:endParaRPr lang="en-US" sz="1700" dirty="0"/>
+          </a:p>
+        </p:txBody>
+      </p:sp>
+      <p:sp>
+        <p:nvSpPr>
+          <p:cNvPr id="33" name="Text 24"/>
+          <p:cNvSpPr txBox="1"/>
+          <p:nvPr/>
+        </p:nvSpPr>
+        <p:spPr>
+          <a:xfrm>
+            <a:off x="8321040" y="4892040"/>
+            <a:ext cx="2953512" cy="914400"/>
+          </a:xfrm>
+          <a:prstGeom prst="rect">
+            <a:avLst/>
+          </a:prstGeom>
+          <a:noFill/>
+          <a:ln/>
+        </p:spPr>
+        <p:txBody>
+          <a:bodyPr wrap="square" lIns="0" tIns="0" rIns="0" bIns="0" rtlCol="0" anchor="t"/>
+          <a:lstStyle/>
+          <a:p>
+            <a:pPr indent="0" marL="0">
+              <a:buNone/>
+            </a:pPr>
+            <a:r>
+              <a:rPr lang="en-US" sz="1400" dirty="0">
+                <a:solidFill>
+                  <a:schemeClr val="tx1"/>
+                </a:solidFill>
+              </a:rPr>
+              <a:t>A draft from what the units reported, edited by the director into the text of the report.</a:t>
+            </a:r>
+            <a:endParaRPr lang="en-US" sz="1400" dirty="0"/>
           </a:p>
         </p:txBody>
       </p:sp>
@@ -6727,7 +6840,7 @@
                   <a:schemeClr val="tx1"/>
                 </a:solidFill>
               </a:rPr>
-              <a:t>Everyone sees and does what their role allows</a:t>
+              <a:t>The plan and its results, in the Ministry of Finance form</a:t>
             </a:r>
             <a:endParaRPr lang="en-US" sz="3400" dirty="0"/>
           </a:p>
@@ -6735,19 +6848,17 @@
       </p:sp>
       <p:sp>
         <p:nvSpPr>
-          <p:cNvPr id="4" name="Role 1"/>
-          <p:cNvSpPr/>
-          <p:nvPr/>
-        </p:nvSpPr>
-        <p:spPr>
-          <a:xfrm>
-            <a:off x="640080" y="1600200"/>
-            <a:ext cx="3502152" cy="2011680"/>
-          </a:xfrm>
-          <a:prstGeom prst="roundRect">
-            <a:avLst>
-              <a:gd name="adj" fmla="val 4545"/>
-            </a:avLst>
+          <p:cNvPr id="4" name="Frame approved-plan"/>
+          <p:cNvSpPr/>
+          <p:nvPr/>
+        </p:nvSpPr>
+        <p:spPr>
+          <a:xfrm>
+            <a:off x="640080" y="1508760"/>
+            <a:ext cx="5486400" cy="3463290"/>
+          </a:xfrm>
+          <a:prstGeom prst="rect">
+            <a:avLst/>
           </a:prstGeom>
           <a:solidFill>
             <a:schemeClr val="bg2"/>
@@ -6755,29 +6866,9 @@
           <a:ln/>
         </p:spPr>
       </p:sp>
-      <p:sp>
-        <p:nvSpPr>
-          <p:cNvPr id="5" name="Role circle 1"/>
-          <p:cNvSpPr/>
-          <p:nvPr/>
-        </p:nvSpPr>
-        <p:spPr>
-          <a:xfrm>
-            <a:off x="914400" y="1874520"/>
-            <a:ext cx="640080" cy="640080"/>
-          </a:xfrm>
-          <a:prstGeom prst="ellipse">
-            <a:avLst/>
-          </a:prstGeom>
-          <a:solidFill>
-            <a:schemeClr val="accent1"/>
-          </a:solidFill>
-          <a:ln/>
-        </p:spPr>
-      </p:sp>
       <p:pic>
         <p:nvPicPr>
-          <p:cNvPr id="6" name="Role icon 1" descr="Administrator">    </p:cNvPr>
+          <p:cNvPr id="5" name="Screenshot approved-plan" descr="The final plan report in the Ministry of Finance form">    </p:cNvPr>
           <p:cNvPicPr>
             <a:picLocks noChangeAspect="1"/>
           </p:cNvPicPr>
@@ -6791,8 +6882,8 @@
         </p:blipFill>
         <p:spPr>
           <a:xfrm>
-            <a:off x="1078992" y="2039112"/>
-            <a:ext cx="310896" cy="310896"/>
+            <a:off x="685800" y="1554480"/>
+            <a:ext cx="5394960" cy="3371850"/>
           </a:xfrm>
           <a:prstGeom prst="rect">
             <a:avLst/>
@@ -6801,53 +6892,14 @@
       </p:pic>
       <p:sp>
         <p:nvSpPr>
-          <p:cNvPr id="7" name="Text 3"/>
-          <p:cNvSpPr txBox="1"/>
-          <p:nvPr/>
-        </p:nvSpPr>
-        <p:spPr>
-          <a:xfrm>
-            <a:off x="1691640" y="1874520"/>
-            <a:ext cx="2221992" cy="640080"/>
-          </a:xfrm>
-          <a:prstGeom prst="rect">
-            <a:avLst/>
-          </a:prstGeom>
-          <a:noFill/>
-          <a:ln/>
-        </p:spPr>
-        <p:txBody>
-          <a:bodyPr wrap="square" lIns="0" tIns="0" rIns="0" bIns="0" rtlCol="0" anchor="ctr"/>
-          <a:lstStyle/>
-          <a:p>
-            <a:pPr indent="0" marL="0">
-              <a:buNone/>
-            </a:pPr>
-            <a:r>
-              <a:rPr lang="en-US" sz="1700" b="1" dirty="0">
-                <a:solidFill>
-                  <a:schemeClr val="tx1"/>
-                </a:solidFill>
-                <a:latin typeface="Cambria" pitchFamily="34" charset="0"/>
-                <a:ea typeface="Cambria" pitchFamily="34" charset="-122"/>
-                <a:cs typeface="Cambria" pitchFamily="34" charset="-120"/>
-              </a:rPr>
-              <a:t>Administrator</a:t>
-            </a:r>
-            <a:endParaRPr lang="en-US" sz="1700" dirty="0"/>
-          </a:p>
-        </p:txBody>
-      </p:sp>
-      <p:sp>
-        <p:nvSpPr>
-          <p:cNvPr id="8" name="Text 4"/>
-          <p:cNvSpPr txBox="1"/>
-          <p:nvPr/>
-        </p:nvSpPr>
-        <p:spPr>
-          <a:xfrm>
-            <a:off x="914400" y="2651760"/>
-            <a:ext cx="2953512" cy="914400"/>
+          <p:cNvPr id="6" name="Text 2"/>
+          <p:cNvSpPr txBox="1"/>
+          <p:nvPr/>
+        </p:nvSpPr>
+        <p:spPr>
+          <a:xfrm>
+            <a:off x="640080" y="5045202"/>
+            <a:ext cx="5486400" cy="411480"/>
           </a:xfrm>
           <a:prstGeom prst="rect">
             <a:avLst/>
@@ -6863,32 +6915,30 @@
               <a:buNone/>
             </a:pPr>
             <a:r>
-              <a:rPr lang="en-US" sz="1400" dirty="0">
-                <a:solidFill>
-                  <a:schemeClr val="tx1"/>
-                </a:solidFill>
-              </a:rPr>
-              <a:t>Sets up the institution, users, windows and settings; can always act.</a:t>
-            </a:r>
-            <a:endParaRPr lang="en-US" sz="1400" dirty="0"/>
-          </a:p>
-        </p:txBody>
-      </p:sp>
-      <p:sp>
-        <p:nvSpPr>
-          <p:cNvPr id="9" name="Role 2"/>
-          <p:cNvSpPr/>
-          <p:nvPr/>
-        </p:nvSpPr>
-        <p:spPr>
-          <a:xfrm>
-            <a:off x="4343400" y="1600200"/>
-            <a:ext cx="3502152" cy="2011680"/>
-          </a:xfrm>
-          <a:prstGeom prst="roundRect">
-            <a:avLst>
-              <a:gd name="adj" fmla="val 4545"/>
-            </a:avLst>
+              <a:rPr lang="en-US" sz="1200" i="1" dirty="0">
+                <a:solidFill>
+                  <a:schemeClr val="accent5"/>
+                </a:solidFill>
+              </a:rPr>
+              <a:t>Final plan report: complete or summary</a:t>
+            </a:r>
+            <a:endParaRPr lang="en-US" sz="1200" dirty="0"/>
+          </a:p>
+        </p:txBody>
+      </p:sp>
+      <p:sp>
+        <p:nvSpPr>
+          <p:cNvPr id="7" name="Frame implementation-plan"/>
+          <p:cNvSpPr/>
+          <p:nvPr/>
+        </p:nvSpPr>
+        <p:spPr>
+          <a:xfrm>
+            <a:off x="6263640" y="1508760"/>
+            <a:ext cx="5486400" cy="3463290"/>
+          </a:xfrm>
+          <a:prstGeom prst="rect">
+            <a:avLst/>
           </a:prstGeom>
           <a:solidFill>
             <a:schemeClr val="bg2"/>
@@ -6896,29 +6946,9 @@
           <a:ln/>
         </p:spPr>
       </p:sp>
-      <p:sp>
-        <p:nvSpPr>
-          <p:cNvPr id="10" name="Role circle 2"/>
-          <p:cNvSpPr/>
-          <p:nvPr/>
-        </p:nvSpPr>
-        <p:spPr>
-          <a:xfrm>
-            <a:off x="4617720" y="1874520"/>
-            <a:ext cx="640080" cy="640080"/>
-          </a:xfrm>
-          <a:prstGeom prst="ellipse">
-            <a:avLst/>
-          </a:prstGeom>
-          <a:solidFill>
-            <a:schemeClr val="accent3"/>
-          </a:solidFill>
-          <a:ln/>
-        </p:spPr>
-      </p:sp>
       <p:pic>
         <p:nvPicPr>
-          <p:cNvPr id="11" name="Role icon 2" descr="Minister">    </p:cNvPr>
+          <p:cNvPr id="8" name="Screenshot implementation-plan" descr="The implementation plan of a unit with its actions and the January to December grid">    </p:cNvPr>
           <p:cNvPicPr>
             <a:picLocks noChangeAspect="1"/>
           </p:cNvPicPr>
@@ -6932,8 +6962,8 @@
         </p:blipFill>
         <p:spPr>
           <a:xfrm>
-            <a:off x="4782312" y="2039112"/>
-            <a:ext cx="310896" cy="310896"/>
+            <a:off x="6309360" y="1554480"/>
+            <a:ext cx="5394960" cy="3371850"/>
           </a:xfrm>
           <a:prstGeom prst="rect">
             <a:avLst/>
@@ -6942,53 +6972,14 @@
       </p:pic>
       <p:sp>
         <p:nvSpPr>
-          <p:cNvPr id="12" name="Text 7"/>
-          <p:cNvSpPr txBox="1"/>
-          <p:nvPr/>
-        </p:nvSpPr>
-        <p:spPr>
-          <a:xfrm>
-            <a:off x="5394960" y="1874520"/>
-            <a:ext cx="2221992" cy="640080"/>
-          </a:xfrm>
-          <a:prstGeom prst="rect">
-            <a:avLst/>
-          </a:prstGeom>
-          <a:noFill/>
-          <a:ln/>
-        </p:spPr>
-        <p:txBody>
-          <a:bodyPr wrap="square" lIns="0" tIns="0" rIns="0" bIns="0" rtlCol="0" anchor="ctr"/>
-          <a:lstStyle/>
-          <a:p>
-            <a:pPr indent="0" marL="0">
-              <a:buNone/>
-            </a:pPr>
-            <a:r>
-              <a:rPr lang="en-US" sz="1700" b="1" dirty="0">
-                <a:solidFill>
-                  <a:schemeClr val="tx1"/>
-                </a:solidFill>
-                <a:latin typeface="Cambria" pitchFamily="34" charset="0"/>
-                <a:ea typeface="Cambria" pitchFamily="34" charset="-122"/>
-                <a:cs typeface="Cambria" pitchFamily="34" charset="-120"/>
-              </a:rPr>
-              <a:t>Minister</a:t>
-            </a:r>
-            <a:endParaRPr lang="en-US" sz="1700" dirty="0"/>
-          </a:p>
-        </p:txBody>
-      </p:sp>
-      <p:sp>
-        <p:nvSpPr>
-          <p:cNvPr id="13" name="Text 8"/>
-          <p:cNvSpPr txBox="1"/>
-          <p:nvPr/>
-        </p:nvSpPr>
-        <p:spPr>
-          <a:xfrm>
-            <a:off x="4617720" y="2651760"/>
-            <a:ext cx="2953512" cy="914400"/>
+          <p:cNvPr id="9" name="Text 4"/>
+          <p:cNvSpPr txBox="1"/>
+          <p:nvPr/>
+        </p:nvSpPr>
+        <p:spPr>
+          <a:xfrm>
+            <a:off x="6263640" y="5045202"/>
+            <a:ext cx="5486400" cy="411480"/>
           </a:xfrm>
           <a:prstGeom prst="rect">
             <a:avLst/>
@@ -7004,132 +6995,27 @@
               <a:buNone/>
             </a:pPr>
             <a:r>
-              <a:rPr lang="en-US" sz="1400" dirty="0">
-                <a:solidFill>
-                  <a:schemeClr val="tx1"/>
-                </a:solidFill>
-              </a:rPr>
-              <a:t>Sees every plan and approves the fiscal envelope.</a:t>
-            </a:r>
-            <a:endParaRPr lang="en-US" sz="1400" dirty="0"/>
-          </a:p>
-        </p:txBody>
-      </p:sp>
-      <p:sp>
-        <p:nvSpPr>
-          <p:cNvPr id="14" name="Role 3"/>
-          <p:cNvSpPr/>
-          <p:nvPr/>
-        </p:nvSpPr>
-        <p:spPr>
-          <a:xfrm>
-            <a:off x="8046720" y="1600200"/>
-            <a:ext cx="3502152" cy="2011680"/>
-          </a:xfrm>
-          <a:prstGeom prst="roundRect">
-            <a:avLst>
-              <a:gd name="adj" fmla="val 4545"/>
-            </a:avLst>
-          </a:prstGeom>
-          <a:solidFill>
-            <a:schemeClr val="bg2"/>
-          </a:solidFill>
-          <a:ln/>
-        </p:spPr>
-      </p:sp>
-      <p:sp>
-        <p:nvSpPr>
-          <p:cNvPr id="15" name="Role circle 3"/>
-          <p:cNvSpPr/>
-          <p:nvPr/>
-        </p:nvSpPr>
-        <p:spPr>
-          <a:xfrm>
-            <a:off x="8321040" y="1874520"/>
-            <a:ext cx="640080" cy="640080"/>
-          </a:xfrm>
-          <a:prstGeom prst="ellipse">
-            <a:avLst/>
-          </a:prstGeom>
-          <a:solidFill>
-            <a:schemeClr val="accent4"/>
-          </a:solidFill>
-          <a:ln/>
-        </p:spPr>
-      </p:sp>
-      <p:pic>
-        <p:nvPicPr>
-          <p:cNvPr id="16" name="Role icon 3" descr="Director">    </p:cNvPr>
-          <p:cNvPicPr>
-            <a:picLocks noChangeAspect="1"/>
-          </p:cNvPicPr>
-          <p:nvPr/>
-        </p:nvPicPr>
-        <p:blipFill>
-          <a:blip r:embed="rId3"/>
-          <a:stretch>
-            <a:fillRect/>
-          </a:stretch>
-        </p:blipFill>
-        <p:spPr>
-          <a:xfrm>
-            <a:off x="8485632" y="2039112"/>
-            <a:ext cx="310896" cy="310896"/>
-          </a:xfrm>
-          <a:prstGeom prst="rect">
-            <a:avLst/>
-          </a:prstGeom>
-        </p:spPr>
-      </p:pic>
-      <p:sp>
-        <p:nvSpPr>
-          <p:cNvPr id="17" name="Text 11"/>
-          <p:cNvSpPr txBox="1"/>
-          <p:nvPr/>
-        </p:nvSpPr>
-        <p:spPr>
-          <a:xfrm>
-            <a:off x="9098280" y="1874520"/>
-            <a:ext cx="2221992" cy="640080"/>
-          </a:xfrm>
-          <a:prstGeom prst="rect">
-            <a:avLst/>
-          </a:prstGeom>
-          <a:noFill/>
-          <a:ln/>
-        </p:spPr>
-        <p:txBody>
-          <a:bodyPr wrap="square" lIns="0" tIns="0" rIns="0" bIns="0" rtlCol="0" anchor="ctr"/>
-          <a:lstStyle/>
-          <a:p>
-            <a:pPr indent="0" marL="0">
-              <a:buNone/>
-            </a:pPr>
-            <a:r>
-              <a:rPr lang="en-US" sz="1700" b="1" dirty="0">
-                <a:solidFill>
-                  <a:schemeClr val="tx1"/>
-                </a:solidFill>
-                <a:latin typeface="Cambria" pitchFamily="34" charset="0"/>
-                <a:ea typeface="Cambria" pitchFamily="34" charset="-122"/>
-                <a:cs typeface="Cambria" pitchFamily="34" charset="-120"/>
-              </a:rPr>
-              <a:t>Director</a:t>
-            </a:r>
-            <a:endParaRPr lang="en-US" sz="1700" dirty="0"/>
-          </a:p>
-        </p:txBody>
-      </p:sp>
-      <p:sp>
-        <p:nvSpPr>
-          <p:cNvPr id="18" name="Text 12"/>
-          <p:cNvSpPr txBox="1"/>
-          <p:nvPr/>
-        </p:nvSpPr>
-        <p:spPr>
-          <a:xfrm>
-            <a:off x="8321040" y="2651760"/>
-            <a:ext cx="2953512" cy="914400"/>
+              <a:rPr lang="en-US" sz="1200" i="1" dirty="0">
+                <a:solidFill>
+                  <a:schemeClr val="accent5"/>
+                </a:solidFill>
+              </a:rPr>
+              <a:t>Implementation plan of a unit, with actions and months</a:t>
+            </a:r>
+            <a:endParaRPr lang="en-US" sz="1200" dirty="0"/>
+          </a:p>
+        </p:txBody>
+      </p:sp>
+      <p:sp>
+        <p:nvSpPr>
+          <p:cNvPr id="10" name="Text 5"/>
+          <p:cNvSpPr txBox="1"/>
+          <p:nvPr/>
+        </p:nvSpPr>
+        <p:spPr>
+          <a:xfrm>
+            <a:off x="640080" y="5623560"/>
+            <a:ext cx="10881360" cy="640080"/>
           </a:xfrm>
           <a:prstGeom prst="rect">
             <a:avLst/>
@@ -7145,437 +7031,25 @@
               <a:buNone/>
             </a:pPr>
             <a:r>
-              <a:rPr lang="en-US" sz="1400" dirty="0">
-                <a:solidFill>
-                  <a:schemeClr val="tx1"/>
-                </a:solidFill>
-              </a:rPr>
-              <a:t>Certifies; the head of a directorate gives its final approval and finalizes its plan.</a:t>
-            </a:r>
-            <a:endParaRPr lang="en-US" sz="1400" dirty="0"/>
-          </a:p>
-        </p:txBody>
-      </p:sp>
-      <p:sp>
-        <p:nvSpPr>
-          <p:cNvPr id="19" name="Role 4"/>
-          <p:cNvSpPr/>
-          <p:nvPr/>
-        </p:nvSpPr>
-        <p:spPr>
-          <a:xfrm>
-            <a:off x="640080" y="3840480"/>
-            <a:ext cx="3502152" cy="2011680"/>
-          </a:xfrm>
-          <a:prstGeom prst="roundRect">
-            <a:avLst>
-              <a:gd name="adj" fmla="val 4545"/>
-            </a:avLst>
-          </a:prstGeom>
-          <a:solidFill>
-            <a:schemeClr val="bg2"/>
-          </a:solidFill>
-          <a:ln/>
-        </p:spPr>
-      </p:sp>
-      <p:sp>
-        <p:nvSpPr>
-          <p:cNvPr id="20" name="Role circle 4"/>
-          <p:cNvSpPr/>
-          <p:nvPr/>
-        </p:nvSpPr>
-        <p:spPr>
-          <a:xfrm>
-            <a:off x="914400" y="4114800"/>
-            <a:ext cx="640080" cy="640080"/>
-          </a:xfrm>
-          <a:prstGeom prst="ellipse">
-            <a:avLst/>
-          </a:prstGeom>
-          <a:solidFill>
-            <a:schemeClr val="accent6"/>
-          </a:solidFill>
-          <a:ln/>
-        </p:spPr>
-      </p:sp>
-      <p:pic>
-        <p:nvPicPr>
-          <p:cNvPr id="21" name="Role icon 4" descr="Planner">    </p:cNvPr>
-          <p:cNvPicPr>
-            <a:picLocks noChangeAspect="1"/>
-          </p:cNvPicPr>
-          <p:nvPr/>
-        </p:nvPicPr>
-        <p:blipFill>
-          <a:blip r:embed="rId4"/>
-          <a:stretch>
-            <a:fillRect/>
-          </a:stretch>
-        </p:blipFill>
-        <p:spPr>
-          <a:xfrm>
-            <a:off x="1078992" y="4279392"/>
-            <a:ext cx="310896" cy="310896"/>
-          </a:xfrm>
-          <a:prstGeom prst="rect">
-            <a:avLst/>
-          </a:prstGeom>
-        </p:spPr>
-      </p:pic>
-      <p:sp>
-        <p:nvSpPr>
-          <p:cNvPr id="22" name="Text 15"/>
-          <p:cNvSpPr txBox="1"/>
-          <p:nvPr/>
-        </p:nvSpPr>
-        <p:spPr>
-          <a:xfrm>
-            <a:off x="1691640" y="4114800"/>
-            <a:ext cx="2221992" cy="640080"/>
-          </a:xfrm>
-          <a:prstGeom prst="rect">
-            <a:avLst/>
-          </a:prstGeom>
-          <a:noFill/>
-          <a:ln/>
-        </p:spPr>
-        <p:txBody>
-          <a:bodyPr wrap="square" lIns="0" tIns="0" rIns="0" bIns="0" rtlCol="0" anchor="ctr"/>
-          <a:lstStyle/>
-          <a:p>
-            <a:pPr indent="0" marL="0">
-              <a:buNone/>
-            </a:pPr>
-            <a:r>
-              <a:rPr lang="en-US" sz="1700" b="1" dirty="0">
-                <a:solidFill>
-                  <a:schemeClr val="tx1"/>
-                </a:solidFill>
-                <a:latin typeface="Cambria" pitchFamily="34" charset="0"/>
-                <a:ea typeface="Cambria" pitchFamily="34" charset="-122"/>
-                <a:cs typeface="Cambria" pitchFamily="34" charset="-120"/>
-              </a:rPr>
-              <a:t>Planner</a:t>
-            </a:r>
-            <a:endParaRPr lang="en-US" sz="1700" dirty="0"/>
-          </a:p>
-        </p:txBody>
-      </p:sp>
-      <p:sp>
-        <p:nvSpPr>
-          <p:cNvPr id="23" name="Text 16"/>
-          <p:cNvSpPr txBox="1"/>
-          <p:nvPr/>
-        </p:nvSpPr>
-        <p:spPr>
-          <a:xfrm>
-            <a:off x="914400" y="4892040"/>
-            <a:ext cx="2953512" cy="914400"/>
-          </a:xfrm>
-          <a:prstGeom prst="rect">
-            <a:avLst/>
-          </a:prstGeom>
-          <a:noFill/>
-          <a:ln/>
-        </p:spPr>
-        <p:txBody>
-          <a:bodyPr wrap="square" lIns="0" tIns="0" rIns="0" bIns="0" rtlCol="0" anchor="t"/>
-          <a:lstStyle/>
-          <a:p>
-            <a:pPr indent="0" marL="0">
-              <a:buNone/>
-            </a:pPr>
-            <a:r>
-              <a:rPr lang="en-US" sz="1400" dirty="0">
-                <a:solidFill>
-                  <a:schemeClr val="tx1"/>
-                </a:solidFill>
-              </a:rPr>
-              <a:t>Prepares activities, indicators and budget lines, and reports execution.</a:t>
-            </a:r>
-            <a:endParaRPr lang="en-US" sz="1400" dirty="0"/>
-          </a:p>
-        </p:txBody>
-      </p:sp>
-      <p:sp>
-        <p:nvSpPr>
-          <p:cNvPr id="24" name="Role 5"/>
-          <p:cNvSpPr/>
-          <p:nvPr/>
-        </p:nvSpPr>
-        <p:spPr>
-          <a:xfrm>
-            <a:off x="4343400" y="3840480"/>
-            <a:ext cx="3502152" cy="2011680"/>
-          </a:xfrm>
-          <a:prstGeom prst="roundRect">
-            <a:avLst>
-              <a:gd name="adj" fmla="val 4545"/>
-            </a:avLst>
-          </a:prstGeom>
-          <a:solidFill>
-            <a:schemeClr val="bg2"/>
-          </a:solidFill>
-          <a:ln/>
-        </p:spPr>
-      </p:sp>
-      <p:sp>
-        <p:nvSpPr>
-          <p:cNvPr id="25" name="Role circle 5"/>
-          <p:cNvSpPr/>
-          <p:nvPr/>
-        </p:nvSpPr>
-        <p:spPr>
-          <a:xfrm>
-            <a:off x="4617720" y="4114800"/>
-            <a:ext cx="640080" cy="640080"/>
-          </a:xfrm>
-          <a:prstGeom prst="ellipse">
-            <a:avLst/>
-          </a:prstGeom>
-          <a:solidFill>
-            <a:schemeClr val="accent1"/>
-          </a:solidFill>
-          <a:ln/>
-        </p:spPr>
-      </p:sp>
-      <p:pic>
-        <p:nvPicPr>
-          <p:cNvPr id="26" name="Role icon 5" descr="Finance">    </p:cNvPr>
-          <p:cNvPicPr>
-            <a:picLocks noChangeAspect="1"/>
-          </p:cNvPicPr>
-          <p:nvPr/>
-        </p:nvPicPr>
-        <p:blipFill>
-          <a:blip r:embed="rId5"/>
-          <a:stretch>
-            <a:fillRect/>
-          </a:stretch>
-        </p:blipFill>
-        <p:spPr>
-          <a:xfrm>
-            <a:off x="4782312" y="4279392"/>
-            <a:ext cx="310896" cy="310896"/>
-          </a:xfrm>
-          <a:prstGeom prst="rect">
-            <a:avLst/>
-          </a:prstGeom>
-        </p:spPr>
-      </p:pic>
-      <p:sp>
-        <p:nvSpPr>
-          <p:cNvPr id="27" name="Text 19"/>
-          <p:cNvSpPr txBox="1"/>
-          <p:nvPr/>
-        </p:nvSpPr>
-        <p:spPr>
-          <a:xfrm>
-            <a:off x="5394960" y="4114800"/>
-            <a:ext cx="2221992" cy="640080"/>
-          </a:xfrm>
-          <a:prstGeom prst="rect">
-            <a:avLst/>
-          </a:prstGeom>
-          <a:noFill/>
-          <a:ln/>
-        </p:spPr>
-        <p:txBody>
-          <a:bodyPr wrap="square" lIns="0" tIns="0" rIns="0" bIns="0" rtlCol="0" anchor="ctr"/>
-          <a:lstStyle/>
-          <a:p>
-            <a:pPr indent="0" marL="0">
-              <a:buNone/>
-            </a:pPr>
-            <a:r>
-              <a:rPr lang="en-US" sz="1700" b="1" dirty="0">
-                <a:solidFill>
-                  <a:schemeClr val="tx1"/>
-                </a:solidFill>
-                <a:latin typeface="Cambria" pitchFamily="34" charset="0"/>
-                <a:ea typeface="Cambria" pitchFamily="34" charset="-122"/>
-                <a:cs typeface="Cambria" pitchFamily="34" charset="-120"/>
-              </a:rPr>
-              <a:t>Finance</a:t>
-            </a:r>
-            <a:endParaRPr lang="en-US" sz="1700" dirty="0"/>
-          </a:p>
-        </p:txBody>
-      </p:sp>
-      <p:sp>
-        <p:nvSpPr>
-          <p:cNvPr id="28" name="Text 20"/>
-          <p:cNvSpPr txBox="1"/>
-          <p:nvPr/>
-        </p:nvSpPr>
-        <p:spPr>
-          <a:xfrm>
-            <a:off x="4617720" y="4892040"/>
-            <a:ext cx="2953512" cy="914400"/>
-          </a:xfrm>
-          <a:prstGeom prst="rect">
-            <a:avLst/>
-          </a:prstGeom>
-          <a:noFill/>
-          <a:ln/>
-        </p:spPr>
-        <p:txBody>
-          <a:bodyPr wrap="square" lIns="0" tIns="0" rIns="0" bIns="0" rtlCol="0" anchor="t"/>
-          <a:lstStyle/>
-          <a:p>
-            <a:pPr indent="0" marL="0">
-              <a:buNone/>
-            </a:pPr>
-            <a:r>
-              <a:rPr lang="en-US" sz="1400" dirty="0">
-                <a:solidFill>
-                  <a:schemeClr val="tx1"/>
-                </a:solidFill>
-              </a:rPr>
-              <a:t>Confirms budget lines and verifies the spending that units report.</a:t>
-            </a:r>
-            <a:endParaRPr lang="en-US" sz="1400" dirty="0"/>
-          </a:p>
-        </p:txBody>
-      </p:sp>
-      <p:sp>
-        <p:nvSpPr>
-          <p:cNvPr id="29" name="Role 6"/>
-          <p:cNvSpPr/>
-          <p:nvPr/>
-        </p:nvSpPr>
-        <p:spPr>
-          <a:xfrm>
-            <a:off x="8046720" y="3840480"/>
-            <a:ext cx="3502152" cy="2011680"/>
-          </a:xfrm>
-          <a:prstGeom prst="roundRect">
-            <a:avLst>
-              <a:gd name="adj" fmla="val 4545"/>
-            </a:avLst>
-          </a:prstGeom>
-          <a:solidFill>
-            <a:schemeClr val="bg2"/>
-          </a:solidFill>
-          <a:ln/>
-        </p:spPr>
-      </p:sp>
-      <p:sp>
-        <p:nvSpPr>
-          <p:cNvPr id="30" name="Role circle 6"/>
-          <p:cNvSpPr/>
-          <p:nvPr/>
-        </p:nvSpPr>
-        <p:spPr>
-          <a:xfrm>
-            <a:off x="8321040" y="4114800"/>
-            <a:ext cx="640080" cy="640080"/>
-          </a:xfrm>
-          <a:prstGeom prst="ellipse">
-            <a:avLst/>
-          </a:prstGeom>
-          <a:solidFill>
-            <a:schemeClr val="accent5"/>
-          </a:solidFill>
-          <a:ln/>
-        </p:spPr>
-      </p:sp>
-      <p:pic>
-        <p:nvPicPr>
-          <p:cNvPr id="31" name="Role icon 6" descr="Viewer">    </p:cNvPr>
-          <p:cNvPicPr>
-            <a:picLocks noChangeAspect="1"/>
-          </p:cNvPicPr>
-          <p:nvPr/>
-        </p:nvPicPr>
-        <p:blipFill>
-          <a:blip r:embed="rId6"/>
-          <a:stretch>
-            <a:fillRect/>
-          </a:stretch>
-        </p:blipFill>
-        <p:spPr>
-          <a:xfrm>
-            <a:off x="8485632" y="4279392"/>
-            <a:ext cx="310896" cy="310896"/>
-          </a:xfrm>
-          <a:prstGeom prst="rect">
-            <a:avLst/>
-          </a:prstGeom>
-        </p:spPr>
-      </p:pic>
-      <p:sp>
-        <p:nvSpPr>
-          <p:cNvPr id="32" name="Text 23"/>
-          <p:cNvSpPr txBox="1"/>
-          <p:nvPr/>
-        </p:nvSpPr>
-        <p:spPr>
-          <a:xfrm>
-            <a:off x="9098280" y="4114800"/>
-            <a:ext cx="2221992" cy="640080"/>
-          </a:xfrm>
-          <a:prstGeom prst="rect">
-            <a:avLst/>
-          </a:prstGeom>
-          <a:noFill/>
-          <a:ln/>
-        </p:spPr>
-        <p:txBody>
-          <a:bodyPr wrap="square" lIns="0" tIns="0" rIns="0" bIns="0" rtlCol="0" anchor="ctr"/>
-          <a:lstStyle/>
-          <a:p>
-            <a:pPr indent="0" marL="0">
-              <a:buNone/>
-            </a:pPr>
-            <a:r>
-              <a:rPr lang="en-US" sz="1700" b="1" dirty="0">
-                <a:solidFill>
-                  <a:schemeClr val="tx1"/>
-                </a:solidFill>
-                <a:latin typeface="Cambria" pitchFamily="34" charset="0"/>
-                <a:ea typeface="Cambria" pitchFamily="34" charset="-122"/>
-                <a:cs typeface="Cambria" pitchFamily="34" charset="-120"/>
-              </a:rPr>
-              <a:t>Viewer</a:t>
-            </a:r>
-            <a:endParaRPr lang="en-US" sz="1700" dirty="0"/>
-          </a:p>
-        </p:txBody>
-      </p:sp>
-      <p:sp>
-        <p:nvSpPr>
-          <p:cNvPr id="33" name="Text 24"/>
-          <p:cNvSpPr txBox="1"/>
-          <p:nvPr/>
-        </p:nvSpPr>
-        <p:spPr>
-          <a:xfrm>
-            <a:off x="8321040" y="4892040"/>
-            <a:ext cx="2953512" cy="914400"/>
-          </a:xfrm>
-          <a:prstGeom prst="rect">
-            <a:avLst/>
-          </a:prstGeom>
-          <a:noFill/>
-          <a:ln/>
-        </p:spPr>
-        <p:txBody>
-          <a:bodyPr wrap="square" lIns="0" tIns="0" rIns="0" bIns="0" rtlCol="0" anchor="t"/>
-          <a:lstStyle/>
-          <a:p>
-            <a:pPr indent="0" marL="0">
-              <a:buNone/>
-            </a:pPr>
-            <a:r>
-              <a:rPr lang="en-US" sz="1400" dirty="0">
-                <a:solidFill>
-                  <a:schemeClr val="tx1"/>
-                </a:solidFill>
-              </a:rPr>
-              <a:t>Reads plans and reports; changes nothing.</a:t>
-            </a:r>
-            <a:endParaRPr lang="en-US" sz="1400" dirty="0"/>
+              <a:rPr lang="en-US" sz="1500" b="1" dirty="0">
+                <a:solidFill>
+                  <a:schemeClr val="tx1"/>
+                </a:solidFill>
+              </a:rPr>
+              <a:t>Also: </a:t>
+            </a:r>
+            <a:pPr indent="0" marL="0">
+              <a:buNone/>
+            </a:pPr>
+            <a:r>
+              <a:rPr lang="en-US" sz="1500" dirty="0">
+                <a:solidFill>
+                  <a:schemeClr val="tx1"/>
+                </a:solidFill>
+              </a:rPr>
+              <a:t>the performance report (monthly or quarterly) with the narratives and the verified figures; CSV export of the activities and of the report data.</a:t>
+            </a:r>
+            <a:endParaRPr lang="en-US" sz="1500" dirty="0"/>
           </a:p>
         </p:txBody>
       </p:sp>
@@ -7681,7 +7155,7 @@
                   <a:schemeClr val="tx1"/>
                 </a:solidFill>
               </a:rPr>
-              <a:t>A professional, accessible interface</a:t>
+              <a:t>Everyone sees and does what their role allows</a:t>
             </a:r>
             <a:endParaRPr lang="en-US" sz="3400" dirty="0"/>
           </a:p>
@@ -7689,17 +7163,19 @@
       </p:sp>
       <p:sp>
         <p:nvSpPr>
-          <p:cNvPr id="4" name="Frame dashboard"/>
-          <p:cNvSpPr/>
-          <p:nvPr/>
-        </p:nvSpPr>
-        <p:spPr>
-          <a:xfrm>
-            <a:off x="640080" y="1508760"/>
-            <a:ext cx="6858000" cy="4320540"/>
-          </a:xfrm>
-          <a:prstGeom prst="rect">
-            <a:avLst/>
+          <p:cNvPr id="4" name="Role 1"/>
+          <p:cNvSpPr/>
+          <p:nvPr/>
+        </p:nvSpPr>
+        <p:spPr>
+          <a:xfrm>
+            <a:off x="640080" y="1600200"/>
+            <a:ext cx="3502152" cy="2011680"/>
+          </a:xfrm>
+          <a:prstGeom prst="roundRect">
+            <a:avLst>
+              <a:gd name="adj" fmla="val 4545"/>
+            </a:avLst>
           </a:prstGeom>
           <a:solidFill>
             <a:schemeClr val="bg2"/>
@@ -7707,9 +7183,29 @@
           <a:ln/>
         </p:spPr>
       </p:sp>
+      <p:sp>
+        <p:nvSpPr>
+          <p:cNvPr id="5" name="Role circle 1"/>
+          <p:cNvSpPr/>
+          <p:nvPr/>
+        </p:nvSpPr>
+        <p:spPr>
+          <a:xfrm>
+            <a:off x="914400" y="1874520"/>
+            <a:ext cx="640080" cy="640080"/>
+          </a:xfrm>
+          <a:prstGeom prst="ellipse">
+            <a:avLst/>
+          </a:prstGeom>
+          <a:solidFill>
+            <a:schemeClr val="accent1"/>
+          </a:solidFill>
+          <a:ln/>
+        </p:spPr>
+      </p:sp>
       <p:pic>
         <p:nvPicPr>
-          <p:cNvPr id="5" name="Screenshot dashboard" descr="The dashboard with the plan cycle tracker, key figures and what needs attention">    </p:cNvPr>
+          <p:cNvPr id="6" name="Role icon 1" descr="Administrator">    </p:cNvPr>
           <p:cNvPicPr>
             <a:picLocks noChangeAspect="1"/>
           </p:cNvPicPr>
@@ -7723,8 +7219,8 @@
         </p:blipFill>
         <p:spPr>
           <a:xfrm>
-            <a:off x="685800" y="1554480"/>
-            <a:ext cx="6766560" cy="4229100"/>
+            <a:off x="1078992" y="2039112"/>
+            <a:ext cx="310896" cy="310896"/>
           </a:xfrm>
           <a:prstGeom prst="rect">
             <a:avLst/>
@@ -7733,14 +7229,53 @@
       </p:pic>
       <p:sp>
         <p:nvSpPr>
-          <p:cNvPr id="6" name="Text 2"/>
-          <p:cNvSpPr txBox="1"/>
-          <p:nvPr/>
-        </p:nvSpPr>
-        <p:spPr>
-          <a:xfrm>
-            <a:off x="640080" y="5902452"/>
-            <a:ext cx="6858000" cy="411480"/>
+          <p:cNvPr id="7" name="Text 3"/>
+          <p:cNvSpPr txBox="1"/>
+          <p:nvPr/>
+        </p:nvSpPr>
+        <p:spPr>
+          <a:xfrm>
+            <a:off x="1691640" y="1874520"/>
+            <a:ext cx="2221992" cy="640080"/>
+          </a:xfrm>
+          <a:prstGeom prst="rect">
+            <a:avLst/>
+          </a:prstGeom>
+          <a:noFill/>
+          <a:ln/>
+        </p:spPr>
+        <p:txBody>
+          <a:bodyPr wrap="square" lIns="0" tIns="0" rIns="0" bIns="0" rtlCol="0" anchor="ctr"/>
+          <a:lstStyle/>
+          <a:p>
+            <a:pPr indent="0" marL="0">
+              <a:buNone/>
+            </a:pPr>
+            <a:r>
+              <a:rPr lang="en-US" sz="1700" b="1" dirty="0">
+                <a:solidFill>
+                  <a:schemeClr val="tx1"/>
+                </a:solidFill>
+                <a:latin typeface="Cambria" pitchFamily="34" charset="0"/>
+                <a:ea typeface="Cambria" pitchFamily="34" charset="-122"/>
+                <a:cs typeface="Cambria" pitchFamily="34" charset="-120"/>
+              </a:rPr>
+              <a:t>Administrator</a:t>
+            </a:r>
+            <a:endParaRPr lang="en-US" sz="1700" dirty="0"/>
+          </a:p>
+        </p:txBody>
+      </p:sp>
+      <p:sp>
+        <p:nvSpPr>
+          <p:cNvPr id="8" name="Text 4"/>
+          <p:cNvSpPr txBox="1"/>
+          <p:nvPr/>
+        </p:nvSpPr>
+        <p:spPr>
+          <a:xfrm>
+            <a:off x="914400" y="2651760"/>
+            <a:ext cx="2953512" cy="914400"/>
           </a:xfrm>
           <a:prstGeom prst="rect">
             <a:avLst/>
@@ -7756,40 +7291,62 @@
               <a:buNone/>
             </a:pPr>
             <a:r>
-              <a:rPr lang="en-US" sz="1200" i="1" dirty="0">
-                <a:solidFill>
-                  <a:schemeClr val="accent5"/>
-                </a:solidFill>
-              </a:rPr>
-              <a:t>The dashboard: the plan's cycle, key figures and what needs your attention</a:t>
-            </a:r>
-            <a:endParaRPr lang="en-US" sz="1200" dirty="0"/>
-          </a:p>
-        </p:txBody>
-      </p:sp>
-      <p:sp>
-        <p:nvSpPr>
-          <p:cNvPr id="7" name="UI circle 1"/>
-          <p:cNvSpPr/>
-          <p:nvPr/>
-        </p:nvSpPr>
-        <p:spPr>
-          <a:xfrm>
-            <a:off x="7818120" y="1554480"/>
-            <a:ext cx="548640" cy="548640"/>
+              <a:rPr lang="en-US" sz="1400" dirty="0">
+                <a:solidFill>
+                  <a:schemeClr val="tx1"/>
+                </a:solidFill>
+              </a:rPr>
+              <a:t>Sets up the institution, users, windows and settings; can always act.</a:t>
+            </a:r>
+            <a:endParaRPr lang="en-US" sz="1400" dirty="0"/>
+          </a:p>
+        </p:txBody>
+      </p:sp>
+      <p:sp>
+        <p:nvSpPr>
+          <p:cNvPr id="9" name="Role 2"/>
+          <p:cNvSpPr/>
+          <p:nvPr/>
+        </p:nvSpPr>
+        <p:spPr>
+          <a:xfrm>
+            <a:off x="4343400" y="1600200"/>
+            <a:ext cx="3502152" cy="2011680"/>
+          </a:xfrm>
+          <a:prstGeom prst="roundRect">
+            <a:avLst>
+              <a:gd name="adj" fmla="val 4545"/>
+            </a:avLst>
+          </a:prstGeom>
+          <a:solidFill>
+            <a:schemeClr val="bg2"/>
+          </a:solidFill>
+          <a:ln/>
+        </p:spPr>
+      </p:sp>
+      <p:sp>
+        <p:nvSpPr>
+          <p:cNvPr id="10" name="Role circle 2"/>
+          <p:cNvSpPr/>
+          <p:nvPr/>
+        </p:nvSpPr>
+        <p:spPr>
+          <a:xfrm>
+            <a:off x="4617720" y="1874520"/>
+            <a:ext cx="640080" cy="640080"/>
           </a:xfrm>
           <a:prstGeom prst="ellipse">
             <a:avLst/>
           </a:prstGeom>
           <a:solidFill>
-            <a:schemeClr val="accent1"/>
+            <a:schemeClr val="accent3"/>
           </a:solidFill>
           <a:ln/>
         </p:spPr>
       </p:sp>
       <p:pic>
         <p:nvPicPr>
-          <p:cNvPr id="8" name="UI icon 1" descr="Clear at a glance">    </p:cNvPr>
+          <p:cNvPr id="11" name="Role icon 2" descr="Minister">    </p:cNvPr>
           <p:cNvPicPr>
             <a:picLocks noChangeAspect="1"/>
           </p:cNvPicPr>
@@ -7803,8 +7360,8 @@
         </p:blipFill>
         <p:spPr>
           <a:xfrm>
-            <a:off x="7955280" y="1691640"/>
-            <a:ext cx="274320" cy="274320"/>
+            <a:off x="4782312" y="2039112"/>
+            <a:ext cx="310896" cy="310896"/>
           </a:xfrm>
           <a:prstGeom prst="rect">
             <a:avLst/>
@@ -7813,14 +7370,53 @@
       </p:pic>
       <p:sp>
         <p:nvSpPr>
-          <p:cNvPr id="9" name="Text 4"/>
-          <p:cNvSpPr txBox="1"/>
-          <p:nvPr/>
-        </p:nvSpPr>
-        <p:spPr>
-          <a:xfrm>
-            <a:off x="8549640" y="1508760"/>
-            <a:ext cx="3017520" cy="1463040"/>
+          <p:cNvPr id="12" name="Text 7"/>
+          <p:cNvSpPr txBox="1"/>
+          <p:nvPr/>
+        </p:nvSpPr>
+        <p:spPr>
+          <a:xfrm>
+            <a:off x="5394960" y="1874520"/>
+            <a:ext cx="2221992" cy="640080"/>
+          </a:xfrm>
+          <a:prstGeom prst="rect">
+            <a:avLst/>
+          </a:prstGeom>
+          <a:noFill/>
+          <a:ln/>
+        </p:spPr>
+        <p:txBody>
+          <a:bodyPr wrap="square" lIns="0" tIns="0" rIns="0" bIns="0" rtlCol="0" anchor="ctr"/>
+          <a:lstStyle/>
+          <a:p>
+            <a:pPr indent="0" marL="0">
+              <a:buNone/>
+            </a:pPr>
+            <a:r>
+              <a:rPr lang="en-US" sz="1700" b="1" dirty="0">
+                <a:solidFill>
+                  <a:schemeClr val="tx1"/>
+                </a:solidFill>
+                <a:latin typeface="Cambria" pitchFamily="34" charset="0"/>
+                <a:ea typeface="Cambria" pitchFamily="34" charset="-122"/>
+                <a:cs typeface="Cambria" pitchFamily="34" charset="-120"/>
+              </a:rPr>
+              <a:t>Minister</a:t>
+            </a:r>
+            <a:endParaRPr lang="en-US" sz="1700" dirty="0"/>
+          </a:p>
+        </p:txBody>
+      </p:sp>
+      <p:sp>
+        <p:nvSpPr>
+          <p:cNvPr id="13" name="Text 8"/>
+          <p:cNvSpPr txBox="1"/>
+          <p:nvPr/>
+        </p:nvSpPr>
+        <p:spPr>
+          <a:xfrm>
+            <a:off x="4617720" y="2651760"/>
+            <a:ext cx="2953512" cy="914400"/>
           </a:xfrm>
           <a:prstGeom prst="rect">
             <a:avLst/>
@@ -7836,54 +7432,62 @@
               <a:buNone/>
             </a:pPr>
             <a:r>
-              <a:rPr lang="en-US" sz="1700" b="1" dirty="0">
-                <a:solidFill>
-                  <a:schemeClr val="tx1"/>
-                </a:solidFill>
-              </a:rPr>
-              <a:t>Clear at a glance</a:t>
-            </a:r>
-            <a:endParaRPr lang="en-US" sz="1700" dirty="0"/>
-          </a:p>
-          <a:p>
-            <a:pPr indent="0" marL="0">
-              <a:buNone/>
-            </a:pPr>
-            <a:r>
               <a:rPr lang="en-US" sz="1400" dirty="0">
                 <a:solidFill>
                   <a:schemeClr val="tx1"/>
                 </a:solidFill>
               </a:rPr>
-              <a:t>The plan's cycle, the figures and your own to-do list on one page.</a:t>
-            </a:r>
-            <a:endParaRPr lang="en-US" sz="1700" dirty="0"/>
-          </a:p>
-        </p:txBody>
-      </p:sp>
-      <p:sp>
-        <p:nvSpPr>
-          <p:cNvPr id="10" name="UI circle 2"/>
-          <p:cNvSpPr/>
-          <p:nvPr/>
-        </p:nvSpPr>
-        <p:spPr>
-          <a:xfrm>
-            <a:off x="7818120" y="3154680"/>
-            <a:ext cx="548640" cy="548640"/>
+              <a:t>Sees every plan and every report; does not approve plans.</a:t>
+            </a:r>
+            <a:endParaRPr lang="en-US" sz="1400" dirty="0"/>
+          </a:p>
+        </p:txBody>
+      </p:sp>
+      <p:sp>
+        <p:nvSpPr>
+          <p:cNvPr id="14" name="Role 3"/>
+          <p:cNvSpPr/>
+          <p:nvPr/>
+        </p:nvSpPr>
+        <p:spPr>
+          <a:xfrm>
+            <a:off x="8046720" y="1600200"/>
+            <a:ext cx="3502152" cy="2011680"/>
+          </a:xfrm>
+          <a:prstGeom prst="roundRect">
+            <a:avLst>
+              <a:gd name="adj" fmla="val 4545"/>
+            </a:avLst>
+          </a:prstGeom>
+          <a:solidFill>
+            <a:schemeClr val="bg2"/>
+          </a:solidFill>
+          <a:ln/>
+        </p:spPr>
+      </p:sp>
+      <p:sp>
+        <p:nvSpPr>
+          <p:cNvPr id="15" name="Role circle 3"/>
+          <p:cNvSpPr/>
+          <p:nvPr/>
+        </p:nvSpPr>
+        <p:spPr>
+          <a:xfrm>
+            <a:off x="8321040" y="1874520"/>
+            <a:ext cx="640080" cy="640080"/>
           </a:xfrm>
           <a:prstGeom prst="ellipse">
             <a:avLst/>
           </a:prstGeom>
           <a:solidFill>
-            <a:schemeClr val="accent3"/>
+            <a:schemeClr val="accent4"/>
           </a:solidFill>
           <a:ln/>
         </p:spPr>
       </p:sp>
       <p:pic>
         <p:nvPicPr>
-          <p:cNvPr id="11" name="UI icon 2" descr="Three languages">    </p:cNvPr>
+          <p:cNvPr id="16" name="Role icon 3" descr="Director">    </p:cNvPr>
           <p:cNvPicPr>
             <a:picLocks noChangeAspect="1"/>
           </p:cNvPicPr>
@@ -7897,8 +7501,8 @@
         </p:blipFill>
         <p:spPr>
           <a:xfrm>
-            <a:off x="7955280" y="3291840"/>
-            <a:ext cx="274320" cy="274320"/>
+            <a:off x="8485632" y="2039112"/>
+            <a:ext cx="310896" cy="310896"/>
           </a:xfrm>
           <a:prstGeom prst="rect">
             <a:avLst/>
@@ -7907,14 +7511,53 @@
       </p:pic>
       <p:sp>
         <p:nvSpPr>
-          <p:cNvPr id="12" name="Text 6"/>
-          <p:cNvSpPr txBox="1"/>
-          <p:nvPr/>
-        </p:nvSpPr>
-        <p:spPr>
-          <a:xfrm>
-            <a:off x="8549640" y="3108960"/>
-            <a:ext cx="3017520" cy="1463040"/>
+          <p:cNvPr id="17" name="Text 11"/>
+          <p:cNvSpPr txBox="1"/>
+          <p:nvPr/>
+        </p:nvSpPr>
+        <p:spPr>
+          <a:xfrm>
+            <a:off x="9098280" y="1874520"/>
+            <a:ext cx="2221992" cy="640080"/>
+          </a:xfrm>
+          <a:prstGeom prst="rect">
+            <a:avLst/>
+          </a:prstGeom>
+          <a:noFill/>
+          <a:ln/>
+        </p:spPr>
+        <p:txBody>
+          <a:bodyPr wrap="square" lIns="0" tIns="0" rIns="0" bIns="0" rtlCol="0" anchor="ctr"/>
+          <a:lstStyle/>
+          <a:p>
+            <a:pPr indent="0" marL="0">
+              <a:buNone/>
+            </a:pPr>
+            <a:r>
+              <a:rPr lang="en-US" sz="1700" b="1" dirty="0">
+                <a:solidFill>
+                  <a:schemeClr val="tx1"/>
+                </a:solidFill>
+                <a:latin typeface="Cambria" pitchFamily="34" charset="0"/>
+                <a:ea typeface="Cambria" pitchFamily="34" charset="-122"/>
+                <a:cs typeface="Cambria" pitchFamily="34" charset="-120"/>
+              </a:rPr>
+              <a:t>Director</a:t>
+            </a:r>
+            <a:endParaRPr lang="en-US" sz="1700" dirty="0"/>
+          </a:p>
+        </p:txBody>
+      </p:sp>
+      <p:sp>
+        <p:nvSpPr>
+          <p:cNvPr id="18" name="Text 12"/>
+          <p:cNvSpPr txBox="1"/>
+          <p:nvPr/>
+        </p:nvSpPr>
+        <p:spPr>
+          <a:xfrm>
+            <a:off x="8321040" y="2651760"/>
+            <a:ext cx="2953512" cy="914400"/>
           </a:xfrm>
           <a:prstGeom prst="rect">
             <a:avLst/>
@@ -7930,54 +7573,62 @@
               <a:buNone/>
             </a:pPr>
             <a:r>
-              <a:rPr lang="en-US" sz="1700" b="1" dirty="0">
-                <a:solidFill>
-                  <a:schemeClr val="tx1"/>
-                </a:solidFill>
-              </a:rPr>
-              <a:t>Three languages</a:t>
-            </a:r>
-            <a:endParaRPr lang="en-US" sz="1700" dirty="0"/>
-          </a:p>
-          <a:p>
-            <a:pPr indent="0" marL="0">
-              <a:buNone/>
-            </a:pPr>
-            <a:r>
               <a:rPr lang="en-US" sz="1400" dirty="0">
                 <a:solidFill>
                   <a:schemeClr val="tx1"/>
                 </a:solidFill>
               </a:rPr>
-              <a:t>English, Portuguese and Tetum; a test blocks any new text without its translations.</a:t>
-            </a:r>
-            <a:endParaRPr lang="en-US" sz="1700" dirty="0"/>
-          </a:p>
-        </p:txBody>
-      </p:sp>
-      <p:sp>
-        <p:nvSpPr>
-          <p:cNvPr id="13" name="UI circle 3"/>
-          <p:cNvSpPr/>
-          <p:nvPr/>
-        </p:nvSpPr>
-        <p:spPr>
-          <a:xfrm>
-            <a:off x="7818120" y="4754880"/>
-            <a:ext cx="548640" cy="548640"/>
+              <a:t>Certifies; the head of a directorate gives its final approval and finalizes its plan.</a:t>
+            </a:r>
+            <a:endParaRPr lang="en-US" sz="1400" dirty="0"/>
+          </a:p>
+        </p:txBody>
+      </p:sp>
+      <p:sp>
+        <p:nvSpPr>
+          <p:cNvPr id="19" name="Role 4"/>
+          <p:cNvSpPr/>
+          <p:nvPr/>
+        </p:nvSpPr>
+        <p:spPr>
+          <a:xfrm>
+            <a:off x="640080" y="3840480"/>
+            <a:ext cx="3502152" cy="2011680"/>
+          </a:xfrm>
+          <a:prstGeom prst="roundRect">
+            <a:avLst>
+              <a:gd name="adj" fmla="val 4545"/>
+            </a:avLst>
+          </a:prstGeom>
+          <a:solidFill>
+            <a:schemeClr val="bg2"/>
+          </a:solidFill>
+          <a:ln/>
+        </p:spPr>
+      </p:sp>
+      <p:sp>
+        <p:nvSpPr>
+          <p:cNvPr id="20" name="Role circle 4"/>
+          <p:cNvSpPr/>
+          <p:nvPr/>
+        </p:nvSpPr>
+        <p:spPr>
+          <a:xfrm>
+            <a:off x="914400" y="4114800"/>
+            <a:ext cx="640080" cy="640080"/>
           </a:xfrm>
           <a:prstGeom prst="ellipse">
             <a:avLst/>
           </a:prstGeom>
           <a:solidFill>
-            <a:schemeClr val="accent4"/>
+            <a:schemeClr val="accent6"/>
           </a:solidFill>
           <a:ln/>
         </p:spPr>
       </p:sp>
       <p:pic>
         <p:nvPicPr>
-          <p:cNvPr id="14" name="UI icon 3" descr="Made for the role">    </p:cNvPr>
+          <p:cNvPr id="21" name="Role icon 4" descr="Planner">    </p:cNvPr>
           <p:cNvPicPr>
             <a:picLocks noChangeAspect="1"/>
           </p:cNvPicPr>
@@ -7991,8 +7642,8 @@
         </p:blipFill>
         <p:spPr>
           <a:xfrm>
-            <a:off x="7955280" y="4892040"/>
-            <a:ext cx="274320" cy="274320"/>
+            <a:off x="1078992" y="4279392"/>
+            <a:ext cx="310896" cy="310896"/>
           </a:xfrm>
           <a:prstGeom prst="rect">
             <a:avLst/>
@@ -8001,14 +7652,53 @@
       </p:pic>
       <p:sp>
         <p:nvSpPr>
-          <p:cNvPr id="15" name="Text 8"/>
-          <p:cNvSpPr txBox="1"/>
-          <p:nvPr/>
-        </p:nvSpPr>
-        <p:spPr>
-          <a:xfrm>
-            <a:off x="8549640" y="4709160"/>
-            <a:ext cx="3017520" cy="1463040"/>
+          <p:cNvPr id="22" name="Text 15"/>
+          <p:cNvSpPr txBox="1"/>
+          <p:nvPr/>
+        </p:nvSpPr>
+        <p:spPr>
+          <a:xfrm>
+            <a:off x="1691640" y="4114800"/>
+            <a:ext cx="2221992" cy="640080"/>
+          </a:xfrm>
+          <a:prstGeom prst="rect">
+            <a:avLst/>
+          </a:prstGeom>
+          <a:noFill/>
+          <a:ln/>
+        </p:spPr>
+        <p:txBody>
+          <a:bodyPr wrap="square" lIns="0" tIns="0" rIns="0" bIns="0" rtlCol="0" anchor="ctr"/>
+          <a:lstStyle/>
+          <a:p>
+            <a:pPr indent="0" marL="0">
+              <a:buNone/>
+            </a:pPr>
+            <a:r>
+              <a:rPr lang="en-US" sz="1700" b="1" dirty="0">
+                <a:solidFill>
+                  <a:schemeClr val="tx1"/>
+                </a:solidFill>
+                <a:latin typeface="Cambria" pitchFamily="34" charset="0"/>
+                <a:ea typeface="Cambria" pitchFamily="34" charset="-122"/>
+                <a:cs typeface="Cambria" pitchFamily="34" charset="-120"/>
+              </a:rPr>
+              <a:t>Planner</a:t>
+            </a:r>
+            <a:endParaRPr lang="en-US" sz="1700" dirty="0"/>
+          </a:p>
+        </p:txBody>
+      </p:sp>
+      <p:sp>
+        <p:nvSpPr>
+          <p:cNvPr id="23" name="Text 16"/>
+          <p:cNvSpPr txBox="1"/>
+          <p:nvPr/>
+        </p:nvSpPr>
+        <p:spPr>
+          <a:xfrm>
+            <a:off x="914400" y="4892040"/>
+            <a:ext cx="2953512" cy="914400"/>
           </a:xfrm>
           <a:prstGeom prst="rect">
             <a:avLst/>
@@ -8024,15 +7714,142 @@
               <a:buNone/>
             </a:pPr>
             <a:r>
+              <a:rPr lang="en-US" sz="1400" dirty="0">
+                <a:solidFill>
+                  <a:schemeClr val="tx1"/>
+                </a:solidFill>
+              </a:rPr>
+              <a:t>Prepares activities, indicators and budget lines, and reports execution.</a:t>
+            </a:r>
+            <a:endParaRPr lang="en-US" sz="1400" dirty="0"/>
+          </a:p>
+        </p:txBody>
+      </p:sp>
+      <p:sp>
+        <p:nvSpPr>
+          <p:cNvPr id="24" name="Role 5"/>
+          <p:cNvSpPr/>
+          <p:nvPr/>
+        </p:nvSpPr>
+        <p:spPr>
+          <a:xfrm>
+            <a:off x="4343400" y="3840480"/>
+            <a:ext cx="3502152" cy="2011680"/>
+          </a:xfrm>
+          <a:prstGeom prst="roundRect">
+            <a:avLst>
+              <a:gd name="adj" fmla="val 4545"/>
+            </a:avLst>
+          </a:prstGeom>
+          <a:solidFill>
+            <a:schemeClr val="bg2"/>
+          </a:solidFill>
+          <a:ln/>
+        </p:spPr>
+      </p:sp>
+      <p:sp>
+        <p:nvSpPr>
+          <p:cNvPr id="25" name="Role circle 5"/>
+          <p:cNvSpPr/>
+          <p:nvPr/>
+        </p:nvSpPr>
+        <p:spPr>
+          <a:xfrm>
+            <a:off x="4617720" y="4114800"/>
+            <a:ext cx="640080" cy="640080"/>
+          </a:xfrm>
+          <a:prstGeom prst="ellipse">
+            <a:avLst/>
+          </a:prstGeom>
+          <a:solidFill>
+            <a:schemeClr val="accent1"/>
+          </a:solidFill>
+          <a:ln/>
+        </p:spPr>
+      </p:sp>
+      <p:pic>
+        <p:nvPicPr>
+          <p:cNvPr id="26" name="Role icon 5" descr="Finance">    </p:cNvPr>
+          <p:cNvPicPr>
+            <a:picLocks noChangeAspect="1"/>
+          </p:cNvPicPr>
+          <p:nvPr/>
+        </p:nvPicPr>
+        <p:blipFill>
+          <a:blip r:embed="rId5"/>
+          <a:stretch>
+            <a:fillRect/>
+          </a:stretch>
+        </p:blipFill>
+        <p:spPr>
+          <a:xfrm>
+            <a:off x="4782312" y="4279392"/>
+            <a:ext cx="310896" cy="310896"/>
+          </a:xfrm>
+          <a:prstGeom prst="rect">
+            <a:avLst/>
+          </a:prstGeom>
+        </p:spPr>
+      </p:pic>
+      <p:sp>
+        <p:nvSpPr>
+          <p:cNvPr id="27" name="Text 19"/>
+          <p:cNvSpPr txBox="1"/>
+          <p:nvPr/>
+        </p:nvSpPr>
+        <p:spPr>
+          <a:xfrm>
+            <a:off x="5394960" y="4114800"/>
+            <a:ext cx="2221992" cy="640080"/>
+          </a:xfrm>
+          <a:prstGeom prst="rect">
+            <a:avLst/>
+          </a:prstGeom>
+          <a:noFill/>
+          <a:ln/>
+        </p:spPr>
+        <p:txBody>
+          <a:bodyPr wrap="square" lIns="0" tIns="0" rIns="0" bIns="0" rtlCol="0" anchor="ctr"/>
+          <a:lstStyle/>
+          <a:p>
+            <a:pPr indent="0" marL="0">
+              <a:buNone/>
+            </a:pPr>
+            <a:r>
               <a:rPr lang="en-US" sz="1700" b="1" dirty="0">
                 <a:solidFill>
                   <a:schemeClr val="tx1"/>
                 </a:solidFill>
-              </a:rPr>
-              <a:t>Made for the role</a:t>
+                <a:latin typeface="Cambria" pitchFamily="34" charset="0"/>
+                <a:ea typeface="Cambria" pitchFamily="34" charset="-122"/>
+                <a:cs typeface="Cambria" pitchFamily="34" charset="-120"/>
+              </a:rPr>
+              <a:t>Finance</a:t>
             </a:r>
             <a:endParaRPr lang="en-US" sz="1700" dirty="0"/>
           </a:p>
+        </p:txBody>
+      </p:sp>
+      <p:sp>
+        <p:nvSpPr>
+          <p:cNvPr id="28" name="Text 20"/>
+          <p:cNvSpPr txBox="1"/>
+          <p:nvPr/>
+        </p:nvSpPr>
+        <p:spPr>
+          <a:xfrm>
+            <a:off x="4617720" y="4892040"/>
+            <a:ext cx="2953512" cy="914400"/>
+          </a:xfrm>
+          <a:prstGeom prst="rect">
+            <a:avLst/>
+          </a:prstGeom>
+          <a:noFill/>
+          <a:ln/>
+        </p:spPr>
+        <p:txBody>
+          <a:bodyPr wrap="square" lIns="0" tIns="0" rIns="0" bIns="0" rtlCol="0" anchor="t"/>
+          <a:lstStyle/>
           <a:p>
             <a:pPr indent="0" marL="0">
               <a:buNone/>
@@ -8043,9 +7860,150 @@
                   <a:schemeClr val="tx1"/>
                 </a:solidFill>
               </a:rPr>
-              <a:t>The menu, the buttons and the inbox show only what your role can do.</a:t>
+              <a:t>Confirms budget lines and verifies the spending that units report.</a:t>
+            </a:r>
+            <a:endParaRPr lang="en-US" sz="1400" dirty="0"/>
+          </a:p>
+        </p:txBody>
+      </p:sp>
+      <p:sp>
+        <p:nvSpPr>
+          <p:cNvPr id="29" name="Role 6"/>
+          <p:cNvSpPr/>
+          <p:nvPr/>
+        </p:nvSpPr>
+        <p:spPr>
+          <a:xfrm>
+            <a:off x="8046720" y="3840480"/>
+            <a:ext cx="3502152" cy="2011680"/>
+          </a:xfrm>
+          <a:prstGeom prst="roundRect">
+            <a:avLst>
+              <a:gd name="adj" fmla="val 4545"/>
+            </a:avLst>
+          </a:prstGeom>
+          <a:solidFill>
+            <a:schemeClr val="bg2"/>
+          </a:solidFill>
+          <a:ln/>
+        </p:spPr>
+      </p:sp>
+      <p:sp>
+        <p:nvSpPr>
+          <p:cNvPr id="30" name="Role circle 6"/>
+          <p:cNvSpPr/>
+          <p:nvPr/>
+        </p:nvSpPr>
+        <p:spPr>
+          <a:xfrm>
+            <a:off x="8321040" y="4114800"/>
+            <a:ext cx="640080" cy="640080"/>
+          </a:xfrm>
+          <a:prstGeom prst="ellipse">
+            <a:avLst/>
+          </a:prstGeom>
+          <a:solidFill>
+            <a:schemeClr val="accent5"/>
+          </a:solidFill>
+          <a:ln/>
+        </p:spPr>
+      </p:sp>
+      <p:pic>
+        <p:nvPicPr>
+          <p:cNvPr id="31" name="Role icon 6" descr="Viewer">    </p:cNvPr>
+          <p:cNvPicPr>
+            <a:picLocks noChangeAspect="1"/>
+          </p:cNvPicPr>
+          <p:nvPr/>
+        </p:nvPicPr>
+        <p:blipFill>
+          <a:blip r:embed="rId6"/>
+          <a:stretch>
+            <a:fillRect/>
+          </a:stretch>
+        </p:blipFill>
+        <p:spPr>
+          <a:xfrm>
+            <a:off x="8485632" y="4279392"/>
+            <a:ext cx="310896" cy="310896"/>
+          </a:xfrm>
+          <a:prstGeom prst="rect">
+            <a:avLst/>
+          </a:prstGeom>
+        </p:spPr>
+      </p:pic>
+      <p:sp>
+        <p:nvSpPr>
+          <p:cNvPr id="32" name="Text 23"/>
+          <p:cNvSpPr txBox="1"/>
+          <p:nvPr/>
+        </p:nvSpPr>
+        <p:spPr>
+          <a:xfrm>
+            <a:off x="9098280" y="4114800"/>
+            <a:ext cx="2221992" cy="640080"/>
+          </a:xfrm>
+          <a:prstGeom prst="rect">
+            <a:avLst/>
+          </a:prstGeom>
+          <a:noFill/>
+          <a:ln/>
+        </p:spPr>
+        <p:txBody>
+          <a:bodyPr wrap="square" lIns="0" tIns="0" rIns="0" bIns="0" rtlCol="0" anchor="ctr"/>
+          <a:lstStyle/>
+          <a:p>
+            <a:pPr indent="0" marL="0">
+              <a:buNone/>
+            </a:pPr>
+            <a:r>
+              <a:rPr lang="en-US" sz="1700" b="1" dirty="0">
+                <a:solidFill>
+                  <a:schemeClr val="tx1"/>
+                </a:solidFill>
+                <a:latin typeface="Cambria" pitchFamily="34" charset="0"/>
+                <a:ea typeface="Cambria" pitchFamily="34" charset="-122"/>
+                <a:cs typeface="Cambria" pitchFamily="34" charset="-120"/>
+              </a:rPr>
+              <a:t>Viewer</a:t>
             </a:r>
             <a:endParaRPr lang="en-US" sz="1700" dirty="0"/>
+          </a:p>
+        </p:txBody>
+      </p:sp>
+      <p:sp>
+        <p:nvSpPr>
+          <p:cNvPr id="33" name="Text 24"/>
+          <p:cNvSpPr txBox="1"/>
+          <p:nvPr/>
+        </p:nvSpPr>
+        <p:spPr>
+          <a:xfrm>
+            <a:off x="8321040" y="4892040"/>
+            <a:ext cx="2953512" cy="914400"/>
+          </a:xfrm>
+          <a:prstGeom prst="rect">
+            <a:avLst/>
+          </a:prstGeom>
+          <a:noFill/>
+          <a:ln/>
+        </p:spPr>
+        <p:txBody>
+          <a:bodyPr wrap="square" lIns="0" tIns="0" rIns="0" bIns="0" rtlCol="0" anchor="t"/>
+          <a:lstStyle/>
+          <a:p>
+            <a:pPr indent="0" marL="0">
+              <a:buNone/>
+            </a:pPr>
+            <a:r>
+              <a:rPr lang="en-US" sz="1400" dirty="0">
+                <a:solidFill>
+                  <a:schemeClr val="tx1"/>
+                </a:solidFill>
+              </a:rPr>
+              <a:t>Reads plans and reports; changes nothing.</a:t>
+            </a:r>
+            <a:endParaRPr lang="en-US" sz="1400" dirty="0"/>
           </a:p>
         </p:txBody>
       </p:sp>
@@ -8151,7 +8109,7 @@
                   <a:schemeClr val="tx1"/>
                 </a:solidFill>
               </a:rPr>
-              <a:t>Built for any institution, whole ministry or one office</a:t>
+              <a:t>A professional, accessible interface</a:t>
             </a:r>
             <a:endParaRPr lang="en-US" sz="3400" dirty="0"/>
           </a:p>
@@ -8159,146 +8117,191 @@
       </p:sp>
       <p:sp>
         <p:nvSpPr>
-          <p:cNvPr id="4" name="Tree root"/>
-          <p:cNvSpPr/>
-          <p:nvPr/>
-        </p:nvSpPr>
-        <p:spPr>
-          <a:xfrm>
-            <a:off x="2011680" y="1691640"/>
-            <a:ext cx="2194560" cy="731520"/>
-          </a:xfrm>
-          <a:prstGeom prst="roundRect">
-            <a:avLst>
-              <a:gd name="adj" fmla="val 10000"/>
-            </a:avLst>
+          <p:cNvPr id="4" name="Frame dashboard"/>
+          <p:cNvSpPr/>
+          <p:nvPr/>
+        </p:nvSpPr>
+        <p:spPr>
+          <a:xfrm>
+            <a:off x="640080" y="1508760"/>
+            <a:ext cx="6858000" cy="4320540"/>
+          </a:xfrm>
+          <a:prstGeom prst="rect">
+            <a:avLst/>
           </a:prstGeom>
           <a:solidFill>
-            <a:schemeClr val="tx1"/>
+            <a:schemeClr val="bg2"/>
           </a:solidFill>
           <a:ln/>
         </p:spPr>
       </p:sp>
-      <p:sp>
-        <p:nvSpPr>
-          <p:cNvPr id="5" name="Tree root text"/>
-          <p:cNvSpPr txBox="1"/>
-          <p:nvPr/>
-        </p:nvSpPr>
-        <p:spPr>
-          <a:xfrm>
-            <a:off x="2011680" y="1691640"/>
-            <a:ext cx="2194560" cy="731520"/>
-          </a:xfrm>
-          <a:prstGeom prst="rect">
-            <a:avLst/>
-          </a:prstGeom>
-          <a:noFill/>
-          <a:ln/>
-        </p:spPr>
-        <p:txBody>
-          <a:bodyPr wrap="square" lIns="635" tIns="635" rIns="635" bIns="635" rtlCol="0" anchor="ctr"/>
-          <a:lstStyle/>
-          <a:p>
-            <a:pPr algn="ctr" indent="0" marL="0">
-              <a:buNone/>
-            </a:pPr>
-            <a:r>
-              <a:rPr lang="en-US" sz="1800" b="1" dirty="0">
-                <a:solidFill>
-                  <a:schemeClr val="bg1"/>
-                </a:solidFill>
-              </a:rPr>
-              <a:t>Institution</a:t>
-            </a:r>
-            <a:endParaRPr lang="en-US" sz="1800" dirty="0"/>
-          </a:p>
-        </p:txBody>
-      </p:sp>
-      <p:sp>
-        <p:nvSpPr>
-          <p:cNvPr id="6" name="Tree stem"/>
-          <p:cNvSpPr/>
-          <p:nvPr/>
-        </p:nvSpPr>
-        <p:spPr>
-          <a:xfrm>
-            <a:off x="3108960" y="2423160"/>
-            <a:ext cx="0" cy="320040"/>
-          </a:xfrm>
-          <a:prstGeom prst="line">
-            <a:avLst/>
-          </a:prstGeom>
-          <a:noFill/>
-          <a:ln w="19050">
-            <a:solidFill>
-              <a:schemeClr val="accent5"/>
-            </a:solidFill>
-            <a:prstDash val="solid"/>
-          </a:ln>
-        </p:spPr>
-      </p:sp>
-      <p:sp>
-        <p:nvSpPr>
-          <p:cNvPr id="7" name="Tree bar"/>
-          <p:cNvSpPr/>
-          <p:nvPr/>
-        </p:nvSpPr>
-        <p:spPr>
-          <a:xfrm>
-            <a:off x="1417320" y="2743200"/>
-            <a:ext cx="3383280" cy="0"/>
-          </a:xfrm>
-          <a:prstGeom prst="line">
-            <a:avLst/>
-          </a:prstGeom>
-          <a:noFill/>
-          <a:ln w="19050">
-            <a:solidFill>
-              <a:schemeClr val="accent5"/>
-            </a:solidFill>
-            <a:prstDash val="solid"/>
-          </a:ln>
-        </p:spPr>
-      </p:sp>
-      <p:sp>
-        <p:nvSpPr>
-          <p:cNvPr id="8" name="Tree drop 0"/>
-          <p:cNvSpPr/>
-          <p:nvPr/>
-        </p:nvSpPr>
-        <p:spPr>
-          <a:xfrm>
-            <a:off x="1417320" y="2743200"/>
-            <a:ext cx="0" cy="182880"/>
-          </a:xfrm>
-          <a:prstGeom prst="line">
-            <a:avLst/>
-          </a:prstGeom>
-          <a:noFill/>
-          <a:ln w="19050">
-            <a:solidFill>
-              <a:schemeClr val="accent5"/>
-            </a:solidFill>
-            <a:prstDash val="solid"/>
-          </a:ln>
-        </p:spPr>
-      </p:sp>
-      <p:sp>
-        <p:nvSpPr>
-          <p:cNvPr id="9" name="Tree level 2 0"/>
-          <p:cNvSpPr/>
-          <p:nvPr/>
-        </p:nvSpPr>
-        <p:spPr>
-          <a:xfrm>
-            <a:off x="640080" y="2926080"/>
-            <a:ext cx="1554480" cy="731520"/>
-          </a:xfrm>
-          <a:prstGeom prst="roundRect">
-            <a:avLst>
-              <a:gd name="adj" fmla="val 10000"/>
-            </a:avLst>
+      <p:pic>
+        <p:nvPicPr>
+          <p:cNvPr id="5" name="Screenshot dashboard" descr="The dashboard with the plan cycle tracker, key figures and what needs attention">    </p:cNvPr>
+          <p:cNvPicPr>
+            <a:picLocks noChangeAspect="1"/>
+          </p:cNvPicPr>
+          <p:nvPr/>
+        </p:nvPicPr>
+        <p:blipFill>
+          <a:blip r:embed="rId1"/>
+          <a:stretch>
+            <a:fillRect/>
+          </a:stretch>
+        </p:blipFill>
+        <p:spPr>
+          <a:xfrm>
+            <a:off x="685800" y="1554480"/>
+            <a:ext cx="6766560" cy="4229100"/>
+          </a:xfrm>
+          <a:prstGeom prst="rect">
+            <a:avLst/>
+          </a:prstGeom>
+        </p:spPr>
+      </p:pic>
+      <p:sp>
+        <p:nvSpPr>
+          <p:cNvPr id="6" name="Text 2"/>
+          <p:cNvSpPr txBox="1"/>
+          <p:nvPr/>
+        </p:nvSpPr>
+        <p:spPr>
+          <a:xfrm>
+            <a:off x="640080" y="5902452"/>
+            <a:ext cx="6858000" cy="411480"/>
+          </a:xfrm>
+          <a:prstGeom prst="rect">
+            <a:avLst/>
+          </a:prstGeom>
+          <a:noFill/>
+          <a:ln/>
+        </p:spPr>
+        <p:txBody>
+          <a:bodyPr wrap="square" lIns="0" tIns="0" rIns="0" bIns="0" rtlCol="0" anchor="t"/>
+          <a:lstStyle/>
+          <a:p>
+            <a:pPr indent="0" marL="0">
+              <a:buNone/>
+            </a:pPr>
+            <a:r>
+              <a:rPr lang="en-US" sz="1200" i="1" dirty="0">
+                <a:solidFill>
+                  <a:schemeClr val="accent5"/>
+                </a:solidFill>
+              </a:rPr>
+              <a:t>The dashboard: the plan's cycle, key figures and what needs your attention</a:t>
+            </a:r>
+            <a:endParaRPr lang="en-US" sz="1200" dirty="0"/>
+          </a:p>
+        </p:txBody>
+      </p:sp>
+      <p:sp>
+        <p:nvSpPr>
+          <p:cNvPr id="7" name="UI circle 1"/>
+          <p:cNvSpPr/>
+          <p:nvPr/>
+        </p:nvSpPr>
+        <p:spPr>
+          <a:xfrm>
+            <a:off x="7818120" y="1554480"/>
+            <a:ext cx="548640" cy="548640"/>
+          </a:xfrm>
+          <a:prstGeom prst="ellipse">
+            <a:avLst/>
+          </a:prstGeom>
+          <a:solidFill>
+            <a:schemeClr val="accent1"/>
+          </a:solidFill>
+          <a:ln/>
+        </p:spPr>
+      </p:sp>
+      <p:pic>
+        <p:nvPicPr>
+          <p:cNvPr id="8" name="UI icon 1" descr="Clear at a glance">    </p:cNvPr>
+          <p:cNvPicPr>
+            <a:picLocks noChangeAspect="1"/>
+          </p:cNvPicPr>
+          <p:nvPr/>
+        </p:nvPicPr>
+        <p:blipFill>
+          <a:blip r:embed="rId2"/>
+          <a:stretch>
+            <a:fillRect/>
+          </a:stretch>
+        </p:blipFill>
+        <p:spPr>
+          <a:xfrm>
+            <a:off x="7955280" y="1691640"/>
+            <a:ext cx="274320" cy="274320"/>
+          </a:xfrm>
+          <a:prstGeom prst="rect">
+            <a:avLst/>
+          </a:prstGeom>
+        </p:spPr>
+      </p:pic>
+      <p:sp>
+        <p:nvSpPr>
+          <p:cNvPr id="9" name="Text 4"/>
+          <p:cNvSpPr txBox="1"/>
+          <p:nvPr/>
+        </p:nvSpPr>
+        <p:spPr>
+          <a:xfrm>
+            <a:off x="8549640" y="1508760"/>
+            <a:ext cx="3017520" cy="1463040"/>
+          </a:xfrm>
+          <a:prstGeom prst="rect">
+            <a:avLst/>
+          </a:prstGeom>
+          <a:noFill/>
+          <a:ln/>
+        </p:spPr>
+        <p:txBody>
+          <a:bodyPr wrap="square" lIns="0" tIns="0" rIns="0" bIns="0" rtlCol="0" anchor="t"/>
+          <a:lstStyle/>
+          <a:p>
+            <a:pPr indent="0" marL="0">
+              <a:buNone/>
+            </a:pPr>
+            <a:r>
+              <a:rPr lang="en-US" sz="1700" b="1" dirty="0">
+                <a:solidFill>
+                  <a:schemeClr val="tx1"/>
+                </a:solidFill>
+              </a:rPr>
+              <a:t>Clear at a glance</a:t>
+            </a:r>
+            <a:endParaRPr lang="en-US" sz="1700" dirty="0"/>
+          </a:p>
+          <a:p>
+            <a:pPr indent="0" marL="0">
+              <a:buNone/>
+            </a:pPr>
+            <a:r>
+              <a:rPr lang="en-US" sz="1400" dirty="0">
+                <a:solidFill>
+                  <a:schemeClr val="tx1"/>
+                </a:solidFill>
+              </a:rPr>
+              <a:t>The plan's cycle, the figures and your own to-do list on one page.</a:t>
+            </a:r>
+            <a:endParaRPr lang="en-US" sz="1700" dirty="0"/>
+          </a:p>
+        </p:txBody>
+      </p:sp>
+      <p:sp>
+        <p:nvSpPr>
+          <p:cNvPr id="10" name="UI circle 2"/>
+          <p:cNvSpPr/>
+          <p:nvPr/>
+        </p:nvSpPr>
+        <p:spPr>
+          <a:xfrm>
+            <a:off x="7818120" y="3154680"/>
+            <a:ext cx="548640" cy="548640"/>
+          </a:xfrm>
+          <a:prstGeom prst="ellipse">
+            <a:avLst/>
           </a:prstGeom>
           <a:solidFill>
             <a:schemeClr val="accent3"/>
@@ -8306,457 +8309,134 @@
           <a:ln/>
         </p:spPr>
       </p:sp>
-      <p:sp>
-        <p:nvSpPr>
-          <p:cNvPr id="10" name="Tree level 2 0 text"/>
-          <p:cNvSpPr txBox="1"/>
-          <p:nvPr/>
-        </p:nvSpPr>
-        <p:spPr>
-          <a:xfrm>
-            <a:off x="640080" y="2926080"/>
-            <a:ext cx="1554480" cy="731520"/>
-          </a:xfrm>
-          <a:prstGeom prst="rect">
-            <a:avLst/>
-          </a:prstGeom>
-          <a:noFill/>
-          <a:ln/>
-        </p:spPr>
-        <p:txBody>
-          <a:bodyPr wrap="square" lIns="635" tIns="635" rIns="635" bIns="635" rtlCol="0" anchor="ctr"/>
-          <a:lstStyle/>
-          <a:p>
-            <a:pPr algn="ctr" indent="0" marL="0">
-              <a:buNone/>
-            </a:pPr>
-            <a:r>
-              <a:rPr lang="en-US" sz="1400" b="1" dirty="0">
-                <a:solidFill>
-                  <a:schemeClr val="bg1"/>
-                </a:solidFill>
-              </a:rPr>
-              <a:t>Directorate</a:t>
-            </a:r>
-            <a:endParaRPr lang="en-US" sz="1400" dirty="0"/>
-          </a:p>
-        </p:txBody>
-      </p:sp>
-      <p:sp>
-        <p:nvSpPr>
-          <p:cNvPr id="11" name="Tree sub drop 0"/>
-          <p:cNvSpPr/>
-          <p:nvPr/>
-        </p:nvSpPr>
-        <p:spPr>
-          <a:xfrm>
-            <a:off x="1417320" y="3657600"/>
-            <a:ext cx="0" cy="365760"/>
-          </a:xfrm>
-          <a:prstGeom prst="line">
-            <a:avLst/>
-          </a:prstGeom>
-          <a:noFill/>
-          <a:ln w="19050">
-            <a:solidFill>
-              <a:schemeClr val="accent5"/>
-            </a:solidFill>
-            <a:prstDash val="solid"/>
-          </a:ln>
-        </p:spPr>
-      </p:sp>
-      <p:sp>
-        <p:nvSpPr>
-          <p:cNvPr id="12" name="Tree level 3 0"/>
-          <p:cNvSpPr/>
-          <p:nvPr/>
-        </p:nvSpPr>
-        <p:spPr>
-          <a:xfrm>
-            <a:off x="640080" y="4023360"/>
-            <a:ext cx="1554480" cy="640080"/>
-          </a:xfrm>
-          <a:prstGeom prst="roundRect">
-            <a:avLst>
-              <a:gd name="adj" fmla="val 11429"/>
-            </a:avLst>
+      <p:pic>
+        <p:nvPicPr>
+          <p:cNvPr id="11" name="UI icon 2" descr="Three languages">    </p:cNvPr>
+          <p:cNvPicPr>
+            <a:picLocks noChangeAspect="1"/>
+          </p:cNvPicPr>
+          <p:nvPr/>
+        </p:nvPicPr>
+        <p:blipFill>
+          <a:blip r:embed="rId3"/>
+          <a:stretch>
+            <a:fillRect/>
+          </a:stretch>
+        </p:blipFill>
+        <p:spPr>
+          <a:xfrm>
+            <a:off x="7955280" y="3291840"/>
+            <a:ext cx="274320" cy="274320"/>
+          </a:xfrm>
+          <a:prstGeom prst="rect">
+            <a:avLst/>
+          </a:prstGeom>
+        </p:spPr>
+      </p:pic>
+      <p:sp>
+        <p:nvSpPr>
+          <p:cNvPr id="12" name="Text 6"/>
+          <p:cNvSpPr txBox="1"/>
+          <p:nvPr/>
+        </p:nvSpPr>
+        <p:spPr>
+          <a:xfrm>
+            <a:off x="8549640" y="3108960"/>
+            <a:ext cx="3017520" cy="1463040"/>
+          </a:xfrm>
+          <a:prstGeom prst="rect">
+            <a:avLst/>
+          </a:prstGeom>
+          <a:noFill/>
+          <a:ln/>
+        </p:spPr>
+        <p:txBody>
+          <a:bodyPr wrap="square" lIns="0" tIns="0" rIns="0" bIns="0" rtlCol="0" anchor="t"/>
+          <a:lstStyle/>
+          <a:p>
+            <a:pPr indent="0" marL="0">
+              <a:buNone/>
+            </a:pPr>
+            <a:r>
+              <a:rPr lang="en-US" sz="1700" b="1" dirty="0">
+                <a:solidFill>
+                  <a:schemeClr val="tx1"/>
+                </a:solidFill>
+              </a:rPr>
+              <a:t>Three languages</a:t>
+            </a:r>
+            <a:endParaRPr lang="en-US" sz="1700" dirty="0"/>
+          </a:p>
+          <a:p>
+            <a:pPr indent="0" marL="0">
+              <a:buNone/>
+            </a:pPr>
+            <a:r>
+              <a:rPr lang="en-US" sz="1400" dirty="0">
+                <a:solidFill>
+                  <a:schemeClr val="tx1"/>
+                </a:solidFill>
+              </a:rPr>
+              <a:t>English, Portuguese and Tetum; a test blocks any new text without its translations.</a:t>
+            </a:r>
+            <a:endParaRPr lang="en-US" sz="1700" dirty="0"/>
+          </a:p>
+        </p:txBody>
+      </p:sp>
+      <p:sp>
+        <p:nvSpPr>
+          <p:cNvPr id="13" name="UI circle 3"/>
+          <p:cNvSpPr/>
+          <p:nvPr/>
+        </p:nvSpPr>
+        <p:spPr>
+          <a:xfrm>
+            <a:off x="7818120" y="4754880"/>
+            <a:ext cx="548640" cy="548640"/>
+          </a:xfrm>
+          <a:prstGeom prst="ellipse">
+            <a:avLst/>
           </a:prstGeom>
           <a:solidFill>
-            <a:schemeClr val="bg2"/>
+            <a:schemeClr val="accent4"/>
           </a:solidFill>
           <a:ln/>
         </p:spPr>
       </p:sp>
-      <p:sp>
-        <p:nvSpPr>
-          <p:cNvPr id="13" name="Tree level 3 0 text"/>
-          <p:cNvSpPr txBox="1"/>
-          <p:nvPr/>
-        </p:nvSpPr>
-        <p:spPr>
-          <a:xfrm>
-            <a:off x="640080" y="4023360"/>
-            <a:ext cx="1554480" cy="640080"/>
-          </a:xfrm>
-          <a:prstGeom prst="rect">
-            <a:avLst/>
-          </a:prstGeom>
-          <a:noFill/>
-          <a:ln/>
-        </p:spPr>
-        <p:txBody>
-          <a:bodyPr wrap="square" lIns="635" tIns="635" rIns="635" bIns="635" rtlCol="0" anchor="ctr"/>
-          <a:lstStyle/>
-          <a:p>
-            <a:pPr algn="ctr" indent="0" marL="0">
-              <a:buNone/>
-            </a:pPr>
-            <a:r>
-              <a:rPr lang="en-US" sz="1200" b="1" dirty="0">
-                <a:solidFill>
-                  <a:schemeClr val="tx1"/>
-                </a:solidFill>
-              </a:rPr>
-              <a:t>Units, each with its people</a:t>
-            </a:r>
-            <a:endParaRPr lang="en-US" sz="1200" dirty="0"/>
-          </a:p>
-        </p:txBody>
-      </p:sp>
-      <p:sp>
-        <p:nvSpPr>
-          <p:cNvPr id="14" name="Tree drop 1"/>
-          <p:cNvSpPr/>
-          <p:nvPr/>
-        </p:nvSpPr>
-        <p:spPr>
-          <a:xfrm>
-            <a:off x="3108960" y="2743200"/>
-            <a:ext cx="0" cy="182880"/>
-          </a:xfrm>
-          <a:prstGeom prst="line">
-            <a:avLst/>
-          </a:prstGeom>
-          <a:noFill/>
-          <a:ln w="19050">
-            <a:solidFill>
-              <a:schemeClr val="accent5"/>
-            </a:solidFill>
-            <a:prstDash val="solid"/>
-          </a:ln>
-        </p:spPr>
-      </p:sp>
-      <p:sp>
-        <p:nvSpPr>
-          <p:cNvPr id="15" name="Tree level 2 1"/>
-          <p:cNvSpPr/>
-          <p:nvPr/>
-        </p:nvSpPr>
-        <p:spPr>
-          <a:xfrm>
-            <a:off x="2331720" y="2926080"/>
-            <a:ext cx="1554480" cy="731520"/>
-          </a:xfrm>
-          <a:prstGeom prst="roundRect">
-            <a:avLst>
-              <a:gd name="adj" fmla="val 10000"/>
-            </a:avLst>
-          </a:prstGeom>
-          <a:solidFill>
-            <a:schemeClr val="accent3"/>
-          </a:solidFill>
-          <a:ln/>
-        </p:spPr>
-      </p:sp>
-      <p:sp>
-        <p:nvSpPr>
-          <p:cNvPr id="16" name="Tree level 2 1 text"/>
-          <p:cNvSpPr txBox="1"/>
-          <p:nvPr/>
-        </p:nvSpPr>
-        <p:spPr>
-          <a:xfrm>
-            <a:off x="2331720" y="2926080"/>
-            <a:ext cx="1554480" cy="731520"/>
-          </a:xfrm>
-          <a:prstGeom prst="rect">
-            <a:avLst/>
-          </a:prstGeom>
-          <a:noFill/>
-          <a:ln/>
-        </p:spPr>
-        <p:txBody>
-          <a:bodyPr wrap="square" lIns="635" tIns="635" rIns="635" bIns="635" rtlCol="0" anchor="ctr"/>
-          <a:lstStyle/>
-          <a:p>
-            <a:pPr algn="ctr" indent="0" marL="0">
-              <a:buNone/>
-            </a:pPr>
-            <a:r>
-              <a:rPr lang="en-US" sz="1400" b="1" dirty="0">
-                <a:solidFill>
-                  <a:schemeClr val="bg1"/>
-                </a:solidFill>
-              </a:rPr>
-              <a:t>Gabinete</a:t>
-            </a:r>
-            <a:endParaRPr lang="en-US" sz="1400" dirty="0"/>
-          </a:p>
-        </p:txBody>
-      </p:sp>
-      <p:sp>
-        <p:nvSpPr>
-          <p:cNvPr id="17" name="Tree sub drop 1"/>
-          <p:cNvSpPr/>
-          <p:nvPr/>
-        </p:nvSpPr>
-        <p:spPr>
-          <a:xfrm>
-            <a:off x="3108960" y="3657600"/>
-            <a:ext cx="0" cy="365760"/>
-          </a:xfrm>
-          <a:prstGeom prst="line">
-            <a:avLst/>
-          </a:prstGeom>
-          <a:noFill/>
-          <a:ln w="19050">
-            <a:solidFill>
-              <a:schemeClr val="accent5"/>
-            </a:solidFill>
-            <a:prstDash val="solid"/>
-          </a:ln>
-        </p:spPr>
-      </p:sp>
-      <p:sp>
-        <p:nvSpPr>
-          <p:cNvPr id="18" name="Tree level 3 1"/>
-          <p:cNvSpPr/>
-          <p:nvPr/>
-        </p:nvSpPr>
-        <p:spPr>
-          <a:xfrm>
-            <a:off x="2331720" y="4023360"/>
-            <a:ext cx="1554480" cy="640080"/>
-          </a:xfrm>
-          <a:prstGeom prst="roundRect">
-            <a:avLst>
-              <a:gd name="adj" fmla="val 11429"/>
-            </a:avLst>
-          </a:prstGeom>
-          <a:solidFill>
-            <a:schemeClr val="bg2"/>
-          </a:solidFill>
-          <a:ln/>
-        </p:spPr>
-      </p:sp>
-      <p:sp>
-        <p:nvSpPr>
-          <p:cNvPr id="19" name="Tree level 3 1 text"/>
-          <p:cNvSpPr txBox="1"/>
-          <p:nvPr/>
-        </p:nvSpPr>
-        <p:spPr>
-          <a:xfrm>
-            <a:off x="2331720" y="4023360"/>
-            <a:ext cx="1554480" cy="640080"/>
-          </a:xfrm>
-          <a:prstGeom prst="rect">
-            <a:avLst/>
-          </a:prstGeom>
-          <a:noFill/>
-          <a:ln/>
-        </p:spPr>
-        <p:txBody>
-          <a:bodyPr wrap="square" lIns="635" tIns="635" rIns="635" bIns="635" rtlCol="0" anchor="ctr"/>
-          <a:lstStyle/>
-          <a:p>
-            <a:pPr algn="ctr" indent="0" marL="0">
-              <a:buNone/>
-            </a:pPr>
-            <a:r>
-              <a:rPr lang="en-US" sz="1200" b="1" dirty="0">
-                <a:solidFill>
-                  <a:schemeClr val="tx1"/>
-                </a:solidFill>
-              </a:rPr>
-              <a:t>Units, each with its people</a:t>
-            </a:r>
-            <a:endParaRPr lang="en-US" sz="1200" dirty="0"/>
-          </a:p>
-        </p:txBody>
-      </p:sp>
-      <p:sp>
-        <p:nvSpPr>
-          <p:cNvPr id="20" name="Tree drop 2"/>
-          <p:cNvSpPr/>
-          <p:nvPr/>
-        </p:nvSpPr>
-        <p:spPr>
-          <a:xfrm>
-            <a:off x="4800600" y="2743200"/>
-            <a:ext cx="0" cy="182880"/>
-          </a:xfrm>
-          <a:prstGeom prst="line">
-            <a:avLst/>
-          </a:prstGeom>
-          <a:noFill/>
-          <a:ln w="19050">
-            <a:solidFill>
-              <a:schemeClr val="accent5"/>
-            </a:solidFill>
-            <a:prstDash val="solid"/>
-          </a:ln>
-        </p:spPr>
-      </p:sp>
-      <p:sp>
-        <p:nvSpPr>
-          <p:cNvPr id="21" name="Tree level 2 2"/>
-          <p:cNvSpPr/>
-          <p:nvPr/>
-        </p:nvSpPr>
-        <p:spPr>
-          <a:xfrm>
-            <a:off x="4023360" y="2926080"/>
-            <a:ext cx="1554480" cy="731520"/>
-          </a:xfrm>
-          <a:prstGeom prst="roundRect">
-            <a:avLst>
-              <a:gd name="adj" fmla="val 10000"/>
-            </a:avLst>
-          </a:prstGeom>
-          <a:solidFill>
-            <a:schemeClr val="accent3"/>
-          </a:solidFill>
-          <a:ln/>
-        </p:spPr>
-      </p:sp>
-      <p:sp>
-        <p:nvSpPr>
-          <p:cNvPr id="22" name="Tree level 2 2 text"/>
-          <p:cNvSpPr txBox="1"/>
-          <p:nvPr/>
-        </p:nvSpPr>
-        <p:spPr>
-          <a:xfrm>
-            <a:off x="4023360" y="2926080"/>
-            <a:ext cx="1554480" cy="731520"/>
-          </a:xfrm>
-          <a:prstGeom prst="rect">
-            <a:avLst/>
-          </a:prstGeom>
-          <a:noFill/>
-          <a:ln/>
-        </p:spPr>
-        <p:txBody>
-          <a:bodyPr wrap="square" lIns="635" tIns="635" rIns="635" bIns="635" rtlCol="0" anchor="ctr"/>
-          <a:lstStyle/>
-          <a:p>
-            <a:pPr algn="ctr" indent="0" marL="0">
-              <a:buNone/>
-            </a:pPr>
-            <a:r>
-              <a:rPr lang="en-US" sz="1400" b="1" dirty="0">
-                <a:solidFill>
-                  <a:schemeClr val="bg1"/>
-                </a:solidFill>
-              </a:rPr>
-              <a:t>Autonomous body</a:t>
-            </a:r>
-            <a:endParaRPr lang="en-US" sz="1400" dirty="0"/>
-          </a:p>
-        </p:txBody>
-      </p:sp>
-      <p:sp>
-        <p:nvSpPr>
-          <p:cNvPr id="23" name="Tree sub drop 2"/>
-          <p:cNvSpPr/>
-          <p:nvPr/>
-        </p:nvSpPr>
-        <p:spPr>
-          <a:xfrm>
-            <a:off x="4800600" y="3657600"/>
-            <a:ext cx="0" cy="365760"/>
-          </a:xfrm>
-          <a:prstGeom prst="line">
-            <a:avLst/>
-          </a:prstGeom>
-          <a:noFill/>
-          <a:ln w="19050">
-            <a:solidFill>
-              <a:schemeClr val="accent5"/>
-            </a:solidFill>
-            <a:prstDash val="solid"/>
-          </a:ln>
-        </p:spPr>
-      </p:sp>
-      <p:sp>
-        <p:nvSpPr>
-          <p:cNvPr id="24" name="Tree level 3 2"/>
-          <p:cNvSpPr/>
-          <p:nvPr/>
-        </p:nvSpPr>
-        <p:spPr>
-          <a:xfrm>
-            <a:off x="4023360" y="4023360"/>
-            <a:ext cx="1554480" cy="640080"/>
-          </a:xfrm>
-          <a:prstGeom prst="roundRect">
-            <a:avLst>
-              <a:gd name="adj" fmla="val 11429"/>
-            </a:avLst>
-          </a:prstGeom>
-          <a:solidFill>
-            <a:schemeClr val="bg2"/>
-          </a:solidFill>
-          <a:ln/>
-        </p:spPr>
-      </p:sp>
-      <p:sp>
-        <p:nvSpPr>
-          <p:cNvPr id="25" name="Tree level 3 2 text"/>
-          <p:cNvSpPr txBox="1"/>
-          <p:nvPr/>
-        </p:nvSpPr>
-        <p:spPr>
-          <a:xfrm>
-            <a:off x="4023360" y="4023360"/>
-            <a:ext cx="1554480" cy="640080"/>
-          </a:xfrm>
-          <a:prstGeom prst="rect">
-            <a:avLst/>
-          </a:prstGeom>
-          <a:noFill/>
-          <a:ln/>
-        </p:spPr>
-        <p:txBody>
-          <a:bodyPr wrap="square" lIns="635" tIns="635" rIns="635" bIns="635" rtlCol="0" anchor="ctr"/>
-          <a:lstStyle/>
-          <a:p>
-            <a:pPr algn="ctr" indent="0" marL="0">
-              <a:buNone/>
-            </a:pPr>
-            <a:r>
-              <a:rPr lang="en-US" sz="1200" b="1" dirty="0">
-                <a:solidFill>
-                  <a:schemeClr val="tx1"/>
-                </a:solidFill>
-              </a:rPr>
-              <a:t>Units, each with its people</a:t>
-            </a:r>
-            <a:endParaRPr lang="en-US" sz="1200" dirty="0"/>
-          </a:p>
-        </p:txBody>
-      </p:sp>
-      <p:sp>
-        <p:nvSpPr>
-          <p:cNvPr id="26" name="Text 23"/>
-          <p:cNvSpPr txBox="1"/>
-          <p:nvPr/>
-        </p:nvSpPr>
-        <p:spPr>
-          <a:xfrm>
-            <a:off x="640080" y="4937760"/>
-            <a:ext cx="5120640" cy="365760"/>
+      <p:pic>
+        <p:nvPicPr>
+          <p:cNvPr id="14" name="UI icon 3" descr="Made for the role">    </p:cNvPr>
+          <p:cNvPicPr>
+            <a:picLocks noChangeAspect="1"/>
+          </p:cNvPicPr>
+          <p:nvPr/>
+        </p:nvPicPr>
+        <p:blipFill>
+          <a:blip r:embed="rId4"/>
+          <a:stretch>
+            <a:fillRect/>
+          </a:stretch>
+        </p:blipFill>
+        <p:spPr>
+          <a:xfrm>
+            <a:off x="7955280" y="4892040"/>
+            <a:ext cx="274320" cy="274320"/>
+          </a:xfrm>
+          <a:prstGeom prst="rect">
+            <a:avLst/>
+          </a:prstGeom>
+        </p:spPr>
+      </p:pic>
+      <p:sp>
+        <p:nvSpPr>
+          <p:cNvPr id="15" name="Text 8"/>
+          <p:cNvSpPr txBox="1"/>
+          <p:nvPr/>
+        </p:nvSpPr>
+        <p:spPr>
+          <a:xfrm>
+            <a:off x="8549640" y="4709160"/>
+            <a:ext cx="3017520" cy="1463040"/>
           </a:xfrm>
           <a:prstGeom prst="rect">
             <a:avLst/>
@@ -8772,50 +8452,14 @@
               <a:buNone/>
             </a:pPr>
             <a:r>
-              <a:rPr lang="en-US" sz="1400" i="1" dirty="0">
-                <a:solidFill>
-                  <a:schemeClr val="accent5"/>
-                </a:solidFill>
-              </a:rPr>
-              <a:t>Any depth the law defines</a:t>
-            </a:r>
-            <a:endParaRPr lang="en-US" sz="1400" dirty="0"/>
-          </a:p>
-        </p:txBody>
-      </p:sp>
-      <p:sp>
-        <p:nvSpPr>
-          <p:cNvPr id="27" name="Text 24"/>
-          <p:cNvSpPr txBox="1"/>
-          <p:nvPr/>
-        </p:nvSpPr>
-        <p:spPr>
-          <a:xfrm>
-            <a:off x="6583680" y="1691640"/>
-            <a:ext cx="4965192" cy="1463040"/>
-          </a:xfrm>
-          <a:prstGeom prst="rect">
-            <a:avLst/>
-          </a:prstGeom>
-          <a:noFill/>
-          <a:ln/>
-        </p:spPr>
-        <p:txBody>
-          <a:bodyPr wrap="square" lIns="0" tIns="0" rIns="0" bIns="0" rtlCol="0" anchor="t"/>
-          <a:lstStyle/>
-          <a:p>
-            <a:pPr indent="0" marL="0">
-              <a:buNone/>
-            </a:pPr>
-            <a:r>
-              <a:rPr lang="en-US" sz="1800" b="1" dirty="0">
-                <a:solidFill>
-                  <a:schemeClr val="tx1"/>
-                </a:solidFill>
-              </a:rPr>
-              <a:t>One deployment, one institution</a:t>
-            </a:r>
-            <a:endParaRPr lang="en-US" sz="1800" dirty="0"/>
+              <a:rPr lang="en-US" sz="1700" b="1" dirty="0">
+                <a:solidFill>
+                  <a:schemeClr val="tx1"/>
+                </a:solidFill>
+              </a:rPr>
+              <a:t>Made for the role</a:t>
+            </a:r>
+            <a:endParaRPr lang="en-US" sz="1700" dirty="0"/>
           </a:p>
           <a:p>
             <a:pPr indent="0" marL="0">
@@ -8827,109 +8471,9 @@
                   <a:schemeClr val="tx1"/>
                 </a:solidFill>
               </a:rPr>
-              <a:t>Name, structure and programmes are set in the app; nothing is hard-coded to a ministry.</a:t>
-            </a:r>
-            <a:endParaRPr lang="en-US" sz="1800" dirty="0"/>
-          </a:p>
-        </p:txBody>
-      </p:sp>
-      <p:sp>
-        <p:nvSpPr>
-          <p:cNvPr id="28" name="Text 25"/>
-          <p:cNvSpPr txBox="1"/>
-          <p:nvPr/>
-        </p:nvSpPr>
-        <p:spPr>
-          <a:xfrm>
-            <a:off x="6583680" y="3154680"/>
-            <a:ext cx="4965192" cy="1463040"/>
-          </a:xfrm>
-          <a:prstGeom prst="rect">
-            <a:avLst/>
-          </a:prstGeom>
-          <a:noFill/>
-          <a:ln/>
-        </p:spPr>
-        <p:txBody>
-          <a:bodyPr wrap="square" lIns="0" tIns="0" rIns="0" bIns="0" rtlCol="0" anchor="t"/>
-          <a:lstStyle/>
-          <a:p>
-            <a:pPr indent="0" marL="0">
-              <a:buNone/>
-            </a:pPr>
-            <a:r>
-              <a:rPr lang="en-US" sz="1800" b="1" dirty="0">
-                <a:solidFill>
-                  <a:schemeClr val="tx1"/>
-                </a:solidFill>
-              </a:rPr>
-              <a:t>Whole ministry or a single office</a:t>
-            </a:r>
-            <a:endParaRPr lang="en-US" sz="1800" dirty="0"/>
-          </a:p>
-          <a:p>
-            <a:pPr indent="0" marL="0">
-              <a:buNone/>
-            </a:pPr>
-            <a:r>
-              <a:rPr lang="en-US" sz="1400" dirty="0">
-                <a:solidFill>
-                  <a:schemeClr val="tx1"/>
-                </a:solidFill>
-              </a:rPr>
-              <a:t>Start with one directorate or gabinete and add the rest later.</a:t>
-            </a:r>
-            <a:endParaRPr lang="en-US" sz="1800" dirty="0"/>
-          </a:p>
-        </p:txBody>
-      </p:sp>
-      <p:sp>
-        <p:nvSpPr>
-          <p:cNvPr id="29" name="Text 26"/>
-          <p:cNvSpPr txBox="1"/>
-          <p:nvPr/>
-        </p:nvSpPr>
-        <p:spPr>
-          <a:xfrm>
-            <a:off x="6583680" y="4617720"/>
-            <a:ext cx="4965192" cy="1463040"/>
-          </a:xfrm>
-          <a:prstGeom prst="rect">
-            <a:avLst/>
-          </a:prstGeom>
-          <a:noFill/>
-          <a:ln/>
-        </p:spPr>
-        <p:txBody>
-          <a:bodyPr wrap="square" lIns="0" tIns="0" rIns="0" bIns="0" rtlCol="0" anchor="t"/>
-          <a:lstStyle/>
-          <a:p>
-            <a:pPr indent="0" marL="0">
-              <a:buNone/>
-            </a:pPr>
-            <a:r>
-              <a:rPr lang="en-US" sz="1800" b="1" dirty="0">
-                <a:solidFill>
-                  <a:schemeClr val="tx1"/>
-                </a:solidFill>
-              </a:rPr>
-              <a:t>Autonomous bodies included</a:t>
-            </a:r>
-            <a:endParaRPr lang="en-US" sz="1800" dirty="0"/>
-          </a:p>
-          <a:p>
-            <a:pPr indent="0" marL="0">
-              <a:buNone/>
-            </a:pPr>
-            <a:r>
-              <a:rPr lang="en-US" sz="1400" dirty="0">
-                <a:solidFill>
-                  <a:schemeClr val="tx1"/>
-                </a:solidFill>
-              </a:rPr>
-              <a:t>Public bodies with their own legal personality sit in the same tree.</a:t>
-            </a:r>
-            <a:endParaRPr lang="en-US" sz="1800" dirty="0"/>
+              <a:t>The menu, the buttons and the inbox show only what your role can do.</a:t>
+            </a:r>
+            <a:endParaRPr lang="en-US" sz="1700" dirty="0"/>
           </a:p>
         </p:txBody>
       </p:sp>
@@ -9035,7 +8579,7 @@
                   <a:schemeClr val="tx1"/>
                 </a:solidFill>
               </a:rPr>
-              <a:t>Controls an institution can rely on</a:t>
+              <a:t>Built for any institution, whole ministry or one office</a:t>
             </a:r>
             <a:endParaRPr lang="en-US" sz="3400" dirty="0"/>
           </a:p>
@@ -9043,18 +8587,226 @@
       </p:sp>
       <p:sp>
         <p:nvSpPr>
-          <p:cNvPr id="4" name="Trust 1"/>
-          <p:cNvSpPr/>
-          <p:nvPr/>
-        </p:nvSpPr>
-        <p:spPr>
-          <a:xfrm>
-            <a:off x="640080" y="1600200"/>
-            <a:ext cx="3502152" cy="2011680"/>
+          <p:cNvPr id="4" name="Tree root"/>
+          <p:cNvSpPr/>
+          <p:nvPr/>
+        </p:nvSpPr>
+        <p:spPr>
+          <a:xfrm>
+            <a:off x="2011680" y="1691640"/>
+            <a:ext cx="2194560" cy="731520"/>
           </a:xfrm>
           <a:prstGeom prst="roundRect">
             <a:avLst>
-              <a:gd name="adj" fmla="val 4545"/>
+              <a:gd name="adj" fmla="val 10000"/>
+            </a:avLst>
+          </a:prstGeom>
+          <a:solidFill>
+            <a:schemeClr val="tx1"/>
+          </a:solidFill>
+          <a:ln/>
+        </p:spPr>
+      </p:sp>
+      <p:sp>
+        <p:nvSpPr>
+          <p:cNvPr id="5" name="Tree root text"/>
+          <p:cNvSpPr txBox="1"/>
+          <p:nvPr/>
+        </p:nvSpPr>
+        <p:spPr>
+          <a:xfrm>
+            <a:off x="2011680" y="1691640"/>
+            <a:ext cx="2194560" cy="731520"/>
+          </a:xfrm>
+          <a:prstGeom prst="rect">
+            <a:avLst/>
+          </a:prstGeom>
+          <a:noFill/>
+          <a:ln/>
+        </p:spPr>
+        <p:txBody>
+          <a:bodyPr wrap="square" lIns="635" tIns="635" rIns="635" bIns="635" rtlCol="0" anchor="ctr"/>
+          <a:lstStyle/>
+          <a:p>
+            <a:pPr algn="ctr" indent="0" marL="0">
+              <a:buNone/>
+            </a:pPr>
+            <a:r>
+              <a:rPr lang="en-US" sz="1800" b="1" dirty="0">
+                <a:solidFill>
+                  <a:schemeClr val="bg1"/>
+                </a:solidFill>
+              </a:rPr>
+              <a:t>Institution</a:t>
+            </a:r>
+            <a:endParaRPr lang="en-US" sz="1800" dirty="0"/>
+          </a:p>
+        </p:txBody>
+      </p:sp>
+      <p:sp>
+        <p:nvSpPr>
+          <p:cNvPr id="6" name="Tree stem"/>
+          <p:cNvSpPr/>
+          <p:nvPr/>
+        </p:nvSpPr>
+        <p:spPr>
+          <a:xfrm>
+            <a:off x="3108960" y="2423160"/>
+            <a:ext cx="0" cy="320040"/>
+          </a:xfrm>
+          <a:prstGeom prst="line">
+            <a:avLst/>
+          </a:prstGeom>
+          <a:noFill/>
+          <a:ln w="19050">
+            <a:solidFill>
+              <a:schemeClr val="accent5"/>
+            </a:solidFill>
+            <a:prstDash val="solid"/>
+          </a:ln>
+        </p:spPr>
+      </p:sp>
+      <p:sp>
+        <p:nvSpPr>
+          <p:cNvPr id="7" name="Tree bar"/>
+          <p:cNvSpPr/>
+          <p:nvPr/>
+        </p:nvSpPr>
+        <p:spPr>
+          <a:xfrm>
+            <a:off x="1417320" y="2743200"/>
+            <a:ext cx="3383280" cy="0"/>
+          </a:xfrm>
+          <a:prstGeom prst="line">
+            <a:avLst/>
+          </a:prstGeom>
+          <a:noFill/>
+          <a:ln w="19050">
+            <a:solidFill>
+              <a:schemeClr val="accent5"/>
+            </a:solidFill>
+            <a:prstDash val="solid"/>
+          </a:ln>
+        </p:spPr>
+      </p:sp>
+      <p:sp>
+        <p:nvSpPr>
+          <p:cNvPr id="8" name="Tree drop 0"/>
+          <p:cNvSpPr/>
+          <p:nvPr/>
+        </p:nvSpPr>
+        <p:spPr>
+          <a:xfrm>
+            <a:off x="1417320" y="2743200"/>
+            <a:ext cx="0" cy="182880"/>
+          </a:xfrm>
+          <a:prstGeom prst="line">
+            <a:avLst/>
+          </a:prstGeom>
+          <a:noFill/>
+          <a:ln w="19050">
+            <a:solidFill>
+              <a:schemeClr val="accent5"/>
+            </a:solidFill>
+            <a:prstDash val="solid"/>
+          </a:ln>
+        </p:spPr>
+      </p:sp>
+      <p:sp>
+        <p:nvSpPr>
+          <p:cNvPr id="9" name="Tree level 2 0"/>
+          <p:cNvSpPr/>
+          <p:nvPr/>
+        </p:nvSpPr>
+        <p:spPr>
+          <a:xfrm>
+            <a:off x="640080" y="2926080"/>
+            <a:ext cx="1554480" cy="731520"/>
+          </a:xfrm>
+          <a:prstGeom prst="roundRect">
+            <a:avLst>
+              <a:gd name="adj" fmla="val 10000"/>
+            </a:avLst>
+          </a:prstGeom>
+          <a:solidFill>
+            <a:schemeClr val="accent3"/>
+          </a:solidFill>
+          <a:ln/>
+        </p:spPr>
+      </p:sp>
+      <p:sp>
+        <p:nvSpPr>
+          <p:cNvPr id="10" name="Tree level 2 0 text"/>
+          <p:cNvSpPr txBox="1"/>
+          <p:nvPr/>
+        </p:nvSpPr>
+        <p:spPr>
+          <a:xfrm>
+            <a:off x="640080" y="2926080"/>
+            <a:ext cx="1554480" cy="731520"/>
+          </a:xfrm>
+          <a:prstGeom prst="rect">
+            <a:avLst/>
+          </a:prstGeom>
+          <a:noFill/>
+          <a:ln/>
+        </p:spPr>
+        <p:txBody>
+          <a:bodyPr wrap="square" lIns="635" tIns="635" rIns="635" bIns="635" rtlCol="0" anchor="ctr"/>
+          <a:lstStyle/>
+          <a:p>
+            <a:pPr algn="ctr" indent="0" marL="0">
+              <a:buNone/>
+            </a:pPr>
+            <a:r>
+              <a:rPr lang="en-US" sz="1400" b="1" dirty="0">
+                <a:solidFill>
+                  <a:schemeClr val="bg1"/>
+                </a:solidFill>
+              </a:rPr>
+              <a:t>Directorate</a:t>
+            </a:r>
+            <a:endParaRPr lang="en-US" sz="1400" dirty="0"/>
+          </a:p>
+        </p:txBody>
+      </p:sp>
+      <p:sp>
+        <p:nvSpPr>
+          <p:cNvPr id="11" name="Tree sub drop 0"/>
+          <p:cNvSpPr/>
+          <p:nvPr/>
+        </p:nvSpPr>
+        <p:spPr>
+          <a:xfrm>
+            <a:off x="1417320" y="3657600"/>
+            <a:ext cx="0" cy="365760"/>
+          </a:xfrm>
+          <a:prstGeom prst="line">
+            <a:avLst/>
+          </a:prstGeom>
+          <a:noFill/>
+          <a:ln w="19050">
+            <a:solidFill>
+              <a:schemeClr val="accent5"/>
+            </a:solidFill>
+            <a:prstDash val="solid"/>
+          </a:ln>
+        </p:spPr>
+      </p:sp>
+      <p:sp>
+        <p:nvSpPr>
+          <p:cNvPr id="12" name="Tree level 3 0"/>
+          <p:cNvSpPr/>
+          <p:nvPr/>
+        </p:nvSpPr>
+        <p:spPr>
+          <a:xfrm>
+            <a:off x="640080" y="4023360"/>
+            <a:ext cx="1554480" cy="640080"/>
+          </a:xfrm>
+          <a:prstGeom prst="roundRect">
+            <a:avLst>
+              <a:gd name="adj" fmla="val 11429"/>
             </a:avLst>
           </a:prstGeom>
           <a:solidFill>
@@ -9065,137 +8817,158 @@
       </p:sp>
       <p:sp>
         <p:nvSpPr>
-          <p:cNvPr id="5" name="Trust circle 1"/>
-          <p:cNvSpPr/>
-          <p:nvPr/>
-        </p:nvSpPr>
-        <p:spPr>
-          <a:xfrm>
-            <a:off x="914400" y="1874520"/>
-            <a:ext cx="640080" cy="640080"/>
-          </a:xfrm>
-          <a:prstGeom prst="ellipse">
-            <a:avLst/>
-          </a:prstGeom>
-          <a:solidFill>
-            <a:schemeClr val="accent1"/>
-          </a:solidFill>
-          <a:ln/>
-        </p:spPr>
-      </p:sp>
-      <p:pic>
-        <p:nvPicPr>
-          <p:cNvPr id="6" name="Trust icon 1" descr="Audit trail and record">    </p:cNvPr>
-          <p:cNvPicPr>
-            <a:picLocks noChangeAspect="1"/>
-          </p:cNvPicPr>
-          <p:nvPr/>
-        </p:nvPicPr>
-        <p:blipFill>
-          <a:blip r:embed="rId1"/>
-          <a:stretch>
-            <a:fillRect/>
-          </a:stretch>
-        </p:blipFill>
-        <p:spPr>
-          <a:xfrm>
-            <a:off x="1078992" y="2039112"/>
-            <a:ext cx="310896" cy="310896"/>
-          </a:xfrm>
-          <a:prstGeom prst="rect">
-            <a:avLst/>
-          </a:prstGeom>
-        </p:spPr>
-      </p:pic>
-      <p:sp>
-        <p:nvSpPr>
-          <p:cNvPr id="7" name="Text 3"/>
-          <p:cNvSpPr txBox="1"/>
-          <p:nvPr/>
-        </p:nvSpPr>
-        <p:spPr>
-          <a:xfrm>
-            <a:off x="1691640" y="1874520"/>
-            <a:ext cx="2221992" cy="640080"/>
-          </a:xfrm>
-          <a:prstGeom prst="rect">
-            <a:avLst/>
-          </a:prstGeom>
-          <a:noFill/>
-          <a:ln/>
-        </p:spPr>
-        <p:txBody>
-          <a:bodyPr wrap="square" lIns="0" tIns="0" rIns="0" bIns="0" rtlCol="0" anchor="ctr"/>
-          <a:lstStyle/>
-          <a:p>
-            <a:pPr indent="0" marL="0">
-              <a:buNone/>
-            </a:pPr>
-            <a:r>
-              <a:rPr lang="en-US" sz="1700" b="1" dirty="0">
-                <a:solidFill>
-                  <a:schemeClr val="tx1"/>
-                </a:solidFill>
-                <a:latin typeface="Cambria" pitchFamily="34" charset="0"/>
-                <a:ea typeface="Cambria" pitchFamily="34" charset="-122"/>
-                <a:cs typeface="Cambria" pitchFamily="34" charset="-120"/>
-              </a:rPr>
-              <a:t>Audit trail and record</a:t>
-            </a:r>
-            <a:endParaRPr lang="en-US" sz="1700" dirty="0"/>
-          </a:p>
-        </p:txBody>
-      </p:sp>
-      <p:sp>
-        <p:nvSpPr>
-          <p:cNvPr id="8" name="Text 4"/>
-          <p:cNvSpPr txBox="1"/>
-          <p:nvPr/>
-        </p:nvSpPr>
-        <p:spPr>
-          <a:xfrm>
-            <a:off x="914400" y="2651760"/>
-            <a:ext cx="2953512" cy="914400"/>
-          </a:xfrm>
-          <a:prstGeom prst="rect">
-            <a:avLst/>
-          </a:prstGeom>
-          <a:noFill/>
-          <a:ln/>
-        </p:spPr>
-        <p:txBody>
-          <a:bodyPr wrap="square" lIns="0" tIns="0" rIns="0" bIns="0" rtlCol="0" anchor="t"/>
-          <a:lstStyle/>
-          <a:p>
-            <a:pPr indent="0" marL="0">
-              <a:buNone/>
-            </a:pPr>
-            <a:r>
-              <a:rPr lang="en-US" sz="1400" dirty="0">
-                <a:solidFill>
-                  <a:schemeClr val="tx1"/>
-                </a:solidFill>
-              </a:rPr>
-              <a:t>Every change, and every signature of every round, with who and when. Nothing is erased.</a:t>
-            </a:r>
-            <a:endParaRPr lang="en-US" sz="1400" dirty="0"/>
-          </a:p>
-        </p:txBody>
-      </p:sp>
-      <p:sp>
-        <p:nvSpPr>
-          <p:cNvPr id="9" name="Trust 2"/>
-          <p:cNvSpPr/>
-          <p:nvPr/>
-        </p:nvSpPr>
-        <p:spPr>
-          <a:xfrm>
-            <a:off x="4343400" y="1600200"/>
-            <a:ext cx="3502152" cy="2011680"/>
+          <p:cNvPr id="13" name="Tree level 3 0 text"/>
+          <p:cNvSpPr txBox="1"/>
+          <p:nvPr/>
+        </p:nvSpPr>
+        <p:spPr>
+          <a:xfrm>
+            <a:off x="640080" y="4023360"/>
+            <a:ext cx="1554480" cy="640080"/>
+          </a:xfrm>
+          <a:prstGeom prst="rect">
+            <a:avLst/>
+          </a:prstGeom>
+          <a:noFill/>
+          <a:ln/>
+        </p:spPr>
+        <p:txBody>
+          <a:bodyPr wrap="square" lIns="635" tIns="635" rIns="635" bIns="635" rtlCol="0" anchor="ctr"/>
+          <a:lstStyle/>
+          <a:p>
+            <a:pPr algn="ctr" indent="0" marL="0">
+              <a:buNone/>
+            </a:pPr>
+            <a:r>
+              <a:rPr lang="en-US" sz="1200" b="1" dirty="0">
+                <a:solidFill>
+                  <a:schemeClr val="tx1"/>
+                </a:solidFill>
+              </a:rPr>
+              <a:t>Units, each with its people</a:t>
+            </a:r>
+            <a:endParaRPr lang="en-US" sz="1200" dirty="0"/>
+          </a:p>
+        </p:txBody>
+      </p:sp>
+      <p:sp>
+        <p:nvSpPr>
+          <p:cNvPr id="14" name="Tree drop 1"/>
+          <p:cNvSpPr/>
+          <p:nvPr/>
+        </p:nvSpPr>
+        <p:spPr>
+          <a:xfrm>
+            <a:off x="3108960" y="2743200"/>
+            <a:ext cx="0" cy="182880"/>
+          </a:xfrm>
+          <a:prstGeom prst="line">
+            <a:avLst/>
+          </a:prstGeom>
+          <a:noFill/>
+          <a:ln w="19050">
+            <a:solidFill>
+              <a:schemeClr val="accent5"/>
+            </a:solidFill>
+            <a:prstDash val="solid"/>
+          </a:ln>
+        </p:spPr>
+      </p:sp>
+      <p:sp>
+        <p:nvSpPr>
+          <p:cNvPr id="15" name="Tree level 2 1"/>
+          <p:cNvSpPr/>
+          <p:nvPr/>
+        </p:nvSpPr>
+        <p:spPr>
+          <a:xfrm>
+            <a:off x="2331720" y="2926080"/>
+            <a:ext cx="1554480" cy="731520"/>
           </a:xfrm>
           <a:prstGeom prst="roundRect">
             <a:avLst>
-              <a:gd name="adj" fmla="val 4545"/>
+              <a:gd name="adj" fmla="val 10000"/>
+            </a:avLst>
+          </a:prstGeom>
+          <a:solidFill>
+            <a:schemeClr val="accent3"/>
+          </a:solidFill>
+          <a:ln/>
+        </p:spPr>
+      </p:sp>
+      <p:sp>
+        <p:nvSpPr>
+          <p:cNvPr id="16" name="Tree level 2 1 text"/>
+          <p:cNvSpPr txBox="1"/>
+          <p:nvPr/>
+        </p:nvSpPr>
+        <p:spPr>
+          <a:xfrm>
+            <a:off x="2331720" y="2926080"/>
+            <a:ext cx="1554480" cy="731520"/>
+          </a:xfrm>
+          <a:prstGeom prst="rect">
+            <a:avLst/>
+          </a:prstGeom>
+          <a:noFill/>
+          <a:ln/>
+        </p:spPr>
+        <p:txBody>
+          <a:bodyPr wrap="square" lIns="635" tIns="635" rIns="635" bIns="635" rtlCol="0" anchor="ctr"/>
+          <a:lstStyle/>
+          <a:p>
+            <a:pPr algn="ctr" indent="0" marL="0">
+              <a:buNone/>
+            </a:pPr>
+            <a:r>
+              <a:rPr lang="en-US" sz="1400" b="1" dirty="0">
+                <a:solidFill>
+                  <a:schemeClr val="bg1"/>
+                </a:solidFill>
+              </a:rPr>
+              <a:t>Gabinete</a:t>
+            </a:r>
+            <a:endParaRPr lang="en-US" sz="1400" dirty="0"/>
+          </a:p>
+        </p:txBody>
+      </p:sp>
+      <p:sp>
+        <p:nvSpPr>
+          <p:cNvPr id="17" name="Tree sub drop 1"/>
+          <p:cNvSpPr/>
+          <p:nvPr/>
+        </p:nvSpPr>
+        <p:spPr>
+          <a:xfrm>
+            <a:off x="3108960" y="3657600"/>
+            <a:ext cx="0" cy="365760"/>
+          </a:xfrm>
+          <a:prstGeom prst="line">
+            <a:avLst/>
+          </a:prstGeom>
+          <a:noFill/>
+          <a:ln w="19050">
+            <a:solidFill>
+              <a:schemeClr val="accent5"/>
+            </a:solidFill>
+            <a:prstDash val="solid"/>
+          </a:ln>
+        </p:spPr>
+      </p:sp>
+      <p:sp>
+        <p:nvSpPr>
+          <p:cNvPr id="18" name="Tree level 3 1"/>
+          <p:cNvSpPr/>
+          <p:nvPr/>
+        </p:nvSpPr>
+        <p:spPr>
+          <a:xfrm>
+            <a:off x="2331720" y="4023360"/>
+            <a:ext cx="1554480" cy="640080"/>
+          </a:xfrm>
+          <a:prstGeom prst="roundRect">
+            <a:avLst>
+              <a:gd name="adj" fmla="val 11429"/>
             </a:avLst>
           </a:prstGeom>
           <a:solidFill>
@@ -9206,17 +8979,78 @@
       </p:sp>
       <p:sp>
         <p:nvSpPr>
-          <p:cNvPr id="10" name="Trust circle 2"/>
-          <p:cNvSpPr/>
-          <p:nvPr/>
-        </p:nvSpPr>
-        <p:spPr>
-          <a:xfrm>
-            <a:off x="4617720" y="1874520"/>
-            <a:ext cx="640080" cy="640080"/>
-          </a:xfrm>
-          <a:prstGeom prst="ellipse">
-            <a:avLst/>
+          <p:cNvPr id="19" name="Tree level 3 1 text"/>
+          <p:cNvSpPr txBox="1"/>
+          <p:nvPr/>
+        </p:nvSpPr>
+        <p:spPr>
+          <a:xfrm>
+            <a:off x="2331720" y="4023360"/>
+            <a:ext cx="1554480" cy="640080"/>
+          </a:xfrm>
+          <a:prstGeom prst="rect">
+            <a:avLst/>
+          </a:prstGeom>
+          <a:noFill/>
+          <a:ln/>
+        </p:spPr>
+        <p:txBody>
+          <a:bodyPr wrap="square" lIns="635" tIns="635" rIns="635" bIns="635" rtlCol="0" anchor="ctr"/>
+          <a:lstStyle/>
+          <a:p>
+            <a:pPr algn="ctr" indent="0" marL="0">
+              <a:buNone/>
+            </a:pPr>
+            <a:r>
+              <a:rPr lang="en-US" sz="1200" b="1" dirty="0">
+                <a:solidFill>
+                  <a:schemeClr val="tx1"/>
+                </a:solidFill>
+              </a:rPr>
+              <a:t>Units, each with its people</a:t>
+            </a:r>
+            <a:endParaRPr lang="en-US" sz="1200" dirty="0"/>
+          </a:p>
+        </p:txBody>
+      </p:sp>
+      <p:sp>
+        <p:nvSpPr>
+          <p:cNvPr id="20" name="Tree drop 2"/>
+          <p:cNvSpPr/>
+          <p:nvPr/>
+        </p:nvSpPr>
+        <p:spPr>
+          <a:xfrm>
+            <a:off x="4800600" y="2743200"/>
+            <a:ext cx="0" cy="182880"/>
+          </a:xfrm>
+          <a:prstGeom prst="line">
+            <a:avLst/>
+          </a:prstGeom>
+          <a:noFill/>
+          <a:ln w="19050">
+            <a:solidFill>
+              <a:schemeClr val="accent5"/>
+            </a:solidFill>
+            <a:prstDash val="solid"/>
+          </a:ln>
+        </p:spPr>
+      </p:sp>
+      <p:sp>
+        <p:nvSpPr>
+          <p:cNvPr id="21" name="Tree level 2 2"/>
+          <p:cNvSpPr/>
+          <p:nvPr/>
+        </p:nvSpPr>
+        <p:spPr>
+          <a:xfrm>
+            <a:off x="4023360" y="2926080"/>
+            <a:ext cx="1554480" cy="731520"/>
+          </a:xfrm>
+          <a:prstGeom prst="roundRect">
+            <a:avLst>
+              <a:gd name="adj" fmla="val 10000"/>
+            </a:avLst>
           </a:prstGeom>
           <a:solidFill>
             <a:schemeClr val="accent3"/>
@@ -9224,100 +9058,37 @@
           <a:ln/>
         </p:spPr>
       </p:sp>
-      <p:pic>
-        <p:nvPicPr>
-          <p:cNvPr id="11" name="Trust icon 2" descr="Role permissions">    </p:cNvPr>
-          <p:cNvPicPr>
-            <a:picLocks noChangeAspect="1"/>
-          </p:cNvPicPr>
-          <p:nvPr/>
-        </p:nvPicPr>
-        <p:blipFill>
-          <a:blip r:embed="rId2"/>
-          <a:stretch>
-            <a:fillRect/>
-          </a:stretch>
-        </p:blipFill>
-        <p:spPr>
-          <a:xfrm>
-            <a:off x="4782312" y="2039112"/>
-            <a:ext cx="310896" cy="310896"/>
-          </a:xfrm>
-          <a:prstGeom prst="rect">
-            <a:avLst/>
-          </a:prstGeom>
-        </p:spPr>
-      </p:pic>
-      <p:sp>
-        <p:nvSpPr>
-          <p:cNvPr id="12" name="Text 7"/>
-          <p:cNvSpPr txBox="1"/>
-          <p:nvPr/>
-        </p:nvSpPr>
-        <p:spPr>
-          <a:xfrm>
-            <a:off x="5394960" y="1874520"/>
-            <a:ext cx="2221992" cy="640080"/>
-          </a:xfrm>
-          <a:prstGeom prst="rect">
-            <a:avLst/>
-          </a:prstGeom>
-          <a:noFill/>
-          <a:ln/>
-        </p:spPr>
-        <p:txBody>
-          <a:bodyPr wrap="square" lIns="0" tIns="0" rIns="0" bIns="0" rtlCol="0" anchor="ctr"/>
-          <a:lstStyle/>
-          <a:p>
-            <a:pPr indent="0" marL="0">
-              <a:buNone/>
-            </a:pPr>
-            <a:r>
-              <a:rPr lang="en-US" sz="1700" b="1" dirty="0">
-                <a:solidFill>
-                  <a:schemeClr val="tx1"/>
-                </a:solidFill>
-                <a:latin typeface="Cambria" pitchFamily="34" charset="0"/>
-                <a:ea typeface="Cambria" pitchFamily="34" charset="-122"/>
-                <a:cs typeface="Cambria" pitchFamily="34" charset="-120"/>
-              </a:rPr>
-              <a:t>Role permissions</a:t>
-            </a:r>
-            <a:endParaRPr lang="en-US" sz="1700" dirty="0"/>
-          </a:p>
-        </p:txBody>
-      </p:sp>
-      <p:sp>
-        <p:nvSpPr>
-          <p:cNvPr id="13" name="Text 8"/>
-          <p:cNvSpPr txBox="1"/>
-          <p:nvPr/>
-        </p:nvSpPr>
-        <p:spPr>
-          <a:xfrm>
-            <a:off x="4617720" y="2651760"/>
-            <a:ext cx="2953512" cy="914400"/>
-          </a:xfrm>
-          <a:prstGeom prst="rect">
-            <a:avLst/>
-          </a:prstGeom>
-          <a:noFill/>
-          <a:ln/>
-        </p:spPr>
-        <p:txBody>
-          <a:bodyPr wrap="square" lIns="0" tIns="0" rIns="0" bIns="0" rtlCol="0" anchor="t"/>
-          <a:lstStyle/>
-          <a:p>
-            <a:pPr indent="0" marL="0">
-              <a:buNone/>
-            </a:pPr>
-            <a:r>
-              <a:rPr lang="en-US" sz="1400" dirty="0">
-                <a:solidFill>
-                  <a:schemeClr val="tx1"/>
-                </a:solidFill>
-              </a:rPr>
-              <a:t>Checked on the server for every action, not only hidden in the menu.</a:t>
+      <p:sp>
+        <p:nvSpPr>
+          <p:cNvPr id="22" name="Tree level 2 2 text"/>
+          <p:cNvSpPr txBox="1"/>
+          <p:nvPr/>
+        </p:nvSpPr>
+        <p:spPr>
+          <a:xfrm>
+            <a:off x="4023360" y="2926080"/>
+            <a:ext cx="1554480" cy="731520"/>
+          </a:xfrm>
+          <a:prstGeom prst="rect">
+            <a:avLst/>
+          </a:prstGeom>
+          <a:noFill/>
+          <a:ln/>
+        </p:spPr>
+        <p:txBody>
+          <a:bodyPr wrap="square" lIns="635" tIns="635" rIns="635" bIns="635" rtlCol="0" anchor="ctr"/>
+          <a:lstStyle/>
+          <a:p>
+            <a:pPr algn="ctr" indent="0" marL="0">
+              <a:buNone/>
+            </a:pPr>
+            <a:r>
+              <a:rPr lang="en-US" sz="1400" b="1" dirty="0">
+                <a:solidFill>
+                  <a:schemeClr val="bg1"/>
+                </a:solidFill>
+              </a:rPr>
+              <a:t>Autonomous body</a:t>
             </a:r>
             <a:endParaRPr lang="en-US" sz="1400" dirty="0"/>
           </a:p>
@@ -9325,18 +9096,41 @@
       </p:sp>
       <p:sp>
         <p:nvSpPr>
-          <p:cNvPr id="14" name="Trust 3"/>
-          <p:cNvSpPr/>
-          <p:nvPr/>
-        </p:nvSpPr>
-        <p:spPr>
-          <a:xfrm>
-            <a:off x="8046720" y="1600200"/>
-            <a:ext cx="3502152" cy="2011680"/>
+          <p:cNvPr id="23" name="Tree sub drop 2"/>
+          <p:cNvSpPr/>
+          <p:nvPr/>
+        </p:nvSpPr>
+        <p:spPr>
+          <a:xfrm>
+            <a:off x="4800600" y="3657600"/>
+            <a:ext cx="0" cy="365760"/>
+          </a:xfrm>
+          <a:prstGeom prst="line">
+            <a:avLst/>
+          </a:prstGeom>
+          <a:noFill/>
+          <a:ln w="19050">
+            <a:solidFill>
+              <a:schemeClr val="accent5"/>
+            </a:solidFill>
+            <a:prstDash val="solid"/>
+          </a:ln>
+        </p:spPr>
+      </p:sp>
+      <p:sp>
+        <p:nvSpPr>
+          <p:cNvPr id="24" name="Tree level 3 2"/>
+          <p:cNvSpPr/>
+          <p:nvPr/>
+        </p:nvSpPr>
+        <p:spPr>
+          <a:xfrm>
+            <a:off x="4023360" y="4023360"/>
+            <a:ext cx="1554480" cy="640080"/>
           </a:xfrm>
           <a:prstGeom prst="roundRect">
             <a:avLst>
-              <a:gd name="adj" fmla="val 4545"/>
+              <a:gd name="adj" fmla="val 11429"/>
             </a:avLst>
           </a:prstGeom>
           <a:solidFill>
@@ -9347,97 +9141,50 @@
       </p:sp>
       <p:sp>
         <p:nvSpPr>
-          <p:cNvPr id="15" name="Trust circle 3"/>
-          <p:cNvSpPr/>
-          <p:nvPr/>
-        </p:nvSpPr>
-        <p:spPr>
-          <a:xfrm>
-            <a:off x="8321040" y="1874520"/>
-            <a:ext cx="640080" cy="640080"/>
-          </a:xfrm>
-          <a:prstGeom prst="ellipse">
-            <a:avLst/>
-          </a:prstGeom>
-          <a:solidFill>
-            <a:schemeClr val="accent4"/>
-          </a:solidFill>
-          <a:ln/>
-        </p:spPr>
-      </p:sp>
-      <p:pic>
-        <p:nvPicPr>
-          <p:cNvPr id="16" name="Trust icon 3" descr="Two-factor sign-in">    </p:cNvPr>
-          <p:cNvPicPr>
-            <a:picLocks noChangeAspect="1"/>
-          </p:cNvPicPr>
-          <p:nvPr/>
-        </p:nvPicPr>
-        <p:blipFill>
-          <a:blip r:embed="rId3"/>
-          <a:stretch>
-            <a:fillRect/>
-          </a:stretch>
-        </p:blipFill>
-        <p:spPr>
-          <a:xfrm>
-            <a:off x="8485632" y="2039112"/>
-            <a:ext cx="310896" cy="310896"/>
-          </a:xfrm>
-          <a:prstGeom prst="rect">
-            <a:avLst/>
-          </a:prstGeom>
-        </p:spPr>
-      </p:pic>
-      <p:sp>
-        <p:nvSpPr>
-          <p:cNvPr id="17" name="Text 11"/>
-          <p:cNvSpPr txBox="1"/>
-          <p:nvPr/>
-        </p:nvSpPr>
-        <p:spPr>
-          <a:xfrm>
-            <a:off x="9098280" y="1874520"/>
-            <a:ext cx="2221992" cy="640080"/>
-          </a:xfrm>
-          <a:prstGeom prst="rect">
-            <a:avLst/>
-          </a:prstGeom>
-          <a:noFill/>
-          <a:ln/>
-        </p:spPr>
-        <p:txBody>
-          <a:bodyPr wrap="square" lIns="0" tIns="0" rIns="0" bIns="0" rtlCol="0" anchor="ctr"/>
-          <a:lstStyle/>
-          <a:p>
-            <a:pPr indent="0" marL="0">
-              <a:buNone/>
-            </a:pPr>
-            <a:r>
-              <a:rPr lang="en-US" sz="1700" b="1" dirty="0">
-                <a:solidFill>
-                  <a:schemeClr val="tx1"/>
-                </a:solidFill>
-                <a:latin typeface="Cambria" pitchFamily="34" charset="0"/>
-                <a:ea typeface="Cambria" pitchFamily="34" charset="-122"/>
-                <a:cs typeface="Cambria" pitchFamily="34" charset="-120"/>
-              </a:rPr>
-              <a:t>Two-factor sign-in</a:t>
-            </a:r>
-            <a:endParaRPr lang="en-US" sz="1700" dirty="0"/>
-          </a:p>
-        </p:txBody>
-      </p:sp>
-      <p:sp>
-        <p:nvSpPr>
-          <p:cNvPr id="18" name="Text 12"/>
-          <p:cNvSpPr txBox="1"/>
-          <p:nvPr/>
-        </p:nvSpPr>
-        <p:spPr>
-          <a:xfrm>
-            <a:off x="8321040" y="2651760"/>
-            <a:ext cx="2953512" cy="914400"/>
+          <p:cNvPr id="25" name="Tree level 3 2 text"/>
+          <p:cNvSpPr txBox="1"/>
+          <p:nvPr/>
+        </p:nvSpPr>
+        <p:spPr>
+          <a:xfrm>
+            <a:off x="4023360" y="4023360"/>
+            <a:ext cx="1554480" cy="640080"/>
+          </a:xfrm>
+          <a:prstGeom prst="rect">
+            <a:avLst/>
+          </a:prstGeom>
+          <a:noFill/>
+          <a:ln/>
+        </p:spPr>
+        <p:txBody>
+          <a:bodyPr wrap="square" lIns="635" tIns="635" rIns="635" bIns="635" rtlCol="0" anchor="ctr"/>
+          <a:lstStyle/>
+          <a:p>
+            <a:pPr algn="ctr" indent="0" marL="0">
+              <a:buNone/>
+            </a:pPr>
+            <a:r>
+              <a:rPr lang="en-US" sz="1200" b="1" dirty="0">
+                <a:solidFill>
+                  <a:schemeClr val="tx1"/>
+                </a:solidFill>
+              </a:rPr>
+              <a:t>Units, each with its people</a:t>
+            </a:r>
+            <a:endParaRPr lang="en-US" sz="1200" dirty="0"/>
+          </a:p>
+        </p:txBody>
+      </p:sp>
+      <p:sp>
+        <p:nvSpPr>
+          <p:cNvPr id="26" name="Text 23"/>
+          <p:cNvSpPr txBox="1"/>
+          <p:nvPr/>
+        </p:nvSpPr>
+        <p:spPr>
+          <a:xfrm>
+            <a:off x="640080" y="4937760"/>
+            <a:ext cx="5120640" cy="365760"/>
           </a:xfrm>
           <a:prstGeom prst="rect">
             <a:avLst/>
@@ -9453,132 +9200,77 @@
               <a:buNone/>
             </a:pPr>
             <a:r>
+              <a:rPr lang="en-US" sz="1400" i="1" dirty="0">
+                <a:solidFill>
+                  <a:schemeClr val="accent5"/>
+                </a:solidFill>
+              </a:rPr>
+              <a:t>Any depth the law defines</a:t>
+            </a:r>
+            <a:endParaRPr lang="en-US" sz="1400" dirty="0"/>
+          </a:p>
+        </p:txBody>
+      </p:sp>
+      <p:sp>
+        <p:nvSpPr>
+          <p:cNvPr id="27" name="Text 24"/>
+          <p:cNvSpPr txBox="1"/>
+          <p:nvPr/>
+        </p:nvSpPr>
+        <p:spPr>
+          <a:xfrm>
+            <a:off x="6583680" y="1691640"/>
+            <a:ext cx="4965192" cy="1463040"/>
+          </a:xfrm>
+          <a:prstGeom prst="rect">
+            <a:avLst/>
+          </a:prstGeom>
+          <a:noFill/>
+          <a:ln/>
+        </p:spPr>
+        <p:txBody>
+          <a:bodyPr wrap="square" lIns="0" tIns="0" rIns="0" bIns="0" rtlCol="0" anchor="t"/>
+          <a:lstStyle/>
+          <a:p>
+            <a:pPr indent="0" marL="0">
+              <a:buNone/>
+            </a:pPr>
+            <a:r>
+              <a:rPr lang="en-US" sz="1800" b="1" dirty="0">
+                <a:solidFill>
+                  <a:schemeClr val="tx1"/>
+                </a:solidFill>
+              </a:rPr>
+              <a:t>One deployment, one institution</a:t>
+            </a:r>
+            <a:endParaRPr lang="en-US" sz="1800" dirty="0"/>
+          </a:p>
+          <a:p>
+            <a:pPr indent="0" marL="0">
+              <a:buNone/>
+            </a:pPr>
+            <a:r>
               <a:rPr lang="en-US" sz="1400" dirty="0">
                 <a:solidFill>
                   <a:schemeClr val="tx1"/>
                 </a:solidFill>
               </a:rPr>
-              <a:t>Authenticator codes and recovery codes; required for senior roles.</a:t>
-            </a:r>
-            <a:endParaRPr lang="en-US" sz="1400" dirty="0"/>
-          </a:p>
-        </p:txBody>
-      </p:sp>
-      <p:sp>
-        <p:nvSpPr>
-          <p:cNvPr id="19" name="Trust 4"/>
-          <p:cNvSpPr/>
-          <p:nvPr/>
-        </p:nvSpPr>
-        <p:spPr>
-          <a:xfrm>
-            <a:off x="640080" y="3840480"/>
-            <a:ext cx="3502152" cy="2011680"/>
-          </a:xfrm>
-          <a:prstGeom prst="roundRect">
-            <a:avLst>
-              <a:gd name="adj" fmla="val 4545"/>
-            </a:avLst>
-          </a:prstGeom>
-          <a:solidFill>
-            <a:schemeClr val="bg2"/>
-          </a:solidFill>
-          <a:ln/>
-        </p:spPr>
-      </p:sp>
-      <p:sp>
-        <p:nvSpPr>
-          <p:cNvPr id="20" name="Trust circle 4"/>
-          <p:cNvSpPr/>
-          <p:nvPr/>
-        </p:nvSpPr>
-        <p:spPr>
-          <a:xfrm>
-            <a:off x="914400" y="4114800"/>
-            <a:ext cx="640080" cy="640080"/>
-          </a:xfrm>
-          <a:prstGeom prst="ellipse">
-            <a:avLst/>
-          </a:prstGeom>
-          <a:solidFill>
-            <a:schemeClr val="accent6"/>
-          </a:solidFill>
-          <a:ln/>
-        </p:spPr>
-      </p:sp>
-      <p:pic>
-        <p:nvPicPr>
-          <p:cNvPr id="21" name="Trust icon 4" descr="Closed registration">    </p:cNvPr>
-          <p:cNvPicPr>
-            <a:picLocks noChangeAspect="1"/>
-          </p:cNvPicPr>
-          <p:nvPr/>
-        </p:nvPicPr>
-        <p:blipFill>
-          <a:blip r:embed="rId4"/>
-          <a:stretch>
-            <a:fillRect/>
-          </a:stretch>
-        </p:blipFill>
-        <p:spPr>
-          <a:xfrm>
-            <a:off x="1078992" y="4279392"/>
-            <a:ext cx="310896" cy="310896"/>
-          </a:xfrm>
-          <a:prstGeom prst="rect">
-            <a:avLst/>
-          </a:prstGeom>
-        </p:spPr>
-      </p:pic>
-      <p:sp>
-        <p:nvSpPr>
-          <p:cNvPr id="22" name="Text 15"/>
-          <p:cNvSpPr txBox="1"/>
-          <p:nvPr/>
-        </p:nvSpPr>
-        <p:spPr>
-          <a:xfrm>
-            <a:off x="1691640" y="4114800"/>
-            <a:ext cx="2221992" cy="640080"/>
-          </a:xfrm>
-          <a:prstGeom prst="rect">
-            <a:avLst/>
-          </a:prstGeom>
-          <a:noFill/>
-          <a:ln/>
-        </p:spPr>
-        <p:txBody>
-          <a:bodyPr wrap="square" lIns="0" tIns="0" rIns="0" bIns="0" rtlCol="0" anchor="ctr"/>
-          <a:lstStyle/>
-          <a:p>
-            <a:pPr indent="0" marL="0">
-              <a:buNone/>
-            </a:pPr>
-            <a:r>
-              <a:rPr lang="en-US" sz="1700" b="1" dirty="0">
-                <a:solidFill>
-                  <a:schemeClr val="tx1"/>
-                </a:solidFill>
-                <a:latin typeface="Cambria" pitchFamily="34" charset="0"/>
-                <a:ea typeface="Cambria" pitchFamily="34" charset="-122"/>
-                <a:cs typeface="Cambria" pitchFamily="34" charset="-120"/>
-              </a:rPr>
-              <a:t>Closed registration</a:t>
-            </a:r>
-            <a:endParaRPr lang="en-US" sz="1700" dirty="0"/>
-          </a:p>
-        </p:txBody>
-      </p:sp>
-      <p:sp>
-        <p:nvSpPr>
-          <p:cNvPr id="23" name="Text 16"/>
-          <p:cNvSpPr txBox="1"/>
-          <p:nvPr/>
-        </p:nvSpPr>
-        <p:spPr>
-          <a:xfrm>
-            <a:off x="914400" y="4892040"/>
-            <a:ext cx="2953512" cy="914400"/>
+              <a:t>Name, structure and programmes are set in the app; nothing is hard-coded to a ministry.</a:t>
+            </a:r>
+            <a:endParaRPr lang="en-US" sz="1800" dirty="0"/>
+          </a:p>
+        </p:txBody>
+      </p:sp>
+      <p:sp>
+        <p:nvSpPr>
+          <p:cNvPr id="28" name="Text 25"/>
+          <p:cNvSpPr txBox="1"/>
+          <p:nvPr/>
+        </p:nvSpPr>
+        <p:spPr>
+          <a:xfrm>
+            <a:off x="6583680" y="3154680"/>
+            <a:ext cx="4965192" cy="1463040"/>
           </a:xfrm>
           <a:prstGeom prst="rect">
             <a:avLst/>
@@ -9594,132 +9286,41 @@
               <a:buNone/>
             </a:pPr>
             <a:r>
+              <a:rPr lang="en-US" sz="1800" b="1" dirty="0">
+                <a:solidFill>
+                  <a:schemeClr val="tx1"/>
+                </a:solidFill>
+              </a:rPr>
+              <a:t>Whole ministry or a single office</a:t>
+            </a:r>
+            <a:endParaRPr lang="en-US" sz="1800" dirty="0"/>
+          </a:p>
+          <a:p>
+            <a:pPr indent="0" marL="0">
+              <a:buNone/>
+            </a:pPr>
+            <a:r>
               <a:rPr lang="en-US" sz="1400" dirty="0">
                 <a:solidFill>
                   <a:schemeClr val="tx1"/>
                 </a:solidFill>
               </a:rPr>
-              <a:t>No self-sign-up; sign-in attempts are rate-limited.</a:t>
-            </a:r>
-            <a:endParaRPr lang="en-US" sz="1400" dirty="0"/>
-          </a:p>
-        </p:txBody>
-      </p:sp>
-      <p:sp>
-        <p:nvSpPr>
-          <p:cNvPr id="24" name="Trust 5"/>
-          <p:cNvSpPr/>
-          <p:nvPr/>
-        </p:nvSpPr>
-        <p:spPr>
-          <a:xfrm>
-            <a:off x="4343400" y="3840480"/>
-            <a:ext cx="3502152" cy="2011680"/>
-          </a:xfrm>
-          <a:prstGeom prst="roundRect">
-            <a:avLst>
-              <a:gd name="adj" fmla="val 4545"/>
-            </a:avLst>
-          </a:prstGeom>
-          <a:solidFill>
-            <a:schemeClr val="bg2"/>
-          </a:solidFill>
-          <a:ln/>
-        </p:spPr>
-      </p:sp>
-      <p:sp>
-        <p:nvSpPr>
-          <p:cNvPr id="25" name="Trust circle 5"/>
-          <p:cNvSpPr/>
-          <p:nvPr/>
-        </p:nvSpPr>
-        <p:spPr>
-          <a:xfrm>
-            <a:off x="4617720" y="4114800"/>
-            <a:ext cx="640080" cy="640080"/>
-          </a:xfrm>
-          <a:prstGeom prst="ellipse">
-            <a:avLst/>
-          </a:prstGeom>
-          <a:solidFill>
-            <a:schemeClr val="accent5"/>
-          </a:solidFill>
-          <a:ln/>
-        </p:spPr>
-      </p:sp>
-      <p:pic>
-        <p:nvPicPr>
-          <p:cNvPr id="26" name="Trust icon 5" descr="Backups and health">    </p:cNvPr>
-          <p:cNvPicPr>
-            <a:picLocks noChangeAspect="1"/>
-          </p:cNvPicPr>
-          <p:nvPr/>
-        </p:nvPicPr>
-        <p:blipFill>
-          <a:blip r:embed="rId5"/>
-          <a:stretch>
-            <a:fillRect/>
-          </a:stretch>
-        </p:blipFill>
-        <p:spPr>
-          <a:xfrm>
-            <a:off x="4782312" y="4279392"/>
-            <a:ext cx="310896" cy="310896"/>
-          </a:xfrm>
-          <a:prstGeom prst="rect">
-            <a:avLst/>
-          </a:prstGeom>
-        </p:spPr>
-      </p:pic>
-      <p:sp>
-        <p:nvSpPr>
-          <p:cNvPr id="27" name="Text 19"/>
-          <p:cNvSpPr txBox="1"/>
-          <p:nvPr/>
-        </p:nvSpPr>
-        <p:spPr>
-          <a:xfrm>
-            <a:off x="5394960" y="4114800"/>
-            <a:ext cx="2221992" cy="640080"/>
-          </a:xfrm>
-          <a:prstGeom prst="rect">
-            <a:avLst/>
-          </a:prstGeom>
-          <a:noFill/>
-          <a:ln/>
-        </p:spPr>
-        <p:txBody>
-          <a:bodyPr wrap="square" lIns="0" tIns="0" rIns="0" bIns="0" rtlCol="0" anchor="ctr"/>
-          <a:lstStyle/>
-          <a:p>
-            <a:pPr indent="0" marL="0">
-              <a:buNone/>
-            </a:pPr>
-            <a:r>
-              <a:rPr lang="en-US" sz="1700" b="1" dirty="0">
-                <a:solidFill>
-                  <a:schemeClr val="tx1"/>
-                </a:solidFill>
-                <a:latin typeface="Cambria" pitchFamily="34" charset="0"/>
-                <a:ea typeface="Cambria" pitchFamily="34" charset="-122"/>
-                <a:cs typeface="Cambria" pitchFamily="34" charset="-120"/>
-              </a:rPr>
-              <a:t>Backups and health</a:t>
-            </a:r>
-            <a:endParaRPr lang="en-US" sz="1700" dirty="0"/>
-          </a:p>
-        </p:txBody>
-      </p:sp>
-      <p:sp>
-        <p:nvSpPr>
-          <p:cNvPr id="28" name="Text 20"/>
-          <p:cNvSpPr txBox="1"/>
-          <p:nvPr/>
-        </p:nvSpPr>
-        <p:spPr>
-          <a:xfrm>
-            <a:off x="4617720" y="4892040"/>
-            <a:ext cx="2953512" cy="914400"/>
+              <a:t>Start with one directorate or gabinete and add the rest later.</a:t>
+            </a:r>
+            <a:endParaRPr lang="en-US" sz="1800" dirty="0"/>
+          </a:p>
+        </p:txBody>
+      </p:sp>
+      <p:sp>
+        <p:nvSpPr>
+          <p:cNvPr id="29" name="Text 26"/>
+          <p:cNvSpPr txBox="1"/>
+          <p:nvPr/>
+        </p:nvSpPr>
+        <p:spPr>
+          <a:xfrm>
+            <a:off x="6583680" y="4617720"/>
+            <a:ext cx="4965192" cy="1463040"/>
           </a:xfrm>
           <a:prstGeom prst="rect">
             <a:avLst/>
@@ -9735,155 +9336,28 @@
               <a:buNone/>
             </a:pPr>
             <a:r>
+              <a:rPr lang="en-US" sz="1800" b="1" dirty="0">
+                <a:solidFill>
+                  <a:schemeClr val="tx1"/>
+                </a:solidFill>
+              </a:rPr>
+              <a:t>Autonomous bodies included</a:t>
+            </a:r>
+            <a:endParaRPr lang="en-US" sz="1800" dirty="0"/>
+          </a:p>
+          <a:p>
+            <a:pPr indent="0" marL="0">
+              <a:buNone/>
+            </a:pPr>
+            <a:r>
               <a:rPr lang="en-US" sz="1400" dirty="0">
                 <a:solidFill>
                   <a:schemeClr val="tx1"/>
                 </a:solidFill>
               </a:rPr>
-              <a:t>Nightly verified backups and a health check for uptime monitoring.</a:t>
-            </a:r>
-            <a:endParaRPr lang="en-US" sz="1400" dirty="0"/>
-          </a:p>
-        </p:txBody>
-      </p:sp>
-      <p:sp>
-        <p:nvSpPr>
-          <p:cNvPr id="29" name="Trust 6"/>
-          <p:cNvSpPr/>
-          <p:nvPr/>
-        </p:nvSpPr>
-        <p:spPr>
-          <a:xfrm>
-            <a:off x="8046720" y="3840480"/>
-            <a:ext cx="3502152" cy="2011680"/>
-          </a:xfrm>
-          <a:prstGeom prst="roundRect">
-            <a:avLst>
-              <a:gd name="adj" fmla="val 4545"/>
-            </a:avLst>
-          </a:prstGeom>
-          <a:solidFill>
-            <a:schemeClr val="bg2"/>
-          </a:solidFill>
-          <a:ln/>
-        </p:spPr>
-      </p:sp>
-      <p:sp>
-        <p:nvSpPr>
-          <p:cNvPr id="30" name="Trust circle 6"/>
-          <p:cNvSpPr/>
-          <p:nvPr/>
-        </p:nvSpPr>
-        <p:spPr>
-          <a:xfrm>
-            <a:off x="8321040" y="4114800"/>
-            <a:ext cx="640080" cy="640080"/>
-          </a:xfrm>
-          <a:prstGeom prst="ellipse">
-            <a:avLst/>
-          </a:prstGeom>
-          <a:solidFill>
-            <a:schemeClr val="accent1"/>
-          </a:solidFill>
-          <a:ln/>
-        </p:spPr>
-      </p:sp>
-      <p:pic>
-        <p:nvPicPr>
-          <p:cNvPr id="31" name="Trust icon 6" descr="Tested">    </p:cNvPr>
-          <p:cNvPicPr>
-            <a:picLocks noChangeAspect="1"/>
-          </p:cNvPicPr>
-          <p:nvPr/>
-        </p:nvPicPr>
-        <p:blipFill>
-          <a:blip r:embed="rId6"/>
-          <a:stretch>
-            <a:fillRect/>
-          </a:stretch>
-        </p:blipFill>
-        <p:spPr>
-          <a:xfrm>
-            <a:off x="8485632" y="4279392"/>
-            <a:ext cx="310896" cy="310896"/>
-          </a:xfrm>
-          <a:prstGeom prst="rect">
-            <a:avLst/>
-          </a:prstGeom>
-        </p:spPr>
-      </p:pic>
-      <p:sp>
-        <p:nvSpPr>
-          <p:cNvPr id="32" name="Text 23"/>
-          <p:cNvSpPr txBox="1"/>
-          <p:nvPr/>
-        </p:nvSpPr>
-        <p:spPr>
-          <a:xfrm>
-            <a:off x="9098280" y="4114800"/>
-            <a:ext cx="2221992" cy="640080"/>
-          </a:xfrm>
-          <a:prstGeom prst="rect">
-            <a:avLst/>
-          </a:prstGeom>
-          <a:noFill/>
-          <a:ln/>
-        </p:spPr>
-        <p:txBody>
-          <a:bodyPr wrap="square" lIns="0" tIns="0" rIns="0" bIns="0" rtlCol="0" anchor="ctr"/>
-          <a:lstStyle/>
-          <a:p>
-            <a:pPr indent="0" marL="0">
-              <a:buNone/>
-            </a:pPr>
-            <a:r>
-              <a:rPr lang="en-US" sz="1700" b="1" dirty="0">
-                <a:solidFill>
-                  <a:schemeClr val="tx1"/>
-                </a:solidFill>
-                <a:latin typeface="Cambria" pitchFamily="34" charset="0"/>
-                <a:ea typeface="Cambria" pitchFamily="34" charset="-122"/>
-                <a:cs typeface="Cambria" pitchFamily="34" charset="-120"/>
-              </a:rPr>
-              <a:t>Tested</a:t>
-            </a:r>
-            <a:endParaRPr lang="en-US" sz="1700" dirty="0"/>
-          </a:p>
-        </p:txBody>
-      </p:sp>
-      <p:sp>
-        <p:nvSpPr>
-          <p:cNvPr id="33" name="Text 24"/>
-          <p:cNvSpPr txBox="1"/>
-          <p:nvPr/>
-        </p:nvSpPr>
-        <p:spPr>
-          <a:xfrm>
-            <a:off x="8321040" y="4892040"/>
-            <a:ext cx="2953512" cy="914400"/>
-          </a:xfrm>
-          <a:prstGeom prst="rect">
-            <a:avLst/>
-          </a:prstGeom>
-          <a:noFill/>
-          <a:ln/>
-        </p:spPr>
-        <p:txBody>
-          <a:bodyPr wrap="square" lIns="0" tIns="0" rIns="0" bIns="0" rtlCol="0" anchor="t"/>
-          <a:lstStyle/>
-          <a:p>
-            <a:pPr indent="0" marL="0">
-              <a:buNone/>
-            </a:pPr>
-            <a:r>
-              <a:rPr lang="en-US" sz="1400" dirty="0">
-                <a:solidFill>
-                  <a:schemeClr val="tx1"/>
-                </a:solidFill>
-              </a:rPr>
-              <a:t>375 automated tests guard the approval and budget rules.</a:t>
-            </a:r>
-            <a:endParaRPr lang="en-US" sz="1400" dirty="0"/>
+              <a:t>Public bodies with their own legal personality sit in the same tree.</a:t>
+            </a:r>
+            <a:endParaRPr lang="en-US" sz="1800" dirty="0"/>
           </a:p>
         </p:txBody>
       </p:sp>
@@ -10802,7 +10276,7 @@
                   <a:schemeClr val="tx1"/>
                 </a:solidFill>
               </a:rPr>
-              <a:t>Try it with sample data</a:t>
+              <a:t>Controls an institution can rely on</a:t>
             </a:r>
             <a:endParaRPr lang="en-US" sz="3400" dirty="0"/>
           </a:p>
@@ -10810,18 +10284,18 @@
       </p:sp>
       <p:sp>
         <p:nvSpPr>
-          <p:cNvPr id="4" name="Demo card 1"/>
-          <p:cNvSpPr/>
-          <p:nvPr/>
-        </p:nvSpPr>
-        <p:spPr>
-          <a:xfrm>
-            <a:off x="640080" y="1691640"/>
-            <a:ext cx="5349240" cy="3200400"/>
+          <p:cNvPr id="4" name="Trust 1"/>
+          <p:cNvSpPr/>
+          <p:nvPr/>
+        </p:nvSpPr>
+        <p:spPr>
+          <a:xfrm>
+            <a:off x="640080" y="1600200"/>
+            <a:ext cx="3502152" cy="2011680"/>
           </a:xfrm>
           <a:prstGeom prst="roundRect">
             <a:avLst>
-              <a:gd name="adj" fmla="val 2857"/>
+              <a:gd name="adj" fmla="val 4545"/>
             </a:avLst>
           </a:prstGeom>
           <a:solidFill>
@@ -10832,14 +10306,14 @@
       </p:sp>
       <p:sp>
         <p:nvSpPr>
-          <p:cNvPr id="5" name="Demo circle 1"/>
-          <p:cNvSpPr/>
-          <p:nvPr/>
-        </p:nvSpPr>
-        <p:spPr>
-          <a:xfrm>
-            <a:off x="1005840" y="2057400"/>
-            <a:ext cx="822960" cy="822960"/>
+          <p:cNvPr id="5" name="Trust circle 1"/>
+          <p:cNvSpPr/>
+          <p:nvPr/>
+        </p:nvSpPr>
+        <p:spPr>
+          <a:xfrm>
+            <a:off x="914400" y="1874520"/>
+            <a:ext cx="640080" cy="640080"/>
           </a:xfrm>
           <a:prstGeom prst="ellipse">
             <a:avLst/>
@@ -10852,7 +10326,7 @@
       </p:sp>
       <p:pic>
         <p:nvPicPr>
-          <p:cNvPr id="6" name="Demo icon 1" descr="A whole ministry">    </p:cNvPr>
+          <p:cNvPr id="6" name="Trust icon 1" descr="Audit trail and record">    </p:cNvPr>
           <p:cNvPicPr>
             <a:picLocks noChangeAspect="1"/>
           </p:cNvPicPr>
@@ -10866,8 +10340,8 @@
         </p:blipFill>
         <p:spPr>
           <a:xfrm>
-            <a:off x="1216152" y="2267712"/>
-            <a:ext cx="402336" cy="402336"/>
+            <a:off x="1078992" y="2039112"/>
+            <a:ext cx="310896" cy="310896"/>
           </a:xfrm>
           <a:prstGeom prst="rect">
             <a:avLst/>
@@ -10882,8 +10356,8 @@
         </p:nvSpPr>
         <p:spPr>
           <a:xfrm>
-            <a:off x="1005840" y="3063240"/>
-            <a:ext cx="4617720" cy="457200"/>
+            <a:off x="1691640" y="1874520"/>
+            <a:ext cx="2221992" cy="640080"/>
           </a:xfrm>
           <a:prstGeom prst="rect">
             <a:avLst/>
@@ -10899,7 +10373,7 @@
               <a:buNone/>
             </a:pPr>
             <a:r>
-              <a:rPr lang="en-US" sz="2200" b="1" dirty="0">
+              <a:rPr lang="en-US" sz="1700" b="1" dirty="0">
                 <a:solidFill>
                   <a:schemeClr val="tx1"/>
                 </a:solidFill>
@@ -10907,9 +10381,9 @@
                 <a:ea typeface="Cambria" pitchFamily="34" charset="-122"/>
                 <a:cs typeface="Cambria" pitchFamily="34" charset="-120"/>
               </a:rPr>
-              <a:t>A whole ministry</a:t>
-            </a:r>
-            <a:endParaRPr lang="en-US" sz="2200" dirty="0"/>
+              <a:t>Audit trail and record</a:t>
+            </a:r>
+            <a:endParaRPr lang="en-US" sz="1700" dirty="0"/>
           </a:p>
         </p:txBody>
       </p:sp>
@@ -10921,8 +10395,8 @@
         </p:nvSpPr>
         <p:spPr>
           <a:xfrm>
-            <a:off x="1005840" y="3611880"/>
-            <a:ext cx="4617720" cy="1188720"/>
+            <a:off x="914400" y="2651760"/>
+            <a:ext cx="2953512" cy="914400"/>
           </a:xfrm>
           <a:prstGeom prst="rect">
             <a:avLst/>
@@ -10938,31 +10412,31 @@
               <a:buNone/>
             </a:pPr>
             <a:r>
-              <a:rPr lang="en-US" sz="1500" dirty="0">
-                <a:solidFill>
-                  <a:schemeClr val="tx1"/>
-                </a:solidFill>
-              </a:rPr>
-              <a:t>The Ministry of Transport and Communications with its directorates, municipal directorates and autonomous bodies; the real State Budget plans for 2025 to 2027 and a planner and a director for every unit.</a:t>
-            </a:r>
-            <a:endParaRPr lang="en-US" sz="1500" dirty="0"/>
-          </a:p>
-        </p:txBody>
-      </p:sp>
-      <p:sp>
-        <p:nvSpPr>
-          <p:cNvPr id="9" name="Demo card 2"/>
-          <p:cNvSpPr/>
-          <p:nvPr/>
-        </p:nvSpPr>
-        <p:spPr>
-          <a:xfrm>
-            <a:off x="6172200" y="1691640"/>
-            <a:ext cx="5349240" cy="3200400"/>
+              <a:rPr lang="en-US" sz="1400" dirty="0">
+                <a:solidFill>
+                  <a:schemeClr val="tx1"/>
+                </a:solidFill>
+              </a:rPr>
+              <a:t>Every change, every version and every signature of every round, with who and when. Nothing is erased.</a:t>
+            </a:r>
+            <a:endParaRPr lang="en-US" sz="1400" dirty="0"/>
+          </a:p>
+        </p:txBody>
+      </p:sp>
+      <p:sp>
+        <p:nvSpPr>
+          <p:cNvPr id="9" name="Trust 2"/>
+          <p:cNvSpPr/>
+          <p:nvPr/>
+        </p:nvSpPr>
+        <p:spPr>
+          <a:xfrm>
+            <a:off x="4343400" y="1600200"/>
+            <a:ext cx="3502152" cy="2011680"/>
           </a:xfrm>
           <a:prstGeom prst="roundRect">
             <a:avLst>
-              <a:gd name="adj" fmla="val 2857"/>
+              <a:gd name="adj" fmla="val 4545"/>
             </a:avLst>
           </a:prstGeom>
           <a:solidFill>
@@ -10973,14 +10447,14 @@
       </p:sp>
       <p:sp>
         <p:nvSpPr>
-          <p:cNvPr id="10" name="Demo circle 2"/>
-          <p:cNvSpPr/>
-          <p:nvPr/>
-        </p:nvSpPr>
-        <p:spPr>
-          <a:xfrm>
-            <a:off x="6537960" y="2057400"/>
-            <a:ext cx="822960" cy="822960"/>
+          <p:cNvPr id="10" name="Trust circle 2"/>
+          <p:cNvSpPr/>
+          <p:nvPr/>
+        </p:nvSpPr>
+        <p:spPr>
+          <a:xfrm>
+            <a:off x="4617720" y="1874520"/>
+            <a:ext cx="640080" cy="640080"/>
           </a:xfrm>
           <a:prstGeom prst="ellipse">
             <a:avLst/>
@@ -10993,7 +10467,7 @@
       </p:sp>
       <p:pic>
         <p:nvPicPr>
-          <p:cNvPr id="11" name="Demo icon 2" descr="Practise the real flow">    </p:cNvPr>
+          <p:cNvPr id="11" name="Trust icon 2" descr="Role permissions">    </p:cNvPr>
           <p:cNvPicPr>
             <a:picLocks noChangeAspect="1"/>
           </p:cNvPicPr>
@@ -11007,8 +10481,8 @@
         </p:blipFill>
         <p:spPr>
           <a:xfrm>
-            <a:off x="6748272" y="2267712"/>
-            <a:ext cx="402336" cy="402336"/>
+            <a:off x="4782312" y="2039112"/>
+            <a:ext cx="310896" cy="310896"/>
           </a:xfrm>
           <a:prstGeom prst="rect">
             <a:avLst/>
@@ -11023,8 +10497,8 @@
         </p:nvSpPr>
         <p:spPr>
           <a:xfrm>
-            <a:off x="6537960" y="3063240"/>
-            <a:ext cx="4617720" cy="457200"/>
+            <a:off x="5394960" y="1874520"/>
+            <a:ext cx="2221992" cy="640080"/>
           </a:xfrm>
           <a:prstGeom prst="rect">
             <a:avLst/>
@@ -11040,7 +10514,7 @@
               <a:buNone/>
             </a:pPr>
             <a:r>
-              <a:rPr lang="en-US" sz="2200" b="1" dirty="0">
+              <a:rPr lang="en-US" sz="1700" b="1" dirty="0">
                 <a:solidFill>
                   <a:schemeClr val="tx1"/>
                 </a:solidFill>
@@ -11048,9 +10522,9 @@
                 <a:ea typeface="Cambria" pitchFamily="34" charset="-122"/>
                 <a:cs typeface="Cambria" pitchFamily="34" charset="-120"/>
               </a:rPr>
-              <a:t>Practise the real flow</a:t>
-            </a:r>
-            <a:endParaRPr lang="en-US" sz="2200" dirty="0"/>
+              <a:t>Role permissions</a:t>
+            </a:r>
+            <a:endParaRPr lang="en-US" sz="1700" dirty="0"/>
           </a:p>
         </p:txBody>
       </p:sp>
@@ -11062,8 +10536,8 @@
         </p:nvSpPr>
         <p:spPr>
           <a:xfrm>
-            <a:off x="6537960" y="3611880"/>
-            <a:ext cx="4617720" cy="1188720"/>
+            <a:off x="4617720" y="2651760"/>
+            <a:ext cx="2953512" cy="914400"/>
           </a:xfrm>
           <a:prstGeom prst="rect">
             <a:avLst/>
@@ -11079,27 +10553,132 @@
               <a:buNone/>
             </a:pPr>
             <a:r>
-              <a:rPr lang="en-US" sz="1500" dirty="0">
-                <a:solidFill>
-                  <a:schemeClr val="tx1"/>
-                </a:solidFill>
-              </a:rPr>
-              <a:t>Sign in as a planner, a director and the head of a directorate and follow an activity from draft to approved, with the lists, interim cover and signing in order.</a:t>
-            </a:r>
-            <a:endParaRPr lang="en-US" sz="1500" dirty="0"/>
-          </a:p>
-        </p:txBody>
-      </p:sp>
-      <p:sp>
-        <p:nvSpPr>
-          <p:cNvPr id="14" name="Text 9"/>
-          <p:cNvSpPr txBox="1"/>
-          <p:nvPr/>
-        </p:nvSpPr>
-        <p:spPr>
-          <a:xfrm>
-            <a:off x="640080" y="5166360"/>
-            <a:ext cx="10881360" cy="548640"/>
+              <a:rPr lang="en-US" sz="1400" dirty="0">
+                <a:solidFill>
+                  <a:schemeClr val="tx1"/>
+                </a:solidFill>
+              </a:rPr>
+              <a:t>Checked on the server for every action, not only hidden in the menu.</a:t>
+            </a:r>
+            <a:endParaRPr lang="en-US" sz="1400" dirty="0"/>
+          </a:p>
+        </p:txBody>
+      </p:sp>
+      <p:sp>
+        <p:nvSpPr>
+          <p:cNvPr id="14" name="Trust 3"/>
+          <p:cNvSpPr/>
+          <p:nvPr/>
+        </p:nvSpPr>
+        <p:spPr>
+          <a:xfrm>
+            <a:off x="8046720" y="1600200"/>
+            <a:ext cx="3502152" cy="2011680"/>
+          </a:xfrm>
+          <a:prstGeom prst="roundRect">
+            <a:avLst>
+              <a:gd name="adj" fmla="val 4545"/>
+            </a:avLst>
+          </a:prstGeom>
+          <a:solidFill>
+            <a:schemeClr val="bg2"/>
+          </a:solidFill>
+          <a:ln/>
+        </p:spPr>
+      </p:sp>
+      <p:sp>
+        <p:nvSpPr>
+          <p:cNvPr id="15" name="Trust circle 3"/>
+          <p:cNvSpPr/>
+          <p:nvPr/>
+        </p:nvSpPr>
+        <p:spPr>
+          <a:xfrm>
+            <a:off x="8321040" y="1874520"/>
+            <a:ext cx="640080" cy="640080"/>
+          </a:xfrm>
+          <a:prstGeom prst="ellipse">
+            <a:avLst/>
+          </a:prstGeom>
+          <a:solidFill>
+            <a:schemeClr val="accent4"/>
+          </a:solidFill>
+          <a:ln/>
+        </p:spPr>
+      </p:sp>
+      <p:pic>
+        <p:nvPicPr>
+          <p:cNvPr id="16" name="Trust icon 3" descr="Two-factor sign-in">    </p:cNvPr>
+          <p:cNvPicPr>
+            <a:picLocks noChangeAspect="1"/>
+          </p:cNvPicPr>
+          <p:nvPr/>
+        </p:nvPicPr>
+        <p:blipFill>
+          <a:blip r:embed="rId3"/>
+          <a:stretch>
+            <a:fillRect/>
+          </a:stretch>
+        </p:blipFill>
+        <p:spPr>
+          <a:xfrm>
+            <a:off x="8485632" y="2039112"/>
+            <a:ext cx="310896" cy="310896"/>
+          </a:xfrm>
+          <a:prstGeom prst="rect">
+            <a:avLst/>
+          </a:prstGeom>
+        </p:spPr>
+      </p:pic>
+      <p:sp>
+        <p:nvSpPr>
+          <p:cNvPr id="17" name="Text 11"/>
+          <p:cNvSpPr txBox="1"/>
+          <p:nvPr/>
+        </p:nvSpPr>
+        <p:spPr>
+          <a:xfrm>
+            <a:off x="9098280" y="1874520"/>
+            <a:ext cx="2221992" cy="640080"/>
+          </a:xfrm>
+          <a:prstGeom prst="rect">
+            <a:avLst/>
+          </a:prstGeom>
+          <a:noFill/>
+          <a:ln/>
+        </p:spPr>
+        <p:txBody>
+          <a:bodyPr wrap="square" lIns="0" tIns="0" rIns="0" bIns="0" rtlCol="0" anchor="ctr"/>
+          <a:lstStyle/>
+          <a:p>
+            <a:pPr indent="0" marL="0">
+              <a:buNone/>
+            </a:pPr>
+            <a:r>
+              <a:rPr lang="en-US" sz="1700" b="1" dirty="0">
+                <a:solidFill>
+                  <a:schemeClr val="tx1"/>
+                </a:solidFill>
+                <a:latin typeface="Cambria" pitchFamily="34" charset="0"/>
+                <a:ea typeface="Cambria" pitchFamily="34" charset="-122"/>
+                <a:cs typeface="Cambria" pitchFamily="34" charset="-120"/>
+              </a:rPr>
+              <a:t>Two-factor sign-in</a:t>
+            </a:r>
+            <a:endParaRPr lang="en-US" sz="1700" dirty="0"/>
+          </a:p>
+        </p:txBody>
+      </p:sp>
+      <p:sp>
+        <p:nvSpPr>
+          <p:cNvPr id="18" name="Text 12"/>
+          <p:cNvSpPr txBox="1"/>
+          <p:nvPr/>
+        </p:nvSpPr>
+        <p:spPr>
+          <a:xfrm>
+            <a:off x="8321040" y="2651760"/>
+            <a:ext cx="2953512" cy="914400"/>
           </a:xfrm>
           <a:prstGeom prst="rect">
             <a:avLst/>
@@ -11115,12 +10694,435 @@
               <a:buNone/>
             </a:pPr>
             <a:r>
-              <a:rPr lang="en-US" sz="1400" i="1" dirty="0">
-                <a:solidFill>
-                  <a:schemeClr val="accent5"/>
-                </a:solidFill>
-              </a:rPr>
-              <a:t>Loaded and removed by an administrator at Management &gt; Sample Data; real data is never touched. Refused in production.</a:t>
+              <a:rPr lang="en-US" sz="1400" dirty="0">
+                <a:solidFill>
+                  <a:schemeClr val="tx1"/>
+                </a:solidFill>
+              </a:rPr>
+              <a:t>Authenticator codes and recovery codes; required for senior roles.</a:t>
+            </a:r>
+            <a:endParaRPr lang="en-US" sz="1400" dirty="0"/>
+          </a:p>
+        </p:txBody>
+      </p:sp>
+      <p:sp>
+        <p:nvSpPr>
+          <p:cNvPr id="19" name="Trust 4"/>
+          <p:cNvSpPr/>
+          <p:nvPr/>
+        </p:nvSpPr>
+        <p:spPr>
+          <a:xfrm>
+            <a:off x="640080" y="3840480"/>
+            <a:ext cx="3502152" cy="2011680"/>
+          </a:xfrm>
+          <a:prstGeom prst="roundRect">
+            <a:avLst>
+              <a:gd name="adj" fmla="val 4545"/>
+            </a:avLst>
+          </a:prstGeom>
+          <a:solidFill>
+            <a:schemeClr val="bg2"/>
+          </a:solidFill>
+          <a:ln/>
+        </p:spPr>
+      </p:sp>
+      <p:sp>
+        <p:nvSpPr>
+          <p:cNvPr id="20" name="Trust circle 4"/>
+          <p:cNvSpPr/>
+          <p:nvPr/>
+        </p:nvSpPr>
+        <p:spPr>
+          <a:xfrm>
+            <a:off x="914400" y="4114800"/>
+            <a:ext cx="640080" cy="640080"/>
+          </a:xfrm>
+          <a:prstGeom prst="ellipse">
+            <a:avLst/>
+          </a:prstGeom>
+          <a:solidFill>
+            <a:schemeClr val="accent6"/>
+          </a:solidFill>
+          <a:ln/>
+        </p:spPr>
+      </p:sp>
+      <p:pic>
+        <p:nvPicPr>
+          <p:cNvPr id="21" name="Trust icon 4" descr="Closed registration">    </p:cNvPr>
+          <p:cNvPicPr>
+            <a:picLocks noChangeAspect="1"/>
+          </p:cNvPicPr>
+          <p:nvPr/>
+        </p:nvPicPr>
+        <p:blipFill>
+          <a:blip r:embed="rId4"/>
+          <a:stretch>
+            <a:fillRect/>
+          </a:stretch>
+        </p:blipFill>
+        <p:spPr>
+          <a:xfrm>
+            <a:off x="1078992" y="4279392"/>
+            <a:ext cx="310896" cy="310896"/>
+          </a:xfrm>
+          <a:prstGeom prst="rect">
+            <a:avLst/>
+          </a:prstGeom>
+        </p:spPr>
+      </p:pic>
+      <p:sp>
+        <p:nvSpPr>
+          <p:cNvPr id="22" name="Text 15"/>
+          <p:cNvSpPr txBox="1"/>
+          <p:nvPr/>
+        </p:nvSpPr>
+        <p:spPr>
+          <a:xfrm>
+            <a:off x="1691640" y="4114800"/>
+            <a:ext cx="2221992" cy="640080"/>
+          </a:xfrm>
+          <a:prstGeom prst="rect">
+            <a:avLst/>
+          </a:prstGeom>
+          <a:noFill/>
+          <a:ln/>
+        </p:spPr>
+        <p:txBody>
+          <a:bodyPr wrap="square" lIns="0" tIns="0" rIns="0" bIns="0" rtlCol="0" anchor="ctr"/>
+          <a:lstStyle/>
+          <a:p>
+            <a:pPr indent="0" marL="0">
+              <a:buNone/>
+            </a:pPr>
+            <a:r>
+              <a:rPr lang="en-US" sz="1700" b="1" dirty="0">
+                <a:solidFill>
+                  <a:schemeClr val="tx1"/>
+                </a:solidFill>
+                <a:latin typeface="Cambria" pitchFamily="34" charset="0"/>
+                <a:ea typeface="Cambria" pitchFamily="34" charset="-122"/>
+                <a:cs typeface="Cambria" pitchFamily="34" charset="-120"/>
+              </a:rPr>
+              <a:t>Closed registration</a:t>
+            </a:r>
+            <a:endParaRPr lang="en-US" sz="1700" dirty="0"/>
+          </a:p>
+        </p:txBody>
+      </p:sp>
+      <p:sp>
+        <p:nvSpPr>
+          <p:cNvPr id="23" name="Text 16"/>
+          <p:cNvSpPr txBox="1"/>
+          <p:nvPr/>
+        </p:nvSpPr>
+        <p:spPr>
+          <a:xfrm>
+            <a:off x="914400" y="4892040"/>
+            <a:ext cx="2953512" cy="914400"/>
+          </a:xfrm>
+          <a:prstGeom prst="rect">
+            <a:avLst/>
+          </a:prstGeom>
+          <a:noFill/>
+          <a:ln/>
+        </p:spPr>
+        <p:txBody>
+          <a:bodyPr wrap="square" lIns="0" tIns="0" rIns="0" bIns="0" rtlCol="0" anchor="t"/>
+          <a:lstStyle/>
+          <a:p>
+            <a:pPr indent="0" marL="0">
+              <a:buNone/>
+            </a:pPr>
+            <a:r>
+              <a:rPr lang="en-US" sz="1400" dirty="0">
+                <a:solidFill>
+                  <a:schemeClr val="tx1"/>
+                </a:solidFill>
+              </a:rPr>
+              <a:t>No self-sign-up; sign-in attempts are rate-limited.</a:t>
+            </a:r>
+            <a:endParaRPr lang="en-US" sz="1400" dirty="0"/>
+          </a:p>
+        </p:txBody>
+      </p:sp>
+      <p:sp>
+        <p:nvSpPr>
+          <p:cNvPr id="24" name="Trust 5"/>
+          <p:cNvSpPr/>
+          <p:nvPr/>
+        </p:nvSpPr>
+        <p:spPr>
+          <a:xfrm>
+            <a:off x="4343400" y="3840480"/>
+            <a:ext cx="3502152" cy="2011680"/>
+          </a:xfrm>
+          <a:prstGeom prst="roundRect">
+            <a:avLst>
+              <a:gd name="adj" fmla="val 4545"/>
+            </a:avLst>
+          </a:prstGeom>
+          <a:solidFill>
+            <a:schemeClr val="bg2"/>
+          </a:solidFill>
+          <a:ln/>
+        </p:spPr>
+      </p:sp>
+      <p:sp>
+        <p:nvSpPr>
+          <p:cNvPr id="25" name="Trust circle 5"/>
+          <p:cNvSpPr/>
+          <p:nvPr/>
+        </p:nvSpPr>
+        <p:spPr>
+          <a:xfrm>
+            <a:off x="4617720" y="4114800"/>
+            <a:ext cx="640080" cy="640080"/>
+          </a:xfrm>
+          <a:prstGeom prst="ellipse">
+            <a:avLst/>
+          </a:prstGeom>
+          <a:solidFill>
+            <a:schemeClr val="accent5"/>
+          </a:solidFill>
+          <a:ln/>
+        </p:spPr>
+      </p:sp>
+      <p:pic>
+        <p:nvPicPr>
+          <p:cNvPr id="26" name="Trust icon 5" descr="Backups and health">    </p:cNvPr>
+          <p:cNvPicPr>
+            <a:picLocks noChangeAspect="1"/>
+          </p:cNvPicPr>
+          <p:nvPr/>
+        </p:nvPicPr>
+        <p:blipFill>
+          <a:blip r:embed="rId5"/>
+          <a:stretch>
+            <a:fillRect/>
+          </a:stretch>
+        </p:blipFill>
+        <p:spPr>
+          <a:xfrm>
+            <a:off x="4782312" y="4279392"/>
+            <a:ext cx="310896" cy="310896"/>
+          </a:xfrm>
+          <a:prstGeom prst="rect">
+            <a:avLst/>
+          </a:prstGeom>
+        </p:spPr>
+      </p:pic>
+      <p:sp>
+        <p:nvSpPr>
+          <p:cNvPr id="27" name="Text 19"/>
+          <p:cNvSpPr txBox="1"/>
+          <p:nvPr/>
+        </p:nvSpPr>
+        <p:spPr>
+          <a:xfrm>
+            <a:off x="5394960" y="4114800"/>
+            <a:ext cx="2221992" cy="640080"/>
+          </a:xfrm>
+          <a:prstGeom prst="rect">
+            <a:avLst/>
+          </a:prstGeom>
+          <a:noFill/>
+          <a:ln/>
+        </p:spPr>
+        <p:txBody>
+          <a:bodyPr wrap="square" lIns="0" tIns="0" rIns="0" bIns="0" rtlCol="0" anchor="ctr"/>
+          <a:lstStyle/>
+          <a:p>
+            <a:pPr indent="0" marL="0">
+              <a:buNone/>
+            </a:pPr>
+            <a:r>
+              <a:rPr lang="en-US" sz="1700" b="1" dirty="0">
+                <a:solidFill>
+                  <a:schemeClr val="tx1"/>
+                </a:solidFill>
+                <a:latin typeface="Cambria" pitchFamily="34" charset="0"/>
+                <a:ea typeface="Cambria" pitchFamily="34" charset="-122"/>
+                <a:cs typeface="Cambria" pitchFamily="34" charset="-120"/>
+              </a:rPr>
+              <a:t>Backups and health</a:t>
+            </a:r>
+            <a:endParaRPr lang="en-US" sz="1700" dirty="0"/>
+          </a:p>
+        </p:txBody>
+      </p:sp>
+      <p:sp>
+        <p:nvSpPr>
+          <p:cNvPr id="28" name="Text 20"/>
+          <p:cNvSpPr txBox="1"/>
+          <p:nvPr/>
+        </p:nvSpPr>
+        <p:spPr>
+          <a:xfrm>
+            <a:off x="4617720" y="4892040"/>
+            <a:ext cx="2953512" cy="914400"/>
+          </a:xfrm>
+          <a:prstGeom prst="rect">
+            <a:avLst/>
+          </a:prstGeom>
+          <a:noFill/>
+          <a:ln/>
+        </p:spPr>
+        <p:txBody>
+          <a:bodyPr wrap="square" lIns="0" tIns="0" rIns="0" bIns="0" rtlCol="0" anchor="t"/>
+          <a:lstStyle/>
+          <a:p>
+            <a:pPr indent="0" marL="0">
+              <a:buNone/>
+            </a:pPr>
+            <a:r>
+              <a:rPr lang="en-US" sz="1400" dirty="0">
+                <a:solidFill>
+                  <a:schemeClr val="tx1"/>
+                </a:solidFill>
+              </a:rPr>
+              <a:t>Nightly verified backups and a health check for uptime monitoring.</a:t>
+            </a:r>
+            <a:endParaRPr lang="en-US" sz="1400" dirty="0"/>
+          </a:p>
+        </p:txBody>
+      </p:sp>
+      <p:sp>
+        <p:nvSpPr>
+          <p:cNvPr id="29" name="Trust 6"/>
+          <p:cNvSpPr/>
+          <p:nvPr/>
+        </p:nvSpPr>
+        <p:spPr>
+          <a:xfrm>
+            <a:off x="8046720" y="3840480"/>
+            <a:ext cx="3502152" cy="2011680"/>
+          </a:xfrm>
+          <a:prstGeom prst="roundRect">
+            <a:avLst>
+              <a:gd name="adj" fmla="val 4545"/>
+            </a:avLst>
+          </a:prstGeom>
+          <a:solidFill>
+            <a:schemeClr val="bg2"/>
+          </a:solidFill>
+          <a:ln/>
+        </p:spPr>
+      </p:sp>
+      <p:sp>
+        <p:nvSpPr>
+          <p:cNvPr id="30" name="Trust circle 6"/>
+          <p:cNvSpPr/>
+          <p:nvPr/>
+        </p:nvSpPr>
+        <p:spPr>
+          <a:xfrm>
+            <a:off x="8321040" y="4114800"/>
+            <a:ext cx="640080" cy="640080"/>
+          </a:xfrm>
+          <a:prstGeom prst="ellipse">
+            <a:avLst/>
+          </a:prstGeom>
+          <a:solidFill>
+            <a:schemeClr val="accent1"/>
+          </a:solidFill>
+          <a:ln/>
+        </p:spPr>
+      </p:sp>
+      <p:pic>
+        <p:nvPicPr>
+          <p:cNvPr id="31" name="Trust icon 6" descr="Tested">    </p:cNvPr>
+          <p:cNvPicPr>
+            <a:picLocks noChangeAspect="1"/>
+          </p:cNvPicPr>
+          <p:nvPr/>
+        </p:nvPicPr>
+        <p:blipFill>
+          <a:blip r:embed="rId6"/>
+          <a:stretch>
+            <a:fillRect/>
+          </a:stretch>
+        </p:blipFill>
+        <p:spPr>
+          <a:xfrm>
+            <a:off x="8485632" y="4279392"/>
+            <a:ext cx="310896" cy="310896"/>
+          </a:xfrm>
+          <a:prstGeom prst="rect">
+            <a:avLst/>
+          </a:prstGeom>
+        </p:spPr>
+      </p:pic>
+      <p:sp>
+        <p:nvSpPr>
+          <p:cNvPr id="32" name="Text 23"/>
+          <p:cNvSpPr txBox="1"/>
+          <p:nvPr/>
+        </p:nvSpPr>
+        <p:spPr>
+          <a:xfrm>
+            <a:off x="9098280" y="4114800"/>
+            <a:ext cx="2221992" cy="640080"/>
+          </a:xfrm>
+          <a:prstGeom prst="rect">
+            <a:avLst/>
+          </a:prstGeom>
+          <a:noFill/>
+          <a:ln/>
+        </p:spPr>
+        <p:txBody>
+          <a:bodyPr wrap="square" lIns="0" tIns="0" rIns="0" bIns="0" rtlCol="0" anchor="ctr"/>
+          <a:lstStyle/>
+          <a:p>
+            <a:pPr indent="0" marL="0">
+              <a:buNone/>
+            </a:pPr>
+            <a:r>
+              <a:rPr lang="en-US" sz="1700" b="1" dirty="0">
+                <a:solidFill>
+                  <a:schemeClr val="tx1"/>
+                </a:solidFill>
+                <a:latin typeface="Cambria" pitchFamily="34" charset="0"/>
+                <a:ea typeface="Cambria" pitchFamily="34" charset="-122"/>
+                <a:cs typeface="Cambria" pitchFamily="34" charset="-120"/>
+              </a:rPr>
+              <a:t>Tested</a:t>
+            </a:r>
+            <a:endParaRPr lang="en-US" sz="1700" dirty="0"/>
+          </a:p>
+        </p:txBody>
+      </p:sp>
+      <p:sp>
+        <p:nvSpPr>
+          <p:cNvPr id="33" name="Text 24"/>
+          <p:cNvSpPr txBox="1"/>
+          <p:nvPr/>
+        </p:nvSpPr>
+        <p:spPr>
+          <a:xfrm>
+            <a:off x="8321040" y="4892040"/>
+            <a:ext cx="2953512" cy="914400"/>
+          </a:xfrm>
+          <a:prstGeom prst="rect">
+            <a:avLst/>
+          </a:prstGeom>
+          <a:noFill/>
+          <a:ln/>
+        </p:spPr>
+        <p:txBody>
+          <a:bodyPr wrap="square" lIns="0" tIns="0" rIns="0" bIns="0" rtlCol="0" anchor="t"/>
+          <a:lstStyle/>
+          <a:p>
+            <a:pPr indent="0" marL="0">
+              <a:buNone/>
+            </a:pPr>
+            <a:r>
+              <a:rPr lang="en-US" sz="1400" dirty="0">
+                <a:solidFill>
+                  <a:schemeClr val="tx1"/>
+                </a:solidFill>
+              </a:rPr>
+              <a:t>More than 360 automated tests guard the approval and revision rules.</a:t>
             </a:r>
             <a:endParaRPr lang="en-US" sz="1400" dirty="0"/>
           </a:p>
@@ -11198,6 +11200,432 @@
       </p:grpSpPr>
       <p:sp>
         <p:nvSpPr>
+          <p:cNvPr id="2" name="Text 0"/>
+          <p:cNvSpPr/>
+          <p:nvPr>
+            <p:ph idx="100" type="title" hasCustomPrompt="1"/>
+          </p:nvPr>
+        </p:nvSpPr>
+        <p:spPr>
+          <a:xfrm>
+            <a:off x="640080" y="411480"/>
+            <a:ext cx="10911535" cy="868680"/>
+          </a:xfrm>
+          <a:prstGeom prst="rect">
+            <a:avLst/>
+          </a:prstGeom>
+          <a:noFill/>
+          <a:ln/>
+        </p:spPr>
+        <p:txBody>
+          <a:bodyPr wrap="square" lIns="0" tIns="0" rIns="0" bIns="0" rtlCol="0" anchor="ctr"/>
+          <a:lstStyle/>
+          <a:p>
+            <a:pPr algn="l" indent="0" marL="0">
+              <a:buNone/>
+            </a:pPr>
+            <a:r>
+              <a:rPr lang="en-US" sz="3400" b="1" dirty="0">
+                <a:solidFill>
+                  <a:schemeClr val="tx1"/>
+                </a:solidFill>
+              </a:rPr>
+              <a:t>Try it with sample data</a:t>
+            </a:r>
+            <a:endParaRPr lang="en-US" sz="3400" dirty="0"/>
+          </a:p>
+        </p:txBody>
+      </p:sp>
+      <p:sp>
+        <p:nvSpPr>
+          <p:cNvPr id="4" name="Demo card 1"/>
+          <p:cNvSpPr/>
+          <p:nvPr/>
+        </p:nvSpPr>
+        <p:spPr>
+          <a:xfrm>
+            <a:off x="640080" y="1691640"/>
+            <a:ext cx="5349240" cy="3200400"/>
+          </a:xfrm>
+          <a:prstGeom prst="roundRect">
+            <a:avLst>
+              <a:gd name="adj" fmla="val 2857"/>
+            </a:avLst>
+          </a:prstGeom>
+          <a:solidFill>
+            <a:schemeClr val="bg2"/>
+          </a:solidFill>
+          <a:ln/>
+        </p:spPr>
+      </p:sp>
+      <p:sp>
+        <p:nvSpPr>
+          <p:cNvPr id="5" name="Demo circle 1"/>
+          <p:cNvSpPr/>
+          <p:nvPr/>
+        </p:nvSpPr>
+        <p:spPr>
+          <a:xfrm>
+            <a:off x="1005840" y="2057400"/>
+            <a:ext cx="822960" cy="822960"/>
+          </a:xfrm>
+          <a:prstGeom prst="ellipse">
+            <a:avLst/>
+          </a:prstGeom>
+          <a:solidFill>
+            <a:schemeClr val="accent1"/>
+          </a:solidFill>
+          <a:ln/>
+        </p:spPr>
+      </p:sp>
+      <p:pic>
+        <p:nvPicPr>
+          <p:cNvPr id="6" name="Demo icon 1" descr="A whole ministry">    </p:cNvPr>
+          <p:cNvPicPr>
+            <a:picLocks noChangeAspect="1"/>
+          </p:cNvPicPr>
+          <p:nvPr/>
+        </p:nvPicPr>
+        <p:blipFill>
+          <a:blip r:embed="rId1"/>
+          <a:stretch>
+            <a:fillRect/>
+          </a:stretch>
+        </p:blipFill>
+        <p:spPr>
+          <a:xfrm>
+            <a:off x="1216152" y="2267712"/>
+            <a:ext cx="402336" cy="402336"/>
+          </a:xfrm>
+          <a:prstGeom prst="rect">
+            <a:avLst/>
+          </a:prstGeom>
+        </p:spPr>
+      </p:pic>
+      <p:sp>
+        <p:nvSpPr>
+          <p:cNvPr id="7" name="Text 3"/>
+          <p:cNvSpPr txBox="1"/>
+          <p:nvPr/>
+        </p:nvSpPr>
+        <p:spPr>
+          <a:xfrm>
+            <a:off x="1005840" y="3063240"/>
+            <a:ext cx="4617720" cy="457200"/>
+          </a:xfrm>
+          <a:prstGeom prst="rect">
+            <a:avLst/>
+          </a:prstGeom>
+          <a:noFill/>
+          <a:ln/>
+        </p:spPr>
+        <p:txBody>
+          <a:bodyPr wrap="square" lIns="0" tIns="0" rIns="0" bIns="0" rtlCol="0" anchor="ctr"/>
+          <a:lstStyle/>
+          <a:p>
+            <a:pPr indent="0" marL="0">
+              <a:buNone/>
+            </a:pPr>
+            <a:r>
+              <a:rPr lang="en-US" sz="2200" b="1" dirty="0">
+                <a:solidFill>
+                  <a:schemeClr val="tx1"/>
+                </a:solidFill>
+                <a:latin typeface="Cambria" pitchFamily="34" charset="0"/>
+                <a:ea typeface="Cambria" pitchFamily="34" charset="-122"/>
+                <a:cs typeface="Cambria" pitchFamily="34" charset="-120"/>
+              </a:rPr>
+              <a:t>A whole ministry</a:t>
+            </a:r>
+            <a:endParaRPr lang="en-US" sz="2200" dirty="0"/>
+          </a:p>
+        </p:txBody>
+      </p:sp>
+      <p:sp>
+        <p:nvSpPr>
+          <p:cNvPr id="8" name="Text 4"/>
+          <p:cNvSpPr txBox="1"/>
+          <p:nvPr/>
+        </p:nvSpPr>
+        <p:spPr>
+          <a:xfrm>
+            <a:off x="1005840" y="3611880"/>
+            <a:ext cx="4617720" cy="1188720"/>
+          </a:xfrm>
+          <a:prstGeom prst="rect">
+            <a:avLst/>
+          </a:prstGeom>
+          <a:noFill/>
+          <a:ln/>
+        </p:spPr>
+        <p:txBody>
+          <a:bodyPr wrap="square" lIns="0" tIns="0" rIns="0" bIns="0" rtlCol="0" anchor="t"/>
+          <a:lstStyle/>
+          <a:p>
+            <a:pPr indent="0" marL="0">
+              <a:buNone/>
+            </a:pPr>
+            <a:r>
+              <a:rPr lang="en-US" sz="1500" dirty="0">
+                <a:solidFill>
+                  <a:schemeClr val="tx1"/>
+                </a:solidFill>
+              </a:rPr>
+              <a:t>The Ministry of Transport and Communications with its directorates, municipal directorates and autonomous bodies; the real State Budget plans for 2025 to 2027 and a planner and a director for every unit.</a:t>
+            </a:r>
+            <a:endParaRPr lang="en-US" sz="1500" dirty="0"/>
+          </a:p>
+        </p:txBody>
+      </p:sp>
+      <p:sp>
+        <p:nvSpPr>
+          <p:cNvPr id="9" name="Demo card 2"/>
+          <p:cNvSpPr/>
+          <p:nvPr/>
+        </p:nvSpPr>
+        <p:spPr>
+          <a:xfrm>
+            <a:off x="6172200" y="1691640"/>
+            <a:ext cx="5349240" cy="3200400"/>
+          </a:xfrm>
+          <a:prstGeom prst="roundRect">
+            <a:avLst>
+              <a:gd name="adj" fmla="val 2857"/>
+            </a:avLst>
+          </a:prstGeom>
+          <a:solidFill>
+            <a:schemeClr val="bg2"/>
+          </a:solidFill>
+          <a:ln/>
+        </p:spPr>
+      </p:sp>
+      <p:sp>
+        <p:nvSpPr>
+          <p:cNvPr id="10" name="Demo circle 2"/>
+          <p:cNvSpPr/>
+          <p:nvPr/>
+        </p:nvSpPr>
+        <p:spPr>
+          <a:xfrm>
+            <a:off x="6537960" y="2057400"/>
+            <a:ext cx="822960" cy="822960"/>
+          </a:xfrm>
+          <a:prstGeom prst="ellipse">
+            <a:avLst/>
+          </a:prstGeom>
+          <a:solidFill>
+            <a:schemeClr val="accent3"/>
+          </a:solidFill>
+          <a:ln/>
+        </p:spPr>
+      </p:sp>
+      <p:pic>
+        <p:nvPicPr>
+          <p:cNvPr id="11" name="Demo icon 2" descr="Practise the real flow">    </p:cNvPr>
+          <p:cNvPicPr>
+            <a:picLocks noChangeAspect="1"/>
+          </p:cNvPicPr>
+          <p:nvPr/>
+        </p:nvPicPr>
+        <p:blipFill>
+          <a:blip r:embed="rId2"/>
+          <a:stretch>
+            <a:fillRect/>
+          </a:stretch>
+        </p:blipFill>
+        <p:spPr>
+          <a:xfrm>
+            <a:off x="6748272" y="2267712"/>
+            <a:ext cx="402336" cy="402336"/>
+          </a:xfrm>
+          <a:prstGeom prst="rect">
+            <a:avLst/>
+          </a:prstGeom>
+        </p:spPr>
+      </p:pic>
+      <p:sp>
+        <p:nvSpPr>
+          <p:cNvPr id="12" name="Text 7"/>
+          <p:cNvSpPr txBox="1"/>
+          <p:nvPr/>
+        </p:nvSpPr>
+        <p:spPr>
+          <a:xfrm>
+            <a:off x="6537960" y="3063240"/>
+            <a:ext cx="4617720" cy="457200"/>
+          </a:xfrm>
+          <a:prstGeom prst="rect">
+            <a:avLst/>
+          </a:prstGeom>
+          <a:noFill/>
+          <a:ln/>
+        </p:spPr>
+        <p:txBody>
+          <a:bodyPr wrap="square" lIns="0" tIns="0" rIns="0" bIns="0" rtlCol="0" anchor="ctr"/>
+          <a:lstStyle/>
+          <a:p>
+            <a:pPr indent="0" marL="0">
+              <a:buNone/>
+            </a:pPr>
+            <a:r>
+              <a:rPr lang="en-US" sz="2200" b="1" dirty="0">
+                <a:solidFill>
+                  <a:schemeClr val="tx1"/>
+                </a:solidFill>
+                <a:latin typeface="Cambria" pitchFamily="34" charset="0"/>
+                <a:ea typeface="Cambria" pitchFamily="34" charset="-122"/>
+                <a:cs typeface="Cambria" pitchFamily="34" charset="-120"/>
+              </a:rPr>
+              <a:t>Practise the real flow</a:t>
+            </a:r>
+            <a:endParaRPr lang="en-US" sz="2200" dirty="0"/>
+          </a:p>
+        </p:txBody>
+      </p:sp>
+      <p:sp>
+        <p:nvSpPr>
+          <p:cNvPr id="13" name="Text 8"/>
+          <p:cNvSpPr txBox="1"/>
+          <p:nvPr/>
+        </p:nvSpPr>
+        <p:spPr>
+          <a:xfrm>
+            <a:off x="6537960" y="3611880"/>
+            <a:ext cx="4617720" cy="1188720"/>
+          </a:xfrm>
+          <a:prstGeom prst="rect">
+            <a:avLst/>
+          </a:prstGeom>
+          <a:noFill/>
+          <a:ln/>
+        </p:spPr>
+        <p:txBody>
+          <a:bodyPr wrap="square" lIns="0" tIns="0" rIns="0" bIns="0" rtlCol="0" anchor="t"/>
+          <a:lstStyle/>
+          <a:p>
+            <a:pPr indent="0" marL="0">
+              <a:buNone/>
+            </a:pPr>
+            <a:r>
+              <a:rPr lang="en-US" sz="1500" dirty="0">
+                <a:solidFill>
+                  <a:schemeClr val="tx1"/>
+                </a:solidFill>
+              </a:rPr>
+              <a:t>Sign in as a planner, a director and the head of a directorate and follow an activity from draft to approved, with the lists, interim cover and signing in order.</a:t>
+            </a:r>
+            <a:endParaRPr lang="en-US" sz="1500" dirty="0"/>
+          </a:p>
+        </p:txBody>
+      </p:sp>
+      <p:sp>
+        <p:nvSpPr>
+          <p:cNvPr id="14" name="Text 9"/>
+          <p:cNvSpPr txBox="1"/>
+          <p:nvPr/>
+        </p:nvSpPr>
+        <p:spPr>
+          <a:xfrm>
+            <a:off x="640080" y="5166360"/>
+            <a:ext cx="10881360" cy="548640"/>
+          </a:xfrm>
+          <a:prstGeom prst="rect">
+            <a:avLst/>
+          </a:prstGeom>
+          <a:noFill/>
+          <a:ln/>
+        </p:spPr>
+        <p:txBody>
+          <a:bodyPr wrap="square" lIns="0" tIns="0" rIns="0" bIns="0" rtlCol="0" anchor="t"/>
+          <a:lstStyle/>
+          <a:p>
+            <a:pPr indent="0" marL="0">
+              <a:buNone/>
+            </a:pPr>
+            <a:r>
+              <a:rPr lang="en-US" sz="1400" i="1" dirty="0">
+                <a:solidFill>
+                  <a:schemeClr val="accent5"/>
+                </a:solidFill>
+              </a:rPr>
+              <a:t>Loaded and removed by an administrator at Management &gt; Sample Data; real data is never touched. Refused in production.</a:t>
+            </a:r>
+            <a:endParaRPr lang="en-US" sz="1400" dirty="0"/>
+          </a:p>
+        </p:txBody>
+      </p:sp>
+      <p:sp>
+        <p:nvSpPr>
+          <p:cNvPr id="25" name="Slide Number Placeholder 0"/>
+          <p:cNvSpPr>
+            <a:spLocks noGrp="1"/>
+          </p:cNvSpPr>
+          <p:nvPr>
+            <p:ph type="sldNum" sz="quarter" idx="4294967295"/>
+          </p:nvPr>
+        </p:nvSpPr>
+        <p:spPr>
+          <a:xfrm>
+            <a:off x="11002975" y="6355080"/>
+            <a:ext cx="548640" cy="274320"/>
+          </a:xfrm>
+          <a:prstGeom prst="rect">
+            <a:avLst/>
+          </a:prstGeom>
+          <a:extLst>
+            <a:ext uri="{C572A759-6A51-4108-AA02-DFA0A04FC94B}">
+              <ma14:wrappingTextBoxFlag xmlns:ma14="http://schemas.microsoft.com/office/mac/drawingml/2011/main" val="0"/>
+            </a:ext>
+          </a:extLst>
+        </p:spPr>
+        <p:txBody>
+          <a:bodyPr/>
+          <a:lstStyle>
+            <a:lvl1pPr>
+              <a:defRPr sz="1000">
+                <a:solidFill>
+                  <a:schemeClr val="accent5"/>
+                </a:solidFill>
+              </a:defRPr>
+            </a:lvl1pPr>
+          </a:lstStyle>
+          <a:p>
+            <a:pPr algn="r"/>
+            <a:fld id="{F7021451-1387-4CA6-816F-3879F97B5CBC}" type="slidenum">
+              <a:rPr b="0" lang="en-US"/>
+              <a:t>21</a:t>
+            </a:fld>
+            <a:endParaRPr lang="en-US"/>
+          </a:p>
+        </p:txBody>
+      </p:sp>
+    </p:spTree>
+  </p:cSld>
+  <p:clrMapOvr>
+    <a:masterClrMapping/>
+  </p:clrMapOvr>
+</p:sld>
+</file>
+
+<file path=ppt/slides/slide22.xml><?xml version="1.0" encoding="utf-8"?>
+<p:sld xmlns:a="http://schemas.openxmlformats.org/drawingml/2006/main" xmlns:r="http://schemas.openxmlformats.org/officeDocument/2006/relationships" xmlns:p="http://schemas.openxmlformats.org/presentationml/2006/main">
+  <p:cSld name="Slide 22">
+    <p:spTree>
+      <p:nvGrpSpPr>
+        <p:cNvPr id="1" name=""/>
+        <p:cNvGrpSpPr/>
+        <p:nvPr/>
+      </p:nvGrpSpPr>
+      <p:grpSpPr>
+        <a:xfrm>
+          <a:off x="0" y="0"/>
+          <a:ext cx="0" cy="0"/>
+          <a:chOff x="0" y="0"/>
+          <a:chExt cx="0" cy="0"/>
+        </a:xfrm>
+      </p:grpSpPr>
+      <p:sp>
+        <p:nvSpPr>
           <p:cNvPr id="2" name="Text 1"/>
           <p:cNvSpPr/>
           <p:nvPr>
@@ -12151,7 +12579,7 @@
                   <a:schemeClr val="tx1"/>
                 </a:solidFill>
               </a:rPr>
-              <a:t>The budget pays for it</a:t>
+              <a:t>Revisions keep it true</a:t>
             </a:r>
             <a:endParaRPr lang="en-US" sz="1600" dirty="0"/>
           </a:p>
@@ -12165,7 +12593,7 @@
                   <a:schemeClr val="tx1"/>
                 </a:solidFill>
               </a:rPr>
-              <a:t>The envelope received, shared over the approved plan</a:t>
+              <a:t>A change is a new version, approved again</a:t>
             </a:r>
             <a:endParaRPr lang="en-US" sz="1600" dirty="0"/>
           </a:p>
@@ -13062,7 +13490,7 @@
                 <a:ea typeface="Cambria" pitchFamily="34" charset="-122"/>
                 <a:cs typeface="Cambria" pitchFamily="34" charset="-120"/>
               </a:rPr>
-              <a:t>Fund</a:t>
+              <a:t>Carry out</a:t>
             </a:r>
             <a:endParaRPr lang="en-US" sz="2200" dirty="0"/>
           </a:p>
@@ -13098,7 +13526,7 @@
                   <a:schemeClr val="tx1"/>
                 </a:solidFill>
               </a:rPr>
-              <a:t>The institution registers the envelope it receives and shares it over the approved plan.</a:t>
+              <a:t>Units report spending and indicators inside the monthly and quarterly windows.</a:t>
             </a:r>
             <a:endParaRPr lang="en-US" sz="1500" dirty="0"/>
           </a:p>
@@ -13215,7 +13643,7 @@
                 <a:ea typeface="Cambria" pitchFamily="34" charset="-122"/>
                 <a:cs typeface="Cambria" pitchFamily="34" charset="-120"/>
               </a:rPr>
-              <a:t>Carry out</a:t>
+              <a:t>Report</a:t>
             </a:r>
             <a:endParaRPr lang="en-US" sz="2200" dirty="0"/>
           </a:p>
@@ -13251,7 +13679,7 @@
                   <a:schemeClr val="tx1"/>
                 </a:solidFill>
               </a:rPr>
-              <a:t>Units report spending and indicators inside the monthly and quarterly windows.</a:t>
+              <a:t>Others verify, directors compile the quarter, and the reports are printed.</a:t>
             </a:r>
             <a:endParaRPr lang="en-US" sz="1500" dirty="0"/>
           </a:p>
@@ -13368,7 +13796,7 @@
                 <a:ea typeface="Cambria" pitchFamily="34" charset="-122"/>
                 <a:cs typeface="Cambria" pitchFamily="34" charset="-120"/>
               </a:rPr>
-              <a:t>Report</a:t>
+              <a:t>Revise</a:t>
             </a:r>
             <a:endParaRPr lang="en-US" sz="2200" dirty="0"/>
           </a:p>
@@ -13404,7 +13832,7 @@
                   <a:schemeClr val="tx1"/>
                 </a:solidFill>
               </a:rPr>
-              <a:t>Others verify, directors compile the quarter, and the reports are printed.</a:t>
+              <a:t>When an approved activity must change, a revision makes a new version and goes through the approval again.</a:t>
             </a:r>
             <a:endParaRPr lang="en-US" sz="1500" dirty="0"/>
           </a:p>
@@ -16280,7 +16708,7 @@
                   <a:schemeClr val="tx1"/>
                 </a:solidFill>
               </a:rPr>
-              <a:t>Locked once approved</a:t>
+              <a:t>Changed by revision</a:t>
             </a:r>
             <a:endParaRPr lang="en-US" sz="1500" dirty="0"/>
           </a:p>
@@ -16294,7 +16722,7 @@
                   <a:schemeClr val="tx1"/>
                 </a:solidFill>
               </a:rPr>
-              <a:t>An approved activity is not edited. Reopening it needs a written reason.</a:t>
+              <a:t>An approved activity is not edited. A revision, with a reason, makes a new version.</a:t>
             </a:r>
             <a:endParaRPr lang="en-US" sz="1500" dirty="0"/>
           </a:p>

--- a/docs/Sistema-PAA-apresentacao-v5.pptx
+++ b/docs/Sistema-PAA-apresentacao-v5.pptx
@@ -128,26 +128,26 @@
   <p:extLst>
     <p:ext uri="{521415D9-36F7-43E2-AB2F-B90AF26B5E84}">
       <p14:sectionLst xmlns:p14="http://schemas.microsoft.com/office/powerpoint/2010/main">
-        <p14:section name="The plan" id="{135eb730-0567-c8cb-ebf5-e1d8f9a9e67c}">
+        <p14:section name="The plan" id="{f7881d82-e771-d009-9672-2baee1fc3e71}">
           <p14:sldIdLst>
             <p14:sldId id="256"/>
             <p14:sldId id="257"/>
             <p14:sldId id="258"/>
           </p14:sldIdLst>
         </p14:section>
-        <p14:section name="The year of the plan" id="{42c82ed5-279f-e903-380d-d40f3e14b482}">
+        <p14:section name="The year of the plan" id="{7dd66384-dfaf-d960-b472-0b947d8147ac}">
           <p14:sldIdLst>
             <p14:sldId id="259"/>
             <p14:sldId id="260"/>
           </p14:sldIdLst>
         </p14:section>
-        <p14:section name="Writing the plan" id="{6d9833ef-bb5d-4d44-2131-46d8e13ce928}">
+        <p14:section name="Writing the plan" id="{4b73b138-0d83-4930-4a1e-7dc601a517cd}">
           <p14:sldIdLst>
             <p14:sldId id="261"/>
             <p14:sldId id="262"/>
           </p14:sldIdLst>
         </p14:section>
-        <p14:section name="Approving the plan" id="{b85aa03d-e4ff-86e4-e89a-b74d006b0319}">
+        <p14:section name="Approving the plan" id="{f1bea7d9-1865-1215-5b7c-957cf5e74d95}">
           <p14:sldIdLst>
             <p14:sldId id="263"/>
             <p14:sldId id="264"/>
@@ -156,14 +156,14 @@
             <p14:sldId id="267"/>
           </p14:sldIdLst>
         </p14:section>
-        <p14:section name="Changing and carrying out the plan" id="{d1557759-3146-1557-b94a-ba9cc53245dd}">
+        <p14:section name="Changing and carrying out the plan" id="{ba74a230-9775-08ba-dcec-6a417c8a0d3e}">
           <p14:sldIdLst>
             <p14:sldId id="268"/>
             <p14:sldId id="269"/>
             <p14:sldId id="270"/>
           </p14:sldIdLst>
         </p14:section>
-        <p14:section name="Reporting and trust" id="{6566bcdf-0182-c559-3200-079e1a3dc756}">
+        <p14:section name="Reporting and trust" id="{ed6b6292-d55a-7d0e-5138-cbee62921b1a}">
           <p14:sldIdLst>
             <p14:sldId id="271"/>
             <p14:sldId id="272"/>
@@ -173,7 +173,7 @@
             <p14:sldId id="276"/>
           </p14:sldIdLst>
         </p14:section>
-        <p14:section name="Next" id="{56bb5ab1-c75a-0f86-7ff5-1a0cff3463fd}">
+        <p14:section name="Next" id="{682f1362-ddd5-4486-f04c-e5f660ee32a0}">
           <p14:sldIdLst>
             <p14:sldId id="277"/>
           </p14:sldIdLst>
@@ -1726,7 +1726,7 @@
           <a:p>
             <a:r>
               <a:rPr lang="en-US" dirty="0"/>
-              <a:t>An administrator loads the optional sample at Management, Sample Data: a ministry with its directorates, municipal directorates and autonomous bodies, each with its planner and its director. Purging removes only the sample.</a:t>
+              <a:t>An administrator loads the optional sample at Management, Sample Data: a ministry with its directorates, municipal directorates and autonomous bodies, each with its technical officer and its director. Purging removes only the sample.</a:t>
             </a:r>
             <a:endParaRPr lang="en-US" dirty="0"/>
           </a:p>
@@ -2254,7 +2254,7 @@
           <a:p>
             <a:r>
               <a:rPr lang="en-US" dirty="0"/>
-              <a:t>Every unit has its own people: a planner who prepares and a director who certifies. A unit sees its own activities and those of the units below it. Tabs separate drafts and returned work, activities in review, approved ones, and the ones that need my action. At the start of a year the previous year's plan can be copied as drafts, once.</a:t>
+              <a:t>Every unit has its own people: a technical officer who prepares and a director who certifies. A unit sees its own activities and those of the units below it. Tabs separate drafts and returned work, activities in review, approved ones, and the ones that need my action. At the start of a year the previous year's plan can be copied as drafts, once.</a:t>
             </a:r>
             <a:endParaRPr lang="en-US" dirty="0"/>
           </a:p>
@@ -7628,7 +7628,7 @@
       </p:sp>
       <p:pic>
         <p:nvPicPr>
-          <p:cNvPr id="21" name="Role icon 4" descr="Planner">    </p:cNvPr>
+          <p:cNvPr id="21" name="Role icon 4" descr="Technical officer">    </p:cNvPr>
           <p:cNvPicPr>
             <a:picLocks noChangeAspect="1"/>
           </p:cNvPicPr>
@@ -7683,7 +7683,7 @@
                 <a:ea typeface="Cambria" pitchFamily="34" charset="-122"/>
                 <a:cs typeface="Cambria" pitchFamily="34" charset="-120"/>
               </a:rPr>
-              <a:t>Planner</a:t>
+              <a:t>Technical officer</a:t>
             </a:r>
             <a:endParaRPr lang="en-US" sz="1700" dirty="0"/>
           </a:p>
@@ -11371,7 +11371,7 @@
                   <a:schemeClr val="tx1"/>
                 </a:solidFill>
               </a:rPr>
-              <a:t>The Ministry of Transport and Communications with its directorates, municipal directorates and autonomous bodies; the real State Budget plans for 2025 to 2027 and a planner and a director for every unit.</a:t>
+              <a:t>The Ministry of Transport and Communications with its directorates, municipal directorates and autonomous bodies; the real State Budget plans for 2025 to 2027 and a technical officer and a director for every unit.</a:t>
             </a:r>
             <a:endParaRPr lang="en-US" sz="1500" dirty="0"/>
           </a:p>
@@ -11512,7 +11512,7 @@
                   <a:schemeClr val="tx1"/>
                 </a:solidFill>
               </a:rPr>
-              <a:t>Sign in as a planner, a director and the head of a directorate and follow an activity from draft to approved, with the lists, interim cover and signing in order.</a:t>
+              <a:t>Sign in as a technical officer, a director and the head of a directorate and follow an activity from draft to approved, with the lists, interim cover and signing in order.</a:t>
             </a:r>
             <a:endParaRPr lang="en-US" sz="1500" dirty="0"/>
           </a:p>
@@ -11868,7 +11868,7 @@
                   <a:schemeClr val="bg1"/>
                 </a:solidFill>
               </a:rPr>
-              <a:t>Load the real structure and people, set the windows, and run one full plan with its own planners and director.</a:t>
+              <a:t>Load the real structure and people, set the windows, and run one full plan with its own technical officers and director.</a:t>
             </a:r>
             <a:endParaRPr lang="en-US" sz="2200" dirty="0"/>
           </a:p>
@@ -15323,7 +15323,7 @@
                   <a:schemeClr val="tx1"/>
                 </a:solidFill>
               </a:rPr>
-              <a:t>Each unit has a planner and a director; what a person sees and writes follows their unit.</a:t>
+              <a:t>Each unit has a technical officer and a director; what a person sees and writes follows their unit.</a:t>
             </a:r>
             <a:endParaRPr lang="en-US" sz="1800" dirty="0"/>
           </a:p>
@@ -15897,7 +15897,7 @@
                   <a:schemeClr val="accent3"/>
                 </a:solidFill>
               </a:rPr>
-              <a:t>Planner or director</a:t>
+              <a:t>Technical officer or director</a:t>
             </a:r>
             <a:endParaRPr lang="en-US" sz="1300" dirty="0"/>
           </a:p>
